--- a/reference/archie/presentations/NPQG Fundamentals - Point Potential.pptx
+++ b/reference/archie/presentations/NPQG Fundamentals - Point Potential.pptx
@@ -6,7 +6,7 @@
     <p:sldMasterId id="2147483664" r:id="rId2"/>
   </p:sldMasterIdLst>
   <p:notesMasterIdLst>
-    <p:notesMasterId r:id="rId19"/>
+    <p:notesMasterId r:id="rId18"/>
   </p:notesMasterIdLst>
   <p:sldIdLst>
     <p:sldId id="808" r:id="rId3"/>
@@ -24,7 +24,6 @@
     <p:sldId id="821" r:id="rId15"/>
     <p:sldId id="822" r:id="rId16"/>
     <p:sldId id="824" r:id="rId17"/>
-    <p:sldId id="825" r:id="rId18"/>
   </p:sldIdLst>
   <p:sldSz cx="12192000" cy="6858000"/>
   <p:notesSz cx="6858000" cy="9144000"/>
@@ -224,7 +223,7 @@
           <a:p>
             <a:fld id="{BBBDA440-6FDE-5E41-BA40-A3C0E02BAB9F}" type="datetimeFigureOut">
               <a:rPr lang="en-US" smtClean="0"/>
-              <a:t>1/8/26</a:t>
+              <a:t>7/3/26</a:t>
             </a:fld>
             <a:endParaRPr lang="en-US"/>
           </a:p>
@@ -1505,174 +1504,6 @@
 </p:notes>
 </file>
 
-<file path=ppt/notesSlides/notesSlide15.xml><?xml version="1.0" encoding="utf-8"?>
-<p:notes xmlns:a="http://schemas.openxmlformats.org/drawingml/2006/main" xmlns:r="http://schemas.openxmlformats.org/officeDocument/2006/relationships" xmlns:p="http://schemas.openxmlformats.org/presentationml/2006/main">
-  <p:cSld>
-    <p:spTree>
-      <p:nvGrpSpPr>
-        <p:cNvPr id="1" name="">
-          <a:extLst>
-            <a:ext uri="{FF2B5EF4-FFF2-40B4-BE49-F238E27FC236}">
-              <a16:creationId xmlns:a16="http://schemas.microsoft.com/office/drawing/2014/main" id="{53DFF647-B513-8985-D124-64E634D007D1}"/>
-            </a:ext>
-          </a:extLst>
-        </p:cNvPr>
-        <p:cNvGrpSpPr/>
-        <p:nvPr/>
-      </p:nvGrpSpPr>
-      <p:grpSpPr>
-        <a:xfrm>
-          <a:off x="0" y="0"/>
-          <a:ext cx="0" cy="0"/>
-          <a:chOff x="0" y="0"/>
-          <a:chExt cx="0" cy="0"/>
-        </a:xfrm>
-      </p:grpSpPr>
-      <p:sp>
-        <p:nvSpPr>
-          <p:cNvPr id="2" name="Slide Image Placeholder 1">
-            <a:extLst>
-              <a:ext uri="{FF2B5EF4-FFF2-40B4-BE49-F238E27FC236}">
-                <a16:creationId xmlns:a16="http://schemas.microsoft.com/office/drawing/2014/main" id="{CFF50C6C-CC32-74BF-6DF9-0F5E02C5D72F}"/>
-              </a:ext>
-            </a:extLst>
-          </p:cNvPr>
-          <p:cNvSpPr>
-            <a:spLocks noGrp="1" noRot="1" noChangeAspect="1"/>
-          </p:cNvSpPr>
-          <p:nvPr>
-            <p:ph type="sldImg"/>
-          </p:nvPr>
-        </p:nvSpPr>
-        <p:spPr/>
-      </p:sp>
-      <p:sp>
-        <p:nvSpPr>
-          <p:cNvPr id="3" name="Notes Placeholder 2">
-            <a:extLst>
-              <a:ext uri="{FF2B5EF4-FFF2-40B4-BE49-F238E27FC236}">
-                <a16:creationId xmlns:a16="http://schemas.microsoft.com/office/drawing/2014/main" id="{9E18805E-07A4-EABE-064F-F83A89F23CDE}"/>
-              </a:ext>
-            </a:extLst>
-          </p:cNvPr>
-          <p:cNvSpPr>
-            <a:spLocks noGrp="1"/>
-          </p:cNvSpPr>
-          <p:nvPr>
-            <p:ph type="body" idx="1"/>
-          </p:nvPr>
-        </p:nvSpPr>
-        <p:spPr/>
-        <p:txBody>
-          <a:bodyPr/>
-          <a:lstStyle/>
-          <a:p>
-            <a:endParaRPr lang="en-US" dirty="0"/>
-          </a:p>
-        </p:txBody>
-      </p:sp>
-      <p:sp>
-        <p:nvSpPr>
-          <p:cNvPr id="4" name="Slide Number Placeholder 3">
-            <a:extLst>
-              <a:ext uri="{FF2B5EF4-FFF2-40B4-BE49-F238E27FC236}">
-                <a16:creationId xmlns:a16="http://schemas.microsoft.com/office/drawing/2014/main" id="{30FEC9AF-9433-3974-E122-9747BABEA03E}"/>
-              </a:ext>
-            </a:extLst>
-          </p:cNvPr>
-          <p:cNvSpPr>
-            <a:spLocks noGrp="1"/>
-          </p:cNvSpPr>
-          <p:nvPr>
-            <p:ph type="sldNum" sz="quarter" idx="5"/>
-          </p:nvPr>
-        </p:nvSpPr>
-        <p:spPr/>
-        <p:txBody>
-          <a:bodyPr/>
-          <a:lstStyle/>
-          <a:p>
-            <a:pPr marL="0" marR="0" lvl="0" indent="0" algn="r" defTabSz="914400" rtl="0" eaLnBrk="1" fontAlgn="auto" latinLnBrk="0" hangingPunct="1">
-              <a:lnSpc>
-                <a:spcPct val="100000"/>
-              </a:lnSpc>
-              <a:spcBef>
-                <a:spcPts val="0"/>
-              </a:spcBef>
-              <a:spcAft>
-                <a:spcPts val="0"/>
-              </a:spcAft>
-              <a:buClrTx/>
-              <a:buSzTx/>
-              <a:buFontTx/>
-              <a:buNone/>
-              <a:tabLst/>
-              <a:defRPr/>
-            </a:pPr>
-            <a:fld id="{4DC398A3-AF21-A342-B6A8-6929C36BB1BF}" type="slidenum">
-              <a:rPr kumimoji="0" lang="en-US" sz="1200" b="0" i="0" u="none" strike="noStrike" kern="1200" cap="none" spc="0" normalizeH="0" baseline="0" noProof="0" smtClean="0">
-                <a:ln>
-                  <a:noFill/>
-                </a:ln>
-                <a:solidFill>
-                  <a:prstClr val="black"/>
-                </a:solidFill>
-                <a:effectLst/>
-                <a:uLnTx/>
-                <a:uFillTx/>
-                <a:latin typeface="Calibri" panose="020F0502020204030204"/>
-                <a:ea typeface="+mn-ea"/>
-                <a:cs typeface="+mn-cs"/>
-              </a:rPr>
-              <a:pPr marL="0" marR="0" lvl="0" indent="0" algn="r" defTabSz="914400" rtl="0" eaLnBrk="1" fontAlgn="auto" latinLnBrk="0" hangingPunct="1">
-                <a:lnSpc>
-                  <a:spcPct val="100000"/>
-                </a:lnSpc>
-                <a:spcBef>
-                  <a:spcPts val="0"/>
-                </a:spcBef>
-                <a:spcAft>
-                  <a:spcPts val="0"/>
-                </a:spcAft>
-                <a:buClrTx/>
-                <a:buSzTx/>
-                <a:buFontTx/>
-                <a:buNone/>
-                <a:tabLst/>
-                <a:defRPr/>
-              </a:pPr>
-              <a:t>16</a:t>
-            </a:fld>
-            <a:endParaRPr kumimoji="0" lang="en-US" sz="1200" b="0" i="0" u="none" strike="noStrike" kern="1200" cap="none" spc="0" normalizeH="0" baseline="0" noProof="0">
-              <a:ln>
-                <a:noFill/>
-              </a:ln>
-              <a:solidFill>
-                <a:prstClr val="black"/>
-              </a:solidFill>
-              <a:effectLst/>
-              <a:uLnTx/>
-              <a:uFillTx/>
-              <a:latin typeface="Calibri" panose="020F0502020204030204"/>
-              <a:ea typeface="+mn-ea"/>
-              <a:cs typeface="+mn-cs"/>
-            </a:endParaRPr>
-          </a:p>
-        </p:txBody>
-      </p:sp>
-    </p:spTree>
-    <p:extLst>
-      <p:ext uri="{BB962C8B-B14F-4D97-AF65-F5344CB8AC3E}">
-        <p14:creationId xmlns:p14="http://schemas.microsoft.com/office/powerpoint/2010/main" val="1760488009"/>
-      </p:ext>
-    </p:extLst>
-  </p:cSld>
-  <p:clrMapOvr>
-    <a:masterClrMapping/>
-  </p:clrMapOvr>
-</p:notes>
-</file>
-
 <file path=ppt/notesSlides/notesSlide2.xml><?xml version="1.0" encoding="utf-8"?>
 <p:notes xmlns:a="http://schemas.openxmlformats.org/drawingml/2006/main" xmlns:r="http://schemas.openxmlformats.org/officeDocument/2006/relationships" xmlns:p="http://schemas.openxmlformats.org/presentationml/2006/main">
   <p:cSld>
@@ -2996,7 +2827,7 @@
           <a:p>
             <a:fld id="{CB70D3E6-D921-5B44-AC8D-B7FDAFC8A532}" type="datetimeFigureOut">
               <a:rPr lang="en-US" smtClean="0"/>
-              <a:t>1/8/26</a:t>
+              <a:t>7/3/26</a:t>
             </a:fld>
             <a:endParaRPr lang="en-US"/>
           </a:p>
@@ -3194,7 +3025,7 @@
           <a:p>
             <a:fld id="{CB70D3E6-D921-5B44-AC8D-B7FDAFC8A532}" type="datetimeFigureOut">
               <a:rPr lang="en-US" smtClean="0"/>
-              <a:t>1/8/26</a:t>
+              <a:t>7/3/26</a:t>
             </a:fld>
             <a:endParaRPr lang="en-US"/>
           </a:p>
@@ -3402,7 +3233,7 @@
           <a:p>
             <a:fld id="{CB70D3E6-D921-5B44-AC8D-B7FDAFC8A532}" type="datetimeFigureOut">
               <a:rPr lang="en-US" smtClean="0"/>
-              <a:t>1/8/26</a:t>
+              <a:t>7/3/26</a:t>
             </a:fld>
             <a:endParaRPr lang="en-US"/>
           </a:p>
@@ -3622,7 +3453,7 @@
           <a:p>
             <a:fld id="{B1CFC895-F8E0-4049-8BEE-E5499394E46C}" type="datetime1">
               <a:rPr lang="en-US" smtClean="0"/>
-              <a:t>1/8/26</a:t>
+              <a:t>7/3/26</a:t>
             </a:fld>
             <a:endParaRPr lang="en-US"/>
           </a:p>
@@ -3837,7 +3668,7 @@
           <a:p>
             <a:fld id="{A91F55E2-A889-F24B-B1FE-1E878178F308}" type="datetime1">
               <a:rPr lang="en-US" smtClean="0"/>
-              <a:t>1/8/26</a:t>
+              <a:t>7/3/26</a:t>
             </a:fld>
             <a:endParaRPr lang="en-US"/>
           </a:p>
@@ -3986,7 +3817,7 @@
           <a:p>
             <a:fld id="{C6E8461C-3391-334C-9885-001B32D724C4}" type="datetime1">
               <a:rPr lang="en-US" smtClean="0"/>
-              <a:t>1/8/26</a:t>
+              <a:t>7/3/26</a:t>
             </a:fld>
             <a:endParaRPr lang="en-US"/>
           </a:p>
@@ -4191,7 +4022,7 @@
           <a:p>
             <a:fld id="{CB70D3E6-D921-5B44-AC8D-B7FDAFC8A532}" type="datetimeFigureOut">
               <a:rPr lang="en-US" smtClean="0"/>
-              <a:t>1/8/26</a:t>
+              <a:t>7/3/26</a:t>
             </a:fld>
             <a:endParaRPr lang="en-US"/>
           </a:p>
@@ -4466,7 +4297,7 @@
           <a:p>
             <a:fld id="{CB70D3E6-D921-5B44-AC8D-B7FDAFC8A532}" type="datetimeFigureOut">
               <a:rPr lang="en-US" smtClean="0"/>
-              <a:t>1/8/26</a:t>
+              <a:t>7/3/26</a:t>
             </a:fld>
             <a:endParaRPr lang="en-US"/>
           </a:p>
@@ -4731,7 +4562,7 @@
           <a:p>
             <a:fld id="{CB70D3E6-D921-5B44-AC8D-B7FDAFC8A532}" type="datetimeFigureOut">
               <a:rPr lang="en-US" smtClean="0"/>
-              <a:t>1/8/26</a:t>
+              <a:t>7/3/26</a:t>
             </a:fld>
             <a:endParaRPr lang="en-US"/>
           </a:p>
@@ -5143,7 +4974,7 @@
           <a:p>
             <a:fld id="{CB70D3E6-D921-5B44-AC8D-B7FDAFC8A532}" type="datetimeFigureOut">
               <a:rPr lang="en-US" smtClean="0"/>
-              <a:t>1/8/26</a:t>
+              <a:t>7/3/26</a:t>
             </a:fld>
             <a:endParaRPr lang="en-US"/>
           </a:p>
@@ -5284,7 +5115,7 @@
           <a:p>
             <a:fld id="{CB70D3E6-D921-5B44-AC8D-B7FDAFC8A532}" type="datetimeFigureOut">
               <a:rPr lang="en-US" smtClean="0"/>
-              <a:t>1/8/26</a:t>
+              <a:t>7/3/26</a:t>
             </a:fld>
             <a:endParaRPr lang="en-US"/>
           </a:p>
@@ -5397,7 +5228,7 @@
           <a:p>
             <a:fld id="{CB70D3E6-D921-5B44-AC8D-B7FDAFC8A532}" type="datetimeFigureOut">
               <a:rPr lang="en-US" smtClean="0"/>
-              <a:t>1/8/26</a:t>
+              <a:t>7/3/26</a:t>
             </a:fld>
             <a:endParaRPr lang="en-US"/>
           </a:p>
@@ -5708,7 +5539,7 @@
           <a:p>
             <a:fld id="{CB70D3E6-D921-5B44-AC8D-B7FDAFC8A532}" type="datetimeFigureOut">
               <a:rPr lang="en-US" smtClean="0"/>
-              <a:t>1/8/26</a:t>
+              <a:t>7/3/26</a:t>
             </a:fld>
             <a:endParaRPr lang="en-US"/>
           </a:p>
@@ -5996,7 +5827,7 @@
           <a:p>
             <a:fld id="{CB70D3E6-D921-5B44-AC8D-B7FDAFC8A532}" type="datetimeFigureOut">
               <a:rPr lang="en-US" smtClean="0"/>
-              <a:t>1/8/26</a:t>
+              <a:t>7/3/26</a:t>
             </a:fld>
             <a:endParaRPr lang="en-US"/>
           </a:p>
@@ -6237,7 +6068,7 @@
           <a:p>
             <a:fld id="{CB70D3E6-D921-5B44-AC8D-B7FDAFC8A532}" type="datetimeFigureOut">
               <a:rPr lang="en-US" smtClean="0"/>
-              <a:t>1/8/26</a:t>
+              <a:t>7/3/26</a:t>
             </a:fld>
             <a:endParaRPr lang="en-US"/>
           </a:p>
@@ -6808,7 +6639,7 @@
           <a:p>
             <a:fld id="{2005EE61-3907-C44D-8624-D47E09E871DB}" type="datetime1">
               <a:rPr lang="en-US" smtClean="0"/>
-              <a:t>1/8/26</a:t>
+              <a:t>7/3/26</a:t>
             </a:fld>
             <a:endParaRPr lang="en-US"/>
           </a:p>
@@ -7251,7 +7082,7 @@
         <p:spPr>
           <a:xfrm>
             <a:off x="0" y="358254"/>
-            <a:ext cx="12191999" cy="4067780"/>
+            <a:ext cx="12191999" cy="2657138"/>
           </a:xfrm>
           <a:prstGeom prst="rect">
             <a:avLst/>
@@ -7263,42 +7094,6 @@
             <a:spAutoFit/>
           </a:bodyPr>
           <a:lstStyle/>
-          <a:p>
-            <a:pPr marL="0" marR="0" lvl="0" indent="0" algn="ctr" defTabSz="914400" rtl="0" eaLnBrk="1" fontAlgn="auto" latinLnBrk="0" hangingPunct="1">
-              <a:lnSpc>
-                <a:spcPts val="11000"/>
-              </a:lnSpc>
-              <a:spcBef>
-                <a:spcPts val="0"/>
-              </a:spcBef>
-              <a:spcAft>
-                <a:spcPts val="0"/>
-              </a:spcAft>
-              <a:buClrTx/>
-              <a:buSzTx/>
-              <a:buFontTx/>
-              <a:buNone/>
-              <a:tabLst/>
-              <a:defRPr/>
-            </a:pPr>
-            <a:r>
-              <a:rPr kumimoji="0" lang="en-US" sz="11500" u="none" strike="noStrike" kern="1200" cap="none" spc="0" normalizeH="0" baseline="0" noProof="0" dirty="0">
-                <a:ln>
-                  <a:noFill/>
-                </a:ln>
-                <a:solidFill>
-                  <a:prstClr val="white"/>
-                </a:solidFill>
-                <a:effectLst/>
-                <a:uLnTx/>
-                <a:uFillTx/>
-                <a:latin typeface="Helvetica Neue UltraLight" panose="02000206000000020004" pitchFamily="2" charset="0"/>
-                <a:ea typeface="Helvetica Neue UltraLight" panose="02000206000000020004" pitchFamily="2" charset="0"/>
-                <a:cs typeface="Helvetica Neue" panose="02000503000000020004" pitchFamily="2" charset="0"/>
-              </a:rPr>
-              <a:t>neoclassical.ai</a:t>
-            </a:r>
-          </a:p>
           <a:p>
             <a:pPr marL="0" marR="0" lvl="0" indent="0" algn="ctr" defTabSz="914400" rtl="0" eaLnBrk="1" fontAlgn="auto" latinLnBrk="0" hangingPunct="1">
               <a:lnSpc>
@@ -13665,342 +13460,6 @@
 </p:sld>
 </file>
 
-<file path=ppt/slides/slide16.xml><?xml version="1.0" encoding="utf-8"?>
-<p:sld xmlns:a="http://schemas.openxmlformats.org/drawingml/2006/main" xmlns:r="http://schemas.openxmlformats.org/officeDocument/2006/relationships" xmlns:p="http://schemas.openxmlformats.org/presentationml/2006/main">
-  <p:cSld>
-    <p:bg>
-      <p:bgPr>
-        <a:solidFill>
-          <a:srgbClr val="7030A0"/>
-        </a:solidFill>
-        <a:effectLst/>
-      </p:bgPr>
-    </p:bg>
-    <p:spTree>
-      <p:nvGrpSpPr>
-        <p:cNvPr id="1" name="">
-          <a:extLst>
-            <a:ext uri="{FF2B5EF4-FFF2-40B4-BE49-F238E27FC236}">
-              <a16:creationId xmlns:a16="http://schemas.microsoft.com/office/drawing/2014/main" id="{F573E457-A142-08D1-C31E-927AF5AE3629}"/>
-            </a:ext>
-          </a:extLst>
-        </p:cNvPr>
-        <p:cNvGrpSpPr/>
-        <p:nvPr/>
-      </p:nvGrpSpPr>
-      <p:grpSpPr>
-        <a:xfrm>
-          <a:off x="0" y="0"/>
-          <a:ext cx="0" cy="0"/>
-          <a:chOff x="0" y="0"/>
-          <a:chExt cx="0" cy="0"/>
-        </a:xfrm>
-      </p:grpSpPr>
-      <p:sp>
-        <p:nvSpPr>
-          <p:cNvPr id="5" name="Footer Placeholder 3">
-            <a:extLst>
-              <a:ext uri="{FF2B5EF4-FFF2-40B4-BE49-F238E27FC236}">
-                <a16:creationId xmlns:a16="http://schemas.microsoft.com/office/drawing/2014/main" id="{9FF2EC26-4FA7-CD4D-A98C-D391C12B8103}"/>
-              </a:ext>
-            </a:extLst>
-          </p:cNvPr>
-          <p:cNvSpPr txBox="1">
-            <a:spLocks/>
-          </p:cNvSpPr>
-          <p:nvPr/>
-        </p:nvSpPr>
-        <p:spPr>
-          <a:xfrm>
-            <a:off x="10924248" y="6388602"/>
-            <a:ext cx="1142262" cy="365125"/>
-          </a:xfrm>
-          <a:prstGeom prst="rect">
-            <a:avLst/>
-          </a:prstGeom>
-        </p:spPr>
-        <p:txBody>
-          <a:bodyPr vert="horz" lIns="91440" tIns="45720" rIns="91440" bIns="45720" rtlCol="0" anchor="ctr"/>
-          <a:lstStyle>
-            <a:defPPr>
-              <a:defRPr lang="en-US"/>
-            </a:defPPr>
-            <a:lvl1pPr marL="0" algn="ctr" defTabSz="914400" rtl="0" eaLnBrk="1" latinLnBrk="0" hangingPunct="1">
-              <a:defRPr sz="1200" kern="1200">
-                <a:solidFill>
-                  <a:schemeClr val="tx1">
-                    <a:tint val="75000"/>
-                  </a:schemeClr>
-                </a:solidFill>
-                <a:latin typeface="+mn-lt"/>
-                <a:ea typeface="+mn-ea"/>
-                <a:cs typeface="+mn-cs"/>
-              </a:defRPr>
-            </a:lvl1pPr>
-            <a:lvl2pPr marL="457200" algn="l" defTabSz="914400" rtl="0" eaLnBrk="1" latinLnBrk="0" hangingPunct="1">
-              <a:defRPr sz="1800" kern="1200">
-                <a:solidFill>
-                  <a:schemeClr val="tx1"/>
-                </a:solidFill>
-                <a:latin typeface="+mn-lt"/>
-                <a:ea typeface="+mn-ea"/>
-                <a:cs typeface="+mn-cs"/>
-              </a:defRPr>
-            </a:lvl2pPr>
-            <a:lvl3pPr marL="914400" algn="l" defTabSz="914400" rtl="0" eaLnBrk="1" latinLnBrk="0" hangingPunct="1">
-              <a:defRPr sz="1800" kern="1200">
-                <a:solidFill>
-                  <a:schemeClr val="tx1"/>
-                </a:solidFill>
-                <a:latin typeface="+mn-lt"/>
-                <a:ea typeface="+mn-ea"/>
-                <a:cs typeface="+mn-cs"/>
-              </a:defRPr>
-            </a:lvl3pPr>
-            <a:lvl4pPr marL="1371600" algn="l" defTabSz="914400" rtl="0" eaLnBrk="1" latinLnBrk="0" hangingPunct="1">
-              <a:defRPr sz="1800" kern="1200">
-                <a:solidFill>
-                  <a:schemeClr val="tx1"/>
-                </a:solidFill>
-                <a:latin typeface="+mn-lt"/>
-                <a:ea typeface="+mn-ea"/>
-                <a:cs typeface="+mn-cs"/>
-              </a:defRPr>
-            </a:lvl4pPr>
-            <a:lvl5pPr marL="1828800" algn="l" defTabSz="914400" rtl="0" eaLnBrk="1" latinLnBrk="0" hangingPunct="1">
-              <a:defRPr sz="1800" kern="1200">
-                <a:solidFill>
-                  <a:schemeClr val="tx1"/>
-                </a:solidFill>
-                <a:latin typeface="+mn-lt"/>
-                <a:ea typeface="+mn-ea"/>
-                <a:cs typeface="+mn-cs"/>
-              </a:defRPr>
-            </a:lvl5pPr>
-            <a:lvl6pPr marL="2286000" algn="l" defTabSz="914400" rtl="0" eaLnBrk="1" latinLnBrk="0" hangingPunct="1">
-              <a:defRPr sz="1800" kern="1200">
-                <a:solidFill>
-                  <a:schemeClr val="tx1"/>
-                </a:solidFill>
-                <a:latin typeface="+mn-lt"/>
-                <a:ea typeface="+mn-ea"/>
-                <a:cs typeface="+mn-cs"/>
-              </a:defRPr>
-            </a:lvl6pPr>
-            <a:lvl7pPr marL="2743200" algn="l" defTabSz="914400" rtl="0" eaLnBrk="1" latinLnBrk="0" hangingPunct="1">
-              <a:defRPr sz="1800" kern="1200">
-                <a:solidFill>
-                  <a:schemeClr val="tx1"/>
-                </a:solidFill>
-                <a:latin typeface="+mn-lt"/>
-                <a:ea typeface="+mn-ea"/>
-                <a:cs typeface="+mn-cs"/>
-              </a:defRPr>
-            </a:lvl7pPr>
-            <a:lvl8pPr marL="3200400" algn="l" defTabSz="914400" rtl="0" eaLnBrk="1" latinLnBrk="0" hangingPunct="1">
-              <a:defRPr sz="1800" kern="1200">
-                <a:solidFill>
-                  <a:schemeClr val="tx1"/>
-                </a:solidFill>
-                <a:latin typeface="+mn-lt"/>
-                <a:ea typeface="+mn-ea"/>
-                <a:cs typeface="+mn-cs"/>
-              </a:defRPr>
-            </a:lvl8pPr>
-            <a:lvl9pPr marL="3657600" algn="l" defTabSz="914400" rtl="0" eaLnBrk="1" latinLnBrk="0" hangingPunct="1">
-              <a:defRPr sz="1800" kern="1200">
-                <a:solidFill>
-                  <a:schemeClr val="tx1"/>
-                </a:solidFill>
-                <a:latin typeface="+mn-lt"/>
-                <a:ea typeface="+mn-ea"/>
-                <a:cs typeface="+mn-cs"/>
-              </a:defRPr>
-            </a:lvl9pPr>
-          </a:lstStyle>
-          <a:p>
-            <a:pPr marL="0" marR="0" lvl="0" indent="0" algn="ctr" defTabSz="914400" rtl="0" eaLnBrk="1" fontAlgn="auto" latinLnBrk="0" hangingPunct="1">
-              <a:lnSpc>
-                <a:spcPct val="100000"/>
-              </a:lnSpc>
-              <a:spcBef>
-                <a:spcPts val="0"/>
-              </a:spcBef>
-              <a:spcAft>
-                <a:spcPts val="0"/>
-              </a:spcAft>
-              <a:buClrTx/>
-              <a:buSzTx/>
-              <a:buFontTx/>
-              <a:buNone/>
-              <a:tabLst/>
-              <a:defRPr/>
-            </a:pPr>
-            <a:r>
-              <a:rPr kumimoji="0" lang="en-US" sz="1200" b="0" i="0" u="none" strike="noStrike" kern="1200" cap="none" spc="0" normalizeH="0" baseline="0" noProof="0" dirty="0">
-                <a:ln>
-                  <a:noFill/>
-                </a:ln>
-                <a:solidFill>
-                  <a:prstClr val="black">
-                    <a:tint val="75000"/>
-                  </a:prstClr>
-                </a:solidFill>
-                <a:effectLst/>
-                <a:uLnTx/>
-                <a:uFillTx/>
-                <a:latin typeface="Helvetica Neue" panose="02000503000000020004" pitchFamily="2" charset="0"/>
-                <a:ea typeface="Helvetica Neue" panose="02000503000000020004" pitchFamily="2" charset="0"/>
-                <a:cs typeface="Helvetica Neue" panose="02000503000000020004" pitchFamily="2" charset="0"/>
-              </a:rPr>
-              <a:t>J Mark Morris</a:t>
-            </a:r>
-          </a:p>
-        </p:txBody>
-      </p:sp>
-      <p:sp>
-        <p:nvSpPr>
-          <p:cNvPr id="2" name="TextBox 1">
-            <a:extLst>
-              <a:ext uri="{FF2B5EF4-FFF2-40B4-BE49-F238E27FC236}">
-                <a16:creationId xmlns:a16="http://schemas.microsoft.com/office/drawing/2014/main" id="{FBE17777-0A2B-F30C-DD0D-BF1820C52F7C}"/>
-              </a:ext>
-            </a:extLst>
-          </p:cNvPr>
-          <p:cNvSpPr txBox="1"/>
-          <p:nvPr/>
-        </p:nvSpPr>
-        <p:spPr>
-          <a:xfrm>
-            <a:off x="512273" y="1228397"/>
-            <a:ext cx="11465670" cy="494879"/>
-          </a:xfrm>
-          <a:prstGeom prst="rect">
-            <a:avLst/>
-          </a:prstGeom>
-          <a:noFill/>
-        </p:spPr>
-        <p:txBody>
-          <a:bodyPr wrap="square" rtlCol="0">
-            <a:spAutoFit/>
-          </a:bodyPr>
-          <a:lstStyle/>
-          <a:p>
-            <a:pPr marL="285750" marR="0" lvl="0" indent="-285750" algn="l" defTabSz="914400" rtl="0" eaLnBrk="1" fontAlgn="auto" latinLnBrk="0" hangingPunct="1">
-              <a:lnSpc>
-                <a:spcPct val="150000"/>
-              </a:lnSpc>
-              <a:spcBef>
-                <a:spcPts val="0"/>
-              </a:spcBef>
-              <a:spcAft>
-                <a:spcPts val="0"/>
-              </a:spcAft>
-              <a:buClrTx/>
-              <a:buSzTx/>
-              <a:buFont typeface="Arial" panose="020B0604020202020204" pitchFamily="34" charset="0"/>
-              <a:buChar char="•"/>
-              <a:tabLst/>
-              <a:defRPr/>
-            </a:pPr>
-            <a:r>
-              <a:rPr kumimoji="0" lang="en-US" sz="2000" b="0" i="0" u="none" strike="noStrike" kern="1200" cap="none" spc="0" normalizeH="0" baseline="0" noProof="0" dirty="0">
-                <a:ln>
-                  <a:noFill/>
-                </a:ln>
-                <a:solidFill>
-                  <a:schemeClr val="bg1"/>
-                </a:solidFill>
-                <a:effectLst/>
-                <a:uLnTx/>
-                <a:uFillTx/>
-                <a:latin typeface="Helvetica Neue" panose="02000503000000020004" pitchFamily="2" charset="0"/>
-                <a:ea typeface="Helvetica Neue" panose="02000503000000020004" pitchFamily="2" charset="0"/>
-                <a:cs typeface="Helvetica Neue" panose="02000503000000020004" pitchFamily="2" charset="0"/>
-              </a:rPr>
-              <a:t>x</a:t>
-            </a:r>
-          </a:p>
-        </p:txBody>
-      </p:sp>
-      <p:sp>
-        <p:nvSpPr>
-          <p:cNvPr id="8" name="TextBox 7">
-            <a:extLst>
-              <a:ext uri="{FF2B5EF4-FFF2-40B4-BE49-F238E27FC236}">
-                <a16:creationId xmlns:a16="http://schemas.microsoft.com/office/drawing/2014/main" id="{AB6E0C0A-10A7-21A6-4D2C-6E707FB1D55D}"/>
-              </a:ext>
-            </a:extLst>
-          </p:cNvPr>
-          <p:cNvSpPr txBox="1"/>
-          <p:nvPr/>
-        </p:nvSpPr>
-        <p:spPr>
-          <a:xfrm>
-            <a:off x="512272" y="321582"/>
-            <a:ext cx="11580073" cy="523220"/>
-          </a:xfrm>
-          <a:prstGeom prst="rect">
-            <a:avLst/>
-          </a:prstGeom>
-          <a:noFill/>
-        </p:spPr>
-        <p:txBody>
-          <a:bodyPr wrap="square">
-            <a:spAutoFit/>
-          </a:bodyPr>
-          <a:lstStyle/>
-          <a:p>
-            <a:pPr marL="0" marR="0" lvl="0" indent="0" algn="ctr" defTabSz="914400" rtl="0" eaLnBrk="1" fontAlgn="auto" latinLnBrk="0" hangingPunct="1">
-              <a:lnSpc>
-                <a:spcPct val="100000"/>
-              </a:lnSpc>
-              <a:spcBef>
-                <a:spcPts val="0"/>
-              </a:spcBef>
-              <a:spcAft>
-                <a:spcPts val="0"/>
-              </a:spcAft>
-              <a:buClrTx/>
-              <a:buSzTx/>
-              <a:buFontTx/>
-              <a:buNone/>
-              <a:tabLst/>
-              <a:defRPr/>
-            </a:pPr>
-            <a:r>
-              <a:rPr kumimoji="0" lang="en-US" sz="2800" b="1" i="0" u="none" strike="noStrike" kern="1200" cap="none" spc="0" normalizeH="0" baseline="0" noProof="0" dirty="0">
-                <a:ln>
-                  <a:noFill/>
-                </a:ln>
-                <a:solidFill>
-                  <a:schemeClr val="bg1"/>
-                </a:solidFill>
-                <a:effectLst/>
-                <a:uLnTx/>
-                <a:uFillTx/>
-                <a:latin typeface="Helvetica Neue" panose="02000503000000020004" pitchFamily="2" charset="0"/>
-                <a:ea typeface="Helvetica Neue" panose="02000503000000020004" pitchFamily="2" charset="0"/>
-                <a:cs typeface="Helvetica Neue" panose="02000503000000020004" pitchFamily="2" charset="0"/>
-              </a:rPr>
-              <a:t>Template </a:t>
-            </a:r>
-          </a:p>
-        </p:txBody>
-      </p:sp>
-    </p:spTree>
-    <p:extLst>
-      <p:ext uri="{BB962C8B-B14F-4D97-AF65-F5344CB8AC3E}">
-        <p14:creationId xmlns:p14="http://schemas.microsoft.com/office/powerpoint/2010/main" val="2445680564"/>
-      </p:ext>
-    </p:extLst>
-  </p:cSld>
-  <p:clrMapOvr>
-    <a:masterClrMapping/>
-  </p:clrMapOvr>
-</p:sld>
-</file>
-
 <file path=ppt/slides/slide2.xml><?xml version="1.0" encoding="utf-8"?>
 <p:sld xmlns:a="http://schemas.openxmlformats.org/drawingml/2006/main" xmlns:r="http://schemas.openxmlformats.org/officeDocument/2006/relationships" xmlns:p="http://schemas.openxmlformats.org/presentationml/2006/main">
   <p:cSld>

--- a/reference/archie/presentations/NPQG Fundamentals - Point Potential.pptx
+++ b/reference/archie/presentations/NPQG Fundamentals - Point Potential.pptx
@@ -7043,7 +7043,7 @@
 </file>
 
 <file path=ppt/slides/slide1.xml><?xml version="1.0" encoding="utf-8"?>
-<p:sld xmlns:a="http://schemas.openxmlformats.org/drawingml/2006/main" xmlns:r="http://schemas.openxmlformats.org/officeDocument/2006/relationships" xmlns:p="http://schemas.openxmlformats.org/presentationml/2006/main">
+<p:sld xmlns:a="http://schemas.openxmlformats.org/drawingml/2006/main" xmlns:a16="http://schemas.microsoft.com/office/drawing/2014/main" xmlns:ns3="http://schemas.microsoft.com/office/powerpoint/2010/main" xmlns:p="http://schemas.openxmlformats.org/presentationml/2006/main">
   <p:cSld>
     <p:bg>
       <p:bgPr>
@@ -7072,7 +7072,7 @@
           <p:cNvPr id="2" name="TextBox 1">
             <a:extLst>
               <a:ext uri="{FF2B5EF4-FFF2-40B4-BE49-F238E27FC236}">
-                <a16:creationId xmlns:a16="http://schemas.microsoft.com/office/drawing/2014/main" id="{1D77ACA5-3691-8FEB-0266-8D47BBCCF4C6}"/>
+                <a16:creationId id="{1D77ACA5-3691-8FEB-0266-8D47BBCCF4C6}"/>
               </a:ext>
             </a:extLst>
           </p:cNvPr>
@@ -7163,7 +7163,163 @@
                 <a:ea typeface="Helvetica Neue Condensed Black" panose="02000503000000020004" pitchFamily="2" charset="0"/>
                 <a:cs typeface="Helvetica Neue Condensed Black" panose="02000503000000020004" pitchFamily="2" charset="0"/>
               </a:rPr>
-              <a:t>Point Potentials</a:t>
+              <a:t>Architrinos</a:t>
+            </a:r>
+          </a:p>
+        </p:txBody>
+      </p:sp>
+      <p:sp>
+        <p:nvSpPr>
+          <p:cNvPr id="3" name="Footer Placeholder 3"/>
+          <p:cNvSpPr txBox="1">
+            <a:spLocks/>
+          </p:cNvSpPr>
+          <p:nvPr/>
+        </p:nvSpPr>
+        <p:spPr>
+          <a:xfrm>
+            <a:off x="10942204" y="6481737"/>
+            <a:ext cx="1217443" cy="365125"/>
+          </a:xfrm>
+          <a:prstGeom prst="rect">
+            <a:avLst/>
+          </a:prstGeom>
+        </p:spPr>
+        <p:txBody>
+          <a:bodyPr vert="horz" lIns="91440" tIns="45720" rIns="91440" bIns="45720" rtlCol="0" anchor="ctr"/>
+          <a:lstStyle>
+            <a:defPPr>
+              <a:defRPr lang="en-US"/>
+            </a:defPPr>
+            <a:lvl1pPr marL="0" algn="ctr" defTabSz="914400" rtl="0" eaLnBrk="1" latinLnBrk="0" hangingPunct="1">
+              <a:defRPr sz="1200" kern="1200">
+                <a:solidFill>
+                  <a:schemeClr val="tx1">
+                    <a:tint val="75000"/>
+                  </a:schemeClr>
+                </a:solidFill>
+                <a:latin typeface="+mn-lt"/>
+                <a:ea typeface="+mn-ea"/>
+                <a:cs typeface="+mn-cs"/>
+              </a:defRPr>
+            </a:lvl1pPr>
+            <a:lvl2pPr marL="457200" algn="l" defTabSz="914400" rtl="0" eaLnBrk="1" latinLnBrk="0" hangingPunct="1">
+              <a:defRPr sz="1800" kern="1200">
+                <a:solidFill>
+                  <a:schemeClr val="tx1"/>
+                </a:solidFill>
+                <a:latin typeface="+mn-lt"/>
+                <a:ea typeface="+mn-ea"/>
+                <a:cs typeface="+mn-cs"/>
+              </a:defRPr>
+            </a:lvl2pPr>
+            <a:lvl3pPr marL="914400" algn="l" defTabSz="914400" rtl="0" eaLnBrk="1" latinLnBrk="0" hangingPunct="1">
+              <a:defRPr sz="1800" kern="1200">
+                <a:solidFill>
+                  <a:schemeClr val="tx1"/>
+                </a:solidFill>
+                <a:latin typeface="+mn-lt"/>
+                <a:ea typeface="+mn-ea"/>
+                <a:cs typeface="+mn-cs"/>
+              </a:defRPr>
+            </a:lvl3pPr>
+            <a:lvl4pPr marL="1371600" algn="l" defTabSz="914400" rtl="0" eaLnBrk="1" latinLnBrk="0" hangingPunct="1">
+              <a:defRPr sz="1800" kern="1200">
+                <a:solidFill>
+                  <a:schemeClr val="tx1"/>
+                </a:solidFill>
+                <a:latin typeface="+mn-lt"/>
+                <a:ea typeface="+mn-ea"/>
+                <a:cs typeface="+mn-cs"/>
+              </a:defRPr>
+            </a:lvl4pPr>
+            <a:lvl5pPr marL="1828800" algn="l" defTabSz="914400" rtl="0" eaLnBrk="1" latinLnBrk="0" hangingPunct="1">
+              <a:defRPr sz="1800" kern="1200">
+                <a:solidFill>
+                  <a:schemeClr val="tx1"/>
+                </a:solidFill>
+                <a:latin typeface="+mn-lt"/>
+                <a:ea typeface="+mn-ea"/>
+                <a:cs typeface="+mn-cs"/>
+              </a:defRPr>
+            </a:lvl5pPr>
+            <a:lvl6pPr marL="2286000" algn="l" defTabSz="914400" rtl="0" eaLnBrk="1" latinLnBrk="0" hangingPunct="1">
+              <a:defRPr sz="1800" kern="1200">
+                <a:solidFill>
+                  <a:schemeClr val="tx1"/>
+                </a:solidFill>
+                <a:latin typeface="+mn-lt"/>
+                <a:ea typeface="+mn-ea"/>
+                <a:cs typeface="+mn-cs"/>
+              </a:defRPr>
+            </a:lvl6pPr>
+            <a:lvl7pPr marL="2743200" algn="l" defTabSz="914400" rtl="0" eaLnBrk="1" latinLnBrk="0" hangingPunct="1">
+              <a:defRPr sz="1800" kern="1200">
+                <a:solidFill>
+                  <a:schemeClr val="tx1"/>
+                </a:solidFill>
+                <a:latin typeface="+mn-lt"/>
+                <a:ea typeface="+mn-ea"/>
+                <a:cs typeface="+mn-cs"/>
+              </a:defRPr>
+            </a:lvl7pPr>
+            <a:lvl8pPr marL="3200400" algn="l" defTabSz="914400" rtl="0" eaLnBrk="1" latinLnBrk="0" hangingPunct="1">
+              <a:defRPr sz="1800" kern="1200">
+                <a:solidFill>
+                  <a:schemeClr val="tx1"/>
+                </a:solidFill>
+                <a:latin typeface="+mn-lt"/>
+                <a:ea typeface="+mn-ea"/>
+                <a:cs typeface="+mn-cs"/>
+              </a:defRPr>
+            </a:lvl8pPr>
+            <a:lvl9pPr marL="3657600" algn="l" defTabSz="914400" rtl="0" eaLnBrk="1" latinLnBrk="0" hangingPunct="1">
+              <a:defRPr sz="1800" kern="1200">
+                <a:solidFill>
+                  <a:schemeClr val="tx1"/>
+                </a:solidFill>
+                <a:latin typeface="+mn-lt"/>
+                <a:ea typeface="+mn-ea"/>
+                <a:cs typeface="+mn-cs"/>
+              </a:defRPr>
+            </a:lvl9pPr>
+          </a:lstStyle>
+          <a:p>
+            <a:pPr marL="0" marR="0" lvl="0" indent="0" algn="ctr" defTabSz="914400" rtl="0" eaLnBrk="1" fontAlgn="auto" latinLnBrk="0" hangingPunct="1">
+              <a:lnSpc>
+                <a:spcPct val="100000"/>
+              </a:lnSpc>
+              <a:spcBef>
+                <a:spcPts val="0"/>
+              </a:spcBef>
+              <a:spcAft>
+                <a:spcPts val="0"/>
+              </a:spcAft>
+              <a:buClrTx/>
+              <a:buSzTx/>
+              <a:buFontTx/>
+              <a:buNone/>
+              <a:tabLst/>
+              <a:defRPr/>
+            </a:pPr>
+            <a:r>
+              <a:rPr kumimoji="0" lang="en-US" sz="1200" b="0" i="0" u="none" strike="noStrike" kern="1200" cap="none" spc="0" normalizeH="0" baseline="0" noProof="0" dirty="0">
+                <a:ln>
+                  <a:noFill/>
+                </a:ln>
+                <a:solidFill>
+                  <a:prstClr val="black">
+                    <a:tint val="75000"/>
+                  </a:prstClr>
+                </a:solidFill>
+                <a:effectLst/>
+                <a:uLnTx/>
+                <a:uFillTx/>
+                <a:latin typeface="Helvetica Neue" panose="02000503000000020004" pitchFamily="2" charset="0"/>
+                <a:ea typeface="Helvetica Neue" panose="02000503000000020004" pitchFamily="2" charset="0"/>
+                <a:cs typeface="Helvetica Neue" panose="02000503000000020004" pitchFamily="2" charset="0"/>
+              </a:rPr>
+              <a:t>architrino.com</a:t>
             </a:r>
           </a:p>
         </p:txBody>
@@ -7171,7 +7327,7 @@
     </p:spTree>
     <p:extLst>
       <p:ext uri="{BB962C8B-B14F-4D97-AF65-F5344CB8AC3E}">
-        <p14:creationId xmlns:p14="http://schemas.microsoft.com/office/powerpoint/2010/main" val="3662425714"/>
+        <ns3:creationId val="3662425714"/>
       </p:ext>
     </p:extLst>
   </p:cSld>
@@ -7182,7 +7338,7 @@
 </file>
 
 <file path=ppt/slides/slide10.xml><?xml version="1.0" encoding="utf-8"?>
-<p:sld xmlns:a="http://schemas.openxmlformats.org/drawingml/2006/main" xmlns:r="http://schemas.openxmlformats.org/officeDocument/2006/relationships" xmlns:p="http://schemas.openxmlformats.org/presentationml/2006/main">
+<p:sld xmlns:a="http://schemas.openxmlformats.org/drawingml/2006/main" xmlns:a16="http://schemas.microsoft.com/office/drawing/2014/main" xmlns:ns3="http://schemas.microsoft.com/office/powerpoint/2010/main" xmlns:p="http://schemas.openxmlformats.org/presentationml/2006/main">
   <p:cSld>
     <p:bg>
       <p:bgPr>
@@ -7211,7 +7367,7 @@
           <p:cNvPr id="5" name="Footer Placeholder 3">
             <a:extLst>
               <a:ext uri="{FF2B5EF4-FFF2-40B4-BE49-F238E27FC236}">
-                <a16:creationId xmlns:a16="http://schemas.microsoft.com/office/drawing/2014/main" id="{668F77D6-DFDA-5A46-8DF1-47F6A167C2B1}"/>
+                <a16:creationId id="{668F77D6-DFDA-5A46-8DF1-47F6A167C2B1}"/>
               </a:ext>
             </a:extLst>
           </p:cNvPr>
@@ -7373,7 +7529,7 @@
           <p:cNvPr id="2" name="TextBox 1">
             <a:extLst>
               <a:ext uri="{FF2B5EF4-FFF2-40B4-BE49-F238E27FC236}">
-                <a16:creationId xmlns:a16="http://schemas.microsoft.com/office/drawing/2014/main" id="{DDEA4115-15F8-921F-AB6F-6FB061DB5DDD}"/>
+                <a16:creationId id="{DDEA4115-15F8-921F-AB6F-6FB061DB5DDD}"/>
               </a:ext>
             </a:extLst>
           </p:cNvPr>
@@ -7428,7 +7584,7 @@
                 <a:ea typeface="Helvetica Neue" panose="02000503000000020004" pitchFamily="2" charset="0"/>
                 <a:cs typeface="Helvetica Neue" panose="02000503000000020004" pitchFamily="2" charset="0"/>
               </a:rPr>
-              <a:t>A unit potential is described by (sign, time, position, velocity) (-/+ </a:t>
+              <a:t>A architrino is described by (sign, time, position, velocity) (-/+ </a:t>
             </a:r>
             <a:r>
               <a:rPr kumimoji="0" lang="el-GR" sz="2000" b="0" i="1" u="none" strike="noStrike" kern="1200" cap="none" spc="0" normalizeH="0" baseline="0" noProof="0" dirty="0">
@@ -7512,7 +7668,7 @@
                 <a:ea typeface="Helvetica Neue" panose="02000503000000020004" pitchFamily="2" charset="0"/>
                 <a:cs typeface="Helvetica Neue" panose="02000503000000020004" pitchFamily="2" charset="0"/>
               </a:rPr>
-              <a:t>Like unit potentials repel. </a:t>
+              <a:t>Like architrinos repel. </a:t>
             </a:r>
             <a:r>
               <a:rPr lang="en-US" sz="2000" dirty="0">
@@ -7557,7 +7713,7 @@
                 <a:ea typeface="Helvetica Neue" panose="02000503000000020004" pitchFamily="2" charset="0"/>
                 <a:cs typeface="Helvetica Neue" panose="02000503000000020004" pitchFamily="2" charset="0"/>
               </a:rPr>
-              <a:t> unit potentials attract. </a:t>
+              <a:t> architrinos attract. </a:t>
             </a:r>
           </a:p>
           <a:p>
@@ -7593,7 +7749,7 @@
                 <a:ea typeface="Helvetica Neue" panose="02000503000000020004" pitchFamily="2" charset="0"/>
                 <a:cs typeface="Helvetica Neue" panose="02000503000000020004" pitchFamily="2" charset="0"/>
               </a:rPr>
-              <a:t>The sum of all unit potential in the universe is zero.</a:t>
+              <a:t>The sum of all architrino in the universe is zero.</a:t>
             </a:r>
           </a:p>
           <a:p>
@@ -7629,7 +7785,7 @@
                 <a:ea typeface="Helvetica Neue" panose="02000503000000020004" pitchFamily="2" charset="0"/>
                 <a:cs typeface="Helvetica Neue" panose="02000503000000020004" pitchFamily="2" charset="0"/>
               </a:rPr>
-              <a:t>The path of a unit potential is presumed to span all time to t=now.</a:t>
+              <a:t>The path of a architrino is presumed to span all time to t=now.</a:t>
             </a:r>
           </a:p>
           <a:p>
@@ -7665,7 +7821,7 @@
                 <a:ea typeface="Helvetica Neue" panose="02000503000000020004" pitchFamily="2" charset="0"/>
                 <a:cs typeface="Helvetica Neue" panose="02000503000000020004" pitchFamily="2" charset="0"/>
               </a:rPr>
-              <a:t>Point potentials are acted upon by the local superposition of all coincident Dirac spheres. </a:t>
+              <a:t>Architrinos are acted upon by the local superposition of all coincident Causal wake surfaces. </a:t>
             </a:r>
           </a:p>
           <a:p>
@@ -7701,7 +7857,7 @@
                 <a:ea typeface="Helvetica Neue" panose="02000503000000020004" pitchFamily="2" charset="0"/>
                 <a:cs typeface="Helvetica Neue" panose="02000503000000020004" pitchFamily="2" charset="0"/>
               </a:rPr>
-              <a:t>A point potential with v &lt; @ is inside its emitted Dirac potential spheres.</a:t>
+              <a:t>A architrino with v &lt; @ is inside its emitted Dirac causal wakes.</a:t>
             </a:r>
           </a:p>
           <a:p>
@@ -7737,7 +7893,7 @@
                 <a:ea typeface="Helvetica Neue" panose="02000503000000020004" pitchFamily="2" charset="0"/>
                 <a:cs typeface="Helvetica Neue" panose="02000503000000020004" pitchFamily="2" charset="0"/>
               </a:rPr>
-              <a:t>A point potential with v &gt; @ is outside its emitted Dirac potential spheres.</a:t>
+              <a:t>A architrino with v &gt; @ is outside its emitted Dirac causal wakes.</a:t>
             </a:r>
           </a:p>
           <a:p>
@@ -7773,7 +7929,7 @@
                 <a:ea typeface="Helvetica Neue" panose="02000503000000020004" pitchFamily="2" charset="0"/>
                 <a:cs typeface="Helvetica Neue" panose="02000503000000020004" pitchFamily="2" charset="0"/>
               </a:rPr>
-              <a:t>Once a unit potential velocity crosses @ then self-action occurs.</a:t>
+              <a:t>Once a architrino velocity crosses @ then self-action occurs.</a:t>
             </a:r>
           </a:p>
           <a:p>
@@ -7809,7 +7965,7 @@
                 <a:ea typeface="Helvetica Neue" panose="02000503000000020004" pitchFamily="2" charset="0"/>
                 <a:cs typeface="Helvetica Neue" panose="02000503000000020004" pitchFamily="2" charset="0"/>
               </a:rPr>
-              <a:t>Vector velocity orientation and magnitude of both the emitter and receiver are directly related to computing the action when crossing a Dirac sphere. </a:t>
+              <a:t>Vector velocity orientation and magnitude of both the emitter and receiver are directly related to computing the action when crossing a causal wake surface. </a:t>
             </a:r>
           </a:p>
         </p:txBody>
@@ -7819,7 +7975,7 @@
           <p:cNvPr id="8" name="TextBox 7">
             <a:extLst>
               <a:ext uri="{FF2B5EF4-FFF2-40B4-BE49-F238E27FC236}">
-                <a16:creationId xmlns:a16="http://schemas.microsoft.com/office/drawing/2014/main" id="{60D7070F-73F6-024C-A784-AA2DE3B8E022}"/>
+                <a16:creationId id="{60D7070F-73F6-024C-A784-AA2DE3B8E022}"/>
               </a:ext>
             </a:extLst>
           </p:cNvPr>
@@ -7924,10 +8080,166 @@
           </a:p>
         </p:txBody>
       </p:sp>
+      <p:sp>
+        <p:nvSpPr>
+          <p:cNvPr id="3" name="Footer Placeholder 3"/>
+          <p:cNvSpPr txBox="1">
+            <a:spLocks/>
+          </p:cNvSpPr>
+          <p:nvPr/>
+        </p:nvSpPr>
+        <p:spPr>
+          <a:xfrm>
+            <a:off x="10942204" y="6481737"/>
+            <a:ext cx="1217443" cy="365125"/>
+          </a:xfrm>
+          <a:prstGeom prst="rect">
+            <a:avLst/>
+          </a:prstGeom>
+        </p:spPr>
+        <p:txBody>
+          <a:bodyPr vert="horz" lIns="91440" tIns="45720" rIns="91440" bIns="45720" rtlCol="0" anchor="ctr"/>
+          <a:lstStyle>
+            <a:defPPr>
+              <a:defRPr lang="en-US"/>
+            </a:defPPr>
+            <a:lvl1pPr marL="0" algn="ctr" defTabSz="914400" rtl="0" eaLnBrk="1" latinLnBrk="0" hangingPunct="1">
+              <a:defRPr sz="1200" kern="1200">
+                <a:solidFill>
+                  <a:schemeClr val="tx1">
+                    <a:tint val="75000"/>
+                  </a:schemeClr>
+                </a:solidFill>
+                <a:latin typeface="+mn-lt"/>
+                <a:ea typeface="+mn-ea"/>
+                <a:cs typeface="+mn-cs"/>
+              </a:defRPr>
+            </a:lvl1pPr>
+            <a:lvl2pPr marL="457200" algn="l" defTabSz="914400" rtl="0" eaLnBrk="1" latinLnBrk="0" hangingPunct="1">
+              <a:defRPr sz="1800" kern="1200">
+                <a:solidFill>
+                  <a:schemeClr val="tx1"/>
+                </a:solidFill>
+                <a:latin typeface="+mn-lt"/>
+                <a:ea typeface="+mn-ea"/>
+                <a:cs typeface="+mn-cs"/>
+              </a:defRPr>
+            </a:lvl2pPr>
+            <a:lvl3pPr marL="914400" algn="l" defTabSz="914400" rtl="0" eaLnBrk="1" latinLnBrk="0" hangingPunct="1">
+              <a:defRPr sz="1800" kern="1200">
+                <a:solidFill>
+                  <a:schemeClr val="tx1"/>
+                </a:solidFill>
+                <a:latin typeface="+mn-lt"/>
+                <a:ea typeface="+mn-ea"/>
+                <a:cs typeface="+mn-cs"/>
+              </a:defRPr>
+            </a:lvl3pPr>
+            <a:lvl4pPr marL="1371600" algn="l" defTabSz="914400" rtl="0" eaLnBrk="1" latinLnBrk="0" hangingPunct="1">
+              <a:defRPr sz="1800" kern="1200">
+                <a:solidFill>
+                  <a:schemeClr val="tx1"/>
+                </a:solidFill>
+                <a:latin typeface="+mn-lt"/>
+                <a:ea typeface="+mn-ea"/>
+                <a:cs typeface="+mn-cs"/>
+              </a:defRPr>
+            </a:lvl4pPr>
+            <a:lvl5pPr marL="1828800" algn="l" defTabSz="914400" rtl="0" eaLnBrk="1" latinLnBrk="0" hangingPunct="1">
+              <a:defRPr sz="1800" kern="1200">
+                <a:solidFill>
+                  <a:schemeClr val="tx1"/>
+                </a:solidFill>
+                <a:latin typeface="+mn-lt"/>
+                <a:ea typeface="+mn-ea"/>
+                <a:cs typeface="+mn-cs"/>
+              </a:defRPr>
+            </a:lvl5pPr>
+            <a:lvl6pPr marL="2286000" algn="l" defTabSz="914400" rtl="0" eaLnBrk="1" latinLnBrk="0" hangingPunct="1">
+              <a:defRPr sz="1800" kern="1200">
+                <a:solidFill>
+                  <a:schemeClr val="tx1"/>
+                </a:solidFill>
+                <a:latin typeface="+mn-lt"/>
+                <a:ea typeface="+mn-ea"/>
+                <a:cs typeface="+mn-cs"/>
+              </a:defRPr>
+            </a:lvl6pPr>
+            <a:lvl7pPr marL="2743200" algn="l" defTabSz="914400" rtl="0" eaLnBrk="1" latinLnBrk="0" hangingPunct="1">
+              <a:defRPr sz="1800" kern="1200">
+                <a:solidFill>
+                  <a:schemeClr val="tx1"/>
+                </a:solidFill>
+                <a:latin typeface="+mn-lt"/>
+                <a:ea typeface="+mn-ea"/>
+                <a:cs typeface="+mn-cs"/>
+              </a:defRPr>
+            </a:lvl7pPr>
+            <a:lvl8pPr marL="3200400" algn="l" defTabSz="914400" rtl="0" eaLnBrk="1" latinLnBrk="0" hangingPunct="1">
+              <a:defRPr sz="1800" kern="1200">
+                <a:solidFill>
+                  <a:schemeClr val="tx1"/>
+                </a:solidFill>
+                <a:latin typeface="+mn-lt"/>
+                <a:ea typeface="+mn-ea"/>
+                <a:cs typeface="+mn-cs"/>
+              </a:defRPr>
+            </a:lvl8pPr>
+            <a:lvl9pPr marL="3657600" algn="l" defTabSz="914400" rtl="0" eaLnBrk="1" latinLnBrk="0" hangingPunct="1">
+              <a:defRPr sz="1800" kern="1200">
+                <a:solidFill>
+                  <a:schemeClr val="tx1"/>
+                </a:solidFill>
+                <a:latin typeface="+mn-lt"/>
+                <a:ea typeface="+mn-ea"/>
+                <a:cs typeface="+mn-cs"/>
+              </a:defRPr>
+            </a:lvl9pPr>
+          </a:lstStyle>
+          <a:p>
+            <a:pPr marL="0" marR="0" lvl="0" indent="0" algn="ctr" defTabSz="914400" rtl="0" eaLnBrk="1" fontAlgn="auto" latinLnBrk="0" hangingPunct="1">
+              <a:lnSpc>
+                <a:spcPct val="100000"/>
+              </a:lnSpc>
+              <a:spcBef>
+                <a:spcPts val="0"/>
+              </a:spcBef>
+              <a:spcAft>
+                <a:spcPts val="0"/>
+              </a:spcAft>
+              <a:buClrTx/>
+              <a:buSzTx/>
+              <a:buFontTx/>
+              <a:buNone/>
+              <a:tabLst/>
+              <a:defRPr/>
+            </a:pPr>
+            <a:r>
+              <a:rPr kumimoji="0" lang="en-US" sz="1200" b="0" i="0" u="none" strike="noStrike" kern="1200" cap="none" spc="0" normalizeH="0" baseline="0" noProof="0" dirty="0">
+                <a:ln>
+                  <a:noFill/>
+                </a:ln>
+                <a:solidFill>
+                  <a:prstClr val="black">
+                    <a:tint val="75000"/>
+                  </a:prstClr>
+                </a:solidFill>
+                <a:effectLst/>
+                <a:uLnTx/>
+                <a:uFillTx/>
+                <a:latin typeface="Helvetica Neue" panose="02000503000000020004" pitchFamily="2" charset="0"/>
+                <a:ea typeface="Helvetica Neue" panose="02000503000000020004" pitchFamily="2" charset="0"/>
+                <a:cs typeface="Helvetica Neue" panose="02000503000000020004" pitchFamily="2" charset="0"/>
+              </a:rPr>
+              <a:t>architrino.com</a:t>
+            </a:r>
+          </a:p>
+        </p:txBody>
+      </p:sp>
     </p:spTree>
     <p:extLst>
       <p:ext uri="{BB962C8B-B14F-4D97-AF65-F5344CB8AC3E}">
-        <p14:creationId xmlns:p14="http://schemas.microsoft.com/office/powerpoint/2010/main" val="32873966"/>
+        <ns3:creationId val="32873966"/>
       </p:ext>
     </p:extLst>
   </p:cSld>
@@ -7938,7 +8250,7 @@
 </file>
 
 <file path=ppt/slides/slide11.xml><?xml version="1.0" encoding="utf-8"?>
-<p:sld xmlns:a="http://schemas.openxmlformats.org/drawingml/2006/main" xmlns:r="http://schemas.openxmlformats.org/officeDocument/2006/relationships" xmlns:p="http://schemas.openxmlformats.org/presentationml/2006/main">
+<p:sld xmlns:a="http://schemas.openxmlformats.org/drawingml/2006/main" xmlns:a16="http://schemas.microsoft.com/office/drawing/2014/main" xmlns:ns3="http://schemas.microsoft.com/office/drawing/2017/decorative" xmlns:ns4="http://schemas.microsoft.com/office/powerpoint/2015/main" xmlns:ns5="http://schemas.microsoft.com/office/powerpoint/2010/main" xmlns:p="http://schemas.openxmlformats.org/presentationml/2006/main">
   <p:cSld>
     <p:bg>
       <p:bgPr>
@@ -7967,10 +8279,10 @@
           <p:cNvPr id="9" name="Rectangle 8">
             <a:extLst>
               <a:ext uri="{FF2B5EF4-FFF2-40B4-BE49-F238E27FC236}">
-                <a16:creationId xmlns:a16="http://schemas.microsoft.com/office/drawing/2014/main" id="{2A8AA5BC-4F7A-4226-8F99-6D824B226A97}"/>
+                <a16:creationId id="{2A8AA5BC-4F7A-4226-8F99-6D824B226A97}"/>
               </a:ext>
               <a:ext uri="{C183D7F6-B498-43B3-948B-1728B52AA6E4}">
-                <adec:decorative xmlns:adec="http://schemas.microsoft.com/office/drawing/2017/decorative" val="1"/>
+                <ns3:decorative val="1"/>
               </a:ext>
             </a:extLst>
           </p:cNvPr>
@@ -7980,7 +8292,7 @@
           <p:nvPr>
             <p:extLst>
               <p:ext uri="{386F3935-93C4-4BCD-93E2-E3B085C9AB24}">
-                <p16:designElem xmlns:p16="http://schemas.microsoft.com/office/powerpoint/2015/main" val="1"/>
+                <ns4:designElem val="1"/>
               </p:ext>
             </p:extLst>
           </p:nvPr>
@@ -8059,10 +8371,10 @@
           <p:cNvPr id="11" name="Rectangle 10">
             <a:extLst>
               <a:ext uri="{FF2B5EF4-FFF2-40B4-BE49-F238E27FC236}">
-                <a16:creationId xmlns:a16="http://schemas.microsoft.com/office/drawing/2014/main" id="{3E5445C6-DD42-4979-86FF-03730E8C6DB0}"/>
+                <a16:creationId id="{3E5445C6-DD42-4979-86FF-03730E8C6DB0}"/>
               </a:ext>
               <a:ext uri="{C183D7F6-B498-43B3-948B-1728B52AA6E4}">
-                <adec:decorative xmlns:adec="http://schemas.microsoft.com/office/drawing/2017/decorative" val="1"/>
+                <ns3:decorative val="1"/>
               </a:ext>
             </a:extLst>
           </p:cNvPr>
@@ -8072,7 +8384,7 @@
           <p:nvPr>
             <p:extLst>
               <p:ext uri="{386F3935-93C4-4BCD-93E2-E3B085C9AB24}">
-                <p16:designElem xmlns:p16="http://schemas.microsoft.com/office/powerpoint/2015/main" val="1"/>
+                <ns4:designElem val="1"/>
               </p:ext>
             </p:extLst>
           </p:nvPr>
@@ -8159,7 +8471,7 @@
           <p:cNvPr id="2" name="Title 1">
             <a:extLst>
               <a:ext uri="{FF2B5EF4-FFF2-40B4-BE49-F238E27FC236}">
-                <a16:creationId xmlns:a16="http://schemas.microsoft.com/office/drawing/2014/main" id="{7710B119-EC53-BA46-BAA3-CB758CDEDAF5}"/>
+                <a16:creationId id="{7710B119-EC53-BA46-BAA3-CB758CDEDAF5}"/>
               </a:ext>
             </a:extLst>
           </p:cNvPr>
@@ -8194,7 +8506,7 @@
           <p:cNvPr id="3" name="Subtitle 2">
             <a:extLst>
               <a:ext uri="{FF2B5EF4-FFF2-40B4-BE49-F238E27FC236}">
-                <a16:creationId xmlns:a16="http://schemas.microsoft.com/office/drawing/2014/main" id="{44E6BC0E-0DB7-C346-A0CC-E3CB36C29A54}"/>
+                <a16:creationId id="{44E6BC0E-0DB7-C346-A0CC-E3CB36C29A54}"/>
               </a:ext>
             </a:extLst>
           </p:cNvPr>
@@ -8229,10 +8541,10 @@
           <p:cNvPr id="13" name="Straight Connector 12">
             <a:extLst>
               <a:ext uri="{FF2B5EF4-FFF2-40B4-BE49-F238E27FC236}">
-                <a16:creationId xmlns:a16="http://schemas.microsoft.com/office/drawing/2014/main" id="{45000665-DFC7-417E-8FD7-516A0F15C975}"/>
+                <a16:creationId id="{45000665-DFC7-417E-8FD7-516A0F15C975}"/>
               </a:ext>
               <a:ext uri="{C183D7F6-B498-43B3-948B-1728B52AA6E4}">
-                <adec:decorative xmlns:adec="http://schemas.microsoft.com/office/drawing/2017/decorative" val="1"/>
+                <ns3:decorative val="1"/>
               </a:ext>
             </a:extLst>
           </p:cNvPr>
@@ -8242,7 +8554,7 @@
           <p:nvPr>
             <p:extLst>
               <p:ext uri="{386F3935-93C4-4BCD-93E2-E3B085C9AB24}">
-                <p16:designElem xmlns:p16="http://schemas.microsoft.com/office/powerpoint/2015/main" val="1"/>
+                <ns4:designElem val="1"/>
               </p:ext>
             </p:extLst>
           </p:nvPr>
@@ -8283,7 +8595,7 @@
           <p:cNvPr id="4" name="Footer Placeholder 3">
             <a:extLst>
               <a:ext uri="{FF2B5EF4-FFF2-40B4-BE49-F238E27FC236}">
-                <a16:creationId xmlns:a16="http://schemas.microsoft.com/office/drawing/2014/main" id="{9E726E67-7B90-B642-8D26-6DDF890C4785}"/>
+                <a16:creationId id="{9E726E67-7B90-B642-8D26-6DDF890C4785}"/>
               </a:ext>
             </a:extLst>
           </p:cNvPr>
@@ -8345,10 +8657,166 @@
           </a:p>
         </p:txBody>
       </p:sp>
+      <p:sp>
+        <p:nvSpPr>
+          <p:cNvPr id="14" name="Footer Placeholder 3"/>
+          <p:cNvSpPr txBox="1">
+            <a:spLocks/>
+          </p:cNvSpPr>
+          <p:nvPr/>
+        </p:nvSpPr>
+        <p:spPr>
+          <a:xfrm>
+            <a:off x="10942204" y="6481737"/>
+            <a:ext cx="1217443" cy="365125"/>
+          </a:xfrm>
+          <a:prstGeom prst="rect">
+            <a:avLst/>
+          </a:prstGeom>
+        </p:spPr>
+        <p:txBody>
+          <a:bodyPr vert="horz" lIns="91440" tIns="45720" rIns="91440" bIns="45720" rtlCol="0" anchor="ctr"/>
+          <a:lstStyle>
+            <a:defPPr>
+              <a:defRPr lang="en-US"/>
+            </a:defPPr>
+            <a:lvl1pPr marL="0" algn="ctr" defTabSz="914400" rtl="0" eaLnBrk="1" latinLnBrk="0" hangingPunct="1">
+              <a:defRPr sz="1200" kern="1200">
+                <a:solidFill>
+                  <a:schemeClr val="tx1">
+                    <a:tint val="75000"/>
+                  </a:schemeClr>
+                </a:solidFill>
+                <a:latin typeface="+mn-lt"/>
+                <a:ea typeface="+mn-ea"/>
+                <a:cs typeface="+mn-cs"/>
+              </a:defRPr>
+            </a:lvl1pPr>
+            <a:lvl2pPr marL="457200" algn="l" defTabSz="914400" rtl="0" eaLnBrk="1" latinLnBrk="0" hangingPunct="1">
+              <a:defRPr sz="1800" kern="1200">
+                <a:solidFill>
+                  <a:schemeClr val="tx1"/>
+                </a:solidFill>
+                <a:latin typeface="+mn-lt"/>
+                <a:ea typeface="+mn-ea"/>
+                <a:cs typeface="+mn-cs"/>
+              </a:defRPr>
+            </a:lvl2pPr>
+            <a:lvl3pPr marL="914400" algn="l" defTabSz="914400" rtl="0" eaLnBrk="1" latinLnBrk="0" hangingPunct="1">
+              <a:defRPr sz="1800" kern="1200">
+                <a:solidFill>
+                  <a:schemeClr val="tx1"/>
+                </a:solidFill>
+                <a:latin typeface="+mn-lt"/>
+                <a:ea typeface="+mn-ea"/>
+                <a:cs typeface="+mn-cs"/>
+              </a:defRPr>
+            </a:lvl3pPr>
+            <a:lvl4pPr marL="1371600" algn="l" defTabSz="914400" rtl="0" eaLnBrk="1" latinLnBrk="0" hangingPunct="1">
+              <a:defRPr sz="1800" kern="1200">
+                <a:solidFill>
+                  <a:schemeClr val="tx1"/>
+                </a:solidFill>
+                <a:latin typeface="+mn-lt"/>
+                <a:ea typeface="+mn-ea"/>
+                <a:cs typeface="+mn-cs"/>
+              </a:defRPr>
+            </a:lvl4pPr>
+            <a:lvl5pPr marL="1828800" algn="l" defTabSz="914400" rtl="0" eaLnBrk="1" latinLnBrk="0" hangingPunct="1">
+              <a:defRPr sz="1800" kern="1200">
+                <a:solidFill>
+                  <a:schemeClr val="tx1"/>
+                </a:solidFill>
+                <a:latin typeface="+mn-lt"/>
+                <a:ea typeface="+mn-ea"/>
+                <a:cs typeface="+mn-cs"/>
+              </a:defRPr>
+            </a:lvl5pPr>
+            <a:lvl6pPr marL="2286000" algn="l" defTabSz="914400" rtl="0" eaLnBrk="1" latinLnBrk="0" hangingPunct="1">
+              <a:defRPr sz="1800" kern="1200">
+                <a:solidFill>
+                  <a:schemeClr val="tx1"/>
+                </a:solidFill>
+                <a:latin typeface="+mn-lt"/>
+                <a:ea typeface="+mn-ea"/>
+                <a:cs typeface="+mn-cs"/>
+              </a:defRPr>
+            </a:lvl6pPr>
+            <a:lvl7pPr marL="2743200" algn="l" defTabSz="914400" rtl="0" eaLnBrk="1" latinLnBrk="0" hangingPunct="1">
+              <a:defRPr sz="1800" kern="1200">
+                <a:solidFill>
+                  <a:schemeClr val="tx1"/>
+                </a:solidFill>
+                <a:latin typeface="+mn-lt"/>
+                <a:ea typeface="+mn-ea"/>
+                <a:cs typeface="+mn-cs"/>
+              </a:defRPr>
+            </a:lvl7pPr>
+            <a:lvl8pPr marL="3200400" algn="l" defTabSz="914400" rtl="0" eaLnBrk="1" latinLnBrk="0" hangingPunct="1">
+              <a:defRPr sz="1800" kern="1200">
+                <a:solidFill>
+                  <a:schemeClr val="tx1"/>
+                </a:solidFill>
+                <a:latin typeface="+mn-lt"/>
+                <a:ea typeface="+mn-ea"/>
+                <a:cs typeface="+mn-cs"/>
+              </a:defRPr>
+            </a:lvl8pPr>
+            <a:lvl9pPr marL="3657600" algn="l" defTabSz="914400" rtl="0" eaLnBrk="1" latinLnBrk="0" hangingPunct="1">
+              <a:defRPr sz="1800" kern="1200">
+                <a:solidFill>
+                  <a:schemeClr val="tx1"/>
+                </a:solidFill>
+                <a:latin typeface="+mn-lt"/>
+                <a:ea typeface="+mn-ea"/>
+                <a:cs typeface="+mn-cs"/>
+              </a:defRPr>
+            </a:lvl9pPr>
+          </a:lstStyle>
+          <a:p>
+            <a:pPr marL="0" marR="0" lvl="0" indent="0" algn="ctr" defTabSz="914400" rtl="0" eaLnBrk="1" fontAlgn="auto" latinLnBrk="0" hangingPunct="1">
+              <a:lnSpc>
+                <a:spcPct val="100000"/>
+              </a:lnSpc>
+              <a:spcBef>
+                <a:spcPts val="0"/>
+              </a:spcBef>
+              <a:spcAft>
+                <a:spcPts val="0"/>
+              </a:spcAft>
+              <a:buClrTx/>
+              <a:buSzTx/>
+              <a:buFontTx/>
+              <a:buNone/>
+              <a:tabLst/>
+              <a:defRPr/>
+            </a:pPr>
+            <a:r>
+              <a:rPr kumimoji="0" lang="en-US" sz="1200" b="0" i="0" u="none" strike="noStrike" kern="1200" cap="none" spc="0" normalizeH="0" baseline="0" noProof="0" dirty="0">
+                <a:ln>
+                  <a:noFill/>
+                </a:ln>
+                <a:solidFill>
+                  <a:prstClr val="black">
+                    <a:tint val="75000"/>
+                  </a:prstClr>
+                </a:solidFill>
+                <a:effectLst/>
+                <a:uLnTx/>
+                <a:uFillTx/>
+                <a:latin typeface="Helvetica Neue" panose="02000503000000020004" pitchFamily="2" charset="0"/>
+                <a:ea typeface="Helvetica Neue" panose="02000503000000020004" pitchFamily="2" charset="0"/>
+                <a:cs typeface="Helvetica Neue" panose="02000503000000020004" pitchFamily="2" charset="0"/>
+              </a:rPr>
+              <a:t>architrino.com</a:t>
+            </a:r>
+          </a:p>
+        </p:txBody>
+      </p:sp>
     </p:spTree>
     <p:extLst>
       <p:ext uri="{BB962C8B-B14F-4D97-AF65-F5344CB8AC3E}">
-        <p14:creationId xmlns:p14="http://schemas.microsoft.com/office/powerpoint/2010/main" val="3747833275"/>
+        <ns5:creationId val="3747833275"/>
       </p:ext>
     </p:extLst>
   </p:cSld>
@@ -8359,7 +8827,7 @@
 </file>
 
 <file path=ppt/slides/slide12.xml><?xml version="1.0" encoding="utf-8"?>
-<p:sld xmlns:a="http://schemas.openxmlformats.org/drawingml/2006/main" xmlns:r="http://schemas.openxmlformats.org/officeDocument/2006/relationships" xmlns:p="http://schemas.openxmlformats.org/presentationml/2006/main">
+<p:sld xmlns:a="http://schemas.openxmlformats.org/drawingml/2006/main" xmlns:a16="http://schemas.microsoft.com/office/drawing/2014/main" xmlns:ns3="http://schemas.microsoft.com/office/powerpoint/2010/main" xmlns:p="http://schemas.openxmlformats.org/presentationml/2006/main">
   <p:cSld>
     <p:bg>
       <p:bgPr>
@@ -8374,7 +8842,7 @@
         <p:cNvPr id="1" name="">
           <a:extLst>
             <a:ext uri="{FF2B5EF4-FFF2-40B4-BE49-F238E27FC236}">
-              <a16:creationId xmlns:a16="http://schemas.microsoft.com/office/drawing/2014/main" id="{84A2A9E9-70D3-76F3-62DA-B8A646AE36F7}"/>
+              <a16:creationId id="{84A2A9E9-70D3-76F3-62DA-B8A646AE36F7}"/>
             </a:ext>
           </a:extLst>
         </p:cNvPr>
@@ -8394,7 +8862,7 @@
           <p:cNvPr id="5" name="Footer Placeholder 3">
             <a:extLst>
               <a:ext uri="{FF2B5EF4-FFF2-40B4-BE49-F238E27FC236}">
-                <a16:creationId xmlns:a16="http://schemas.microsoft.com/office/drawing/2014/main" id="{14825113-EAFD-FBE0-8FFF-ADE632AC7301}"/>
+                <a16:creationId id="{14825113-EAFD-FBE0-8FFF-ADE632AC7301}"/>
               </a:ext>
             </a:extLst>
           </p:cNvPr>
@@ -8556,7 +9024,7 @@
           <p:cNvPr id="8" name="TextBox 7">
             <a:extLst>
               <a:ext uri="{FF2B5EF4-FFF2-40B4-BE49-F238E27FC236}">
-                <a16:creationId xmlns:a16="http://schemas.microsoft.com/office/drawing/2014/main" id="{238E18F6-C9DC-76A4-6BE8-0F4D215C824E}"/>
+                <a16:creationId id="{238E18F6-C9DC-76A4-6BE8-0F4D215C824E}"/>
               </a:ext>
             </a:extLst>
           </p:cNvPr>
@@ -8968,7 +9436,7 @@
           <p:cNvPr id="3" name="TextBox 2">
             <a:extLst>
               <a:ext uri="{FF2B5EF4-FFF2-40B4-BE49-F238E27FC236}">
-                <a16:creationId xmlns:a16="http://schemas.microsoft.com/office/drawing/2014/main" id="{70E214BE-6576-6BE4-953B-56C5AEBEDB96}"/>
+                <a16:creationId id="{70E214BE-6576-6BE4-953B-56C5AEBEDB96}"/>
               </a:ext>
             </a:extLst>
           </p:cNvPr>
@@ -9005,10 +9473,166 @@
           </a:p>
         </p:txBody>
       </p:sp>
+      <p:sp>
+        <p:nvSpPr>
+          <p:cNvPr id="9" name="Footer Placeholder 3"/>
+          <p:cNvSpPr txBox="1">
+            <a:spLocks/>
+          </p:cNvSpPr>
+          <p:nvPr/>
+        </p:nvSpPr>
+        <p:spPr>
+          <a:xfrm>
+            <a:off x="10942204" y="6481737"/>
+            <a:ext cx="1217443" cy="365125"/>
+          </a:xfrm>
+          <a:prstGeom prst="rect">
+            <a:avLst/>
+          </a:prstGeom>
+        </p:spPr>
+        <p:txBody>
+          <a:bodyPr vert="horz" lIns="91440" tIns="45720" rIns="91440" bIns="45720" rtlCol="0" anchor="ctr"/>
+          <a:lstStyle>
+            <a:defPPr>
+              <a:defRPr lang="en-US"/>
+            </a:defPPr>
+            <a:lvl1pPr marL="0" algn="ctr" defTabSz="914400" rtl="0" eaLnBrk="1" latinLnBrk="0" hangingPunct="1">
+              <a:defRPr sz="1200" kern="1200">
+                <a:solidFill>
+                  <a:schemeClr val="tx1">
+                    <a:tint val="75000"/>
+                  </a:schemeClr>
+                </a:solidFill>
+                <a:latin typeface="+mn-lt"/>
+                <a:ea typeface="+mn-ea"/>
+                <a:cs typeface="+mn-cs"/>
+              </a:defRPr>
+            </a:lvl1pPr>
+            <a:lvl2pPr marL="457200" algn="l" defTabSz="914400" rtl="0" eaLnBrk="1" latinLnBrk="0" hangingPunct="1">
+              <a:defRPr sz="1800" kern="1200">
+                <a:solidFill>
+                  <a:schemeClr val="tx1"/>
+                </a:solidFill>
+                <a:latin typeface="+mn-lt"/>
+                <a:ea typeface="+mn-ea"/>
+                <a:cs typeface="+mn-cs"/>
+              </a:defRPr>
+            </a:lvl2pPr>
+            <a:lvl3pPr marL="914400" algn="l" defTabSz="914400" rtl="0" eaLnBrk="1" latinLnBrk="0" hangingPunct="1">
+              <a:defRPr sz="1800" kern="1200">
+                <a:solidFill>
+                  <a:schemeClr val="tx1"/>
+                </a:solidFill>
+                <a:latin typeface="+mn-lt"/>
+                <a:ea typeface="+mn-ea"/>
+                <a:cs typeface="+mn-cs"/>
+              </a:defRPr>
+            </a:lvl3pPr>
+            <a:lvl4pPr marL="1371600" algn="l" defTabSz="914400" rtl="0" eaLnBrk="1" latinLnBrk="0" hangingPunct="1">
+              <a:defRPr sz="1800" kern="1200">
+                <a:solidFill>
+                  <a:schemeClr val="tx1"/>
+                </a:solidFill>
+                <a:latin typeface="+mn-lt"/>
+                <a:ea typeface="+mn-ea"/>
+                <a:cs typeface="+mn-cs"/>
+              </a:defRPr>
+            </a:lvl4pPr>
+            <a:lvl5pPr marL="1828800" algn="l" defTabSz="914400" rtl="0" eaLnBrk="1" latinLnBrk="0" hangingPunct="1">
+              <a:defRPr sz="1800" kern="1200">
+                <a:solidFill>
+                  <a:schemeClr val="tx1"/>
+                </a:solidFill>
+                <a:latin typeface="+mn-lt"/>
+                <a:ea typeface="+mn-ea"/>
+                <a:cs typeface="+mn-cs"/>
+              </a:defRPr>
+            </a:lvl5pPr>
+            <a:lvl6pPr marL="2286000" algn="l" defTabSz="914400" rtl="0" eaLnBrk="1" latinLnBrk="0" hangingPunct="1">
+              <a:defRPr sz="1800" kern="1200">
+                <a:solidFill>
+                  <a:schemeClr val="tx1"/>
+                </a:solidFill>
+                <a:latin typeface="+mn-lt"/>
+                <a:ea typeface="+mn-ea"/>
+                <a:cs typeface="+mn-cs"/>
+              </a:defRPr>
+            </a:lvl6pPr>
+            <a:lvl7pPr marL="2743200" algn="l" defTabSz="914400" rtl="0" eaLnBrk="1" latinLnBrk="0" hangingPunct="1">
+              <a:defRPr sz="1800" kern="1200">
+                <a:solidFill>
+                  <a:schemeClr val="tx1"/>
+                </a:solidFill>
+                <a:latin typeface="+mn-lt"/>
+                <a:ea typeface="+mn-ea"/>
+                <a:cs typeface="+mn-cs"/>
+              </a:defRPr>
+            </a:lvl7pPr>
+            <a:lvl8pPr marL="3200400" algn="l" defTabSz="914400" rtl="0" eaLnBrk="1" latinLnBrk="0" hangingPunct="1">
+              <a:defRPr sz="1800" kern="1200">
+                <a:solidFill>
+                  <a:schemeClr val="tx1"/>
+                </a:solidFill>
+                <a:latin typeface="+mn-lt"/>
+                <a:ea typeface="+mn-ea"/>
+                <a:cs typeface="+mn-cs"/>
+              </a:defRPr>
+            </a:lvl8pPr>
+            <a:lvl9pPr marL="3657600" algn="l" defTabSz="914400" rtl="0" eaLnBrk="1" latinLnBrk="0" hangingPunct="1">
+              <a:defRPr sz="1800" kern="1200">
+                <a:solidFill>
+                  <a:schemeClr val="tx1"/>
+                </a:solidFill>
+                <a:latin typeface="+mn-lt"/>
+                <a:ea typeface="+mn-ea"/>
+                <a:cs typeface="+mn-cs"/>
+              </a:defRPr>
+            </a:lvl9pPr>
+          </a:lstStyle>
+          <a:p>
+            <a:pPr marL="0" marR="0" lvl="0" indent="0" algn="ctr" defTabSz="914400" rtl="0" eaLnBrk="1" fontAlgn="auto" latinLnBrk="0" hangingPunct="1">
+              <a:lnSpc>
+                <a:spcPct val="100000"/>
+              </a:lnSpc>
+              <a:spcBef>
+                <a:spcPts val="0"/>
+              </a:spcBef>
+              <a:spcAft>
+                <a:spcPts val="0"/>
+              </a:spcAft>
+              <a:buClrTx/>
+              <a:buSzTx/>
+              <a:buFontTx/>
+              <a:buNone/>
+              <a:tabLst/>
+              <a:defRPr/>
+            </a:pPr>
+            <a:r>
+              <a:rPr kumimoji="0" lang="en-US" sz="1200" b="0" i="0" u="none" strike="noStrike" kern="1200" cap="none" spc="0" normalizeH="0" baseline="0" noProof="0" dirty="0">
+                <a:ln>
+                  <a:noFill/>
+                </a:ln>
+                <a:solidFill>
+                  <a:prstClr val="black">
+                    <a:tint val="75000"/>
+                  </a:prstClr>
+                </a:solidFill>
+                <a:effectLst/>
+                <a:uLnTx/>
+                <a:uFillTx/>
+                <a:latin typeface="Helvetica Neue" panose="02000503000000020004" pitchFamily="2" charset="0"/>
+                <a:ea typeface="Helvetica Neue" panose="02000503000000020004" pitchFamily="2" charset="0"/>
+                <a:cs typeface="Helvetica Neue" panose="02000503000000020004" pitchFamily="2" charset="0"/>
+              </a:rPr>
+              <a:t>architrino.com</a:t>
+            </a:r>
+          </a:p>
+        </p:txBody>
+      </p:sp>
     </p:spTree>
     <p:extLst>
       <p:ext uri="{BB962C8B-B14F-4D97-AF65-F5344CB8AC3E}">
-        <p14:creationId xmlns:p14="http://schemas.microsoft.com/office/powerpoint/2010/main" val="2796403270"/>
+        <ns3:creationId val="2796403270"/>
       </p:ext>
     </p:extLst>
   </p:cSld>
@@ -9019,7 +9643,7 @@
 </file>
 
 <file path=ppt/slides/slide13.xml><?xml version="1.0" encoding="utf-8"?>
-<p:sld xmlns:a="http://schemas.openxmlformats.org/drawingml/2006/main" xmlns:r="http://schemas.openxmlformats.org/officeDocument/2006/relationships" xmlns:p="http://schemas.openxmlformats.org/presentationml/2006/main">
+<p:sld xmlns:a="http://schemas.openxmlformats.org/drawingml/2006/main" xmlns:a16="http://schemas.microsoft.com/office/drawing/2014/main" xmlns:ns4="http://schemas.microsoft.com/office/powerpoint/2010/main" xmlns:p="http://schemas.openxmlformats.org/presentationml/2006/main" xmlns:r="http://schemas.openxmlformats.org/officeDocument/2006/relationships">
   <p:cSld>
     <p:bg>
       <p:bgPr>
@@ -9034,7 +9658,7 @@
         <p:cNvPr id="1" name="">
           <a:extLst>
             <a:ext uri="{FF2B5EF4-FFF2-40B4-BE49-F238E27FC236}">
-              <a16:creationId xmlns:a16="http://schemas.microsoft.com/office/drawing/2014/main" id="{F038DB4A-3170-80D2-BE14-C60EBAC46D3F}"/>
+              <a16:creationId id="{F038DB4A-3170-80D2-BE14-C60EBAC46D3F}"/>
             </a:ext>
           </a:extLst>
         </p:cNvPr>
@@ -9054,7 +9678,7 @@
           <p:cNvPr id="5" name="Footer Placeholder 3">
             <a:extLst>
               <a:ext uri="{FF2B5EF4-FFF2-40B4-BE49-F238E27FC236}">
-                <a16:creationId xmlns:a16="http://schemas.microsoft.com/office/drawing/2014/main" id="{D62E685F-2B63-085A-D318-954A749F457F}"/>
+                <a16:creationId id="{D62E685F-2B63-085A-D318-954A749F457F}"/>
               </a:ext>
             </a:extLst>
           </p:cNvPr>
@@ -9216,7 +9840,7 @@
           <p:cNvPr id="3" name="TextBox 2">
             <a:extLst>
               <a:ext uri="{FF2B5EF4-FFF2-40B4-BE49-F238E27FC236}">
-                <a16:creationId xmlns:a16="http://schemas.microsoft.com/office/drawing/2014/main" id="{DFF01D0D-C6C7-24BE-AE84-C46583D09214}"/>
+                <a16:creationId id="{DFF01D0D-C6C7-24BE-AE84-C46583D09214}"/>
               </a:ext>
             </a:extLst>
           </p:cNvPr>
@@ -9248,7 +9872,7 @@
                 <a:ea typeface="Helvetica Neue" panose="02000503000000020004" pitchFamily="2" charset="0"/>
                 <a:cs typeface="Helvetica Neue" panose="02000503000000020004" pitchFamily="2" charset="0"/>
               </a:rPr>
-              <a:t>h/t ChatGPT</a:t>
+              <a:t/>
             </a:r>
           </a:p>
         </p:txBody>
@@ -9258,7 +9882,7 @@
           <p:cNvPr id="2" name="Picture 1">
             <a:extLst>
               <a:ext uri="{FF2B5EF4-FFF2-40B4-BE49-F238E27FC236}">
-                <a16:creationId xmlns:a16="http://schemas.microsoft.com/office/drawing/2014/main" id="{E6D33851-4BCD-E082-9760-FDEE86AC64F7}"/>
+                <a16:creationId id="{E6D33851-4BCD-E082-9760-FDEE86AC64F7}"/>
               </a:ext>
             </a:extLst>
           </p:cNvPr>
@@ -9288,7 +9912,7 @@
           <p:cNvPr id="6" name="TextBox 5">
             <a:extLst>
               <a:ext uri="{FF2B5EF4-FFF2-40B4-BE49-F238E27FC236}">
-                <a16:creationId xmlns:a16="http://schemas.microsoft.com/office/drawing/2014/main" id="{14CD8DA9-9F93-D6DC-D0B2-2A553602794A}"/>
+                <a16:creationId id="{14CD8DA9-9F93-D6DC-D0B2-2A553602794A}"/>
               </a:ext>
             </a:extLst>
           </p:cNvPr>
@@ -9441,7 +10065,7 @@
                 <a:ea typeface="Helvetica Neue" panose="02000503000000020004" pitchFamily="2" charset="0"/>
                 <a:cs typeface="Helvetica Neue" panose="02000503000000020004" pitchFamily="2" charset="0"/>
               </a:rPr>
-              <a:t>point potentials move through potential fields at ease</a:t>
+              <a:t>architrinos move through potential fields at ease</a:t>
             </a:r>
           </a:p>
           <a:p>
@@ -9504,10 +10128,166 @@
           </a:p>
         </p:txBody>
       </p:sp>
+      <p:sp>
+        <p:nvSpPr>
+          <p:cNvPr id="7" name="Footer Placeholder 3"/>
+          <p:cNvSpPr txBox="1">
+            <a:spLocks/>
+          </p:cNvSpPr>
+          <p:nvPr/>
+        </p:nvSpPr>
+        <p:spPr>
+          <a:xfrm>
+            <a:off x="10942204" y="6481737"/>
+            <a:ext cx="1217443" cy="365125"/>
+          </a:xfrm>
+          <a:prstGeom prst="rect">
+            <a:avLst/>
+          </a:prstGeom>
+        </p:spPr>
+        <p:txBody>
+          <a:bodyPr vert="horz" lIns="91440" tIns="45720" rIns="91440" bIns="45720" rtlCol="0" anchor="ctr"/>
+          <a:lstStyle>
+            <a:defPPr>
+              <a:defRPr lang="en-US"/>
+            </a:defPPr>
+            <a:lvl1pPr marL="0" algn="ctr" defTabSz="914400" rtl="0" eaLnBrk="1" latinLnBrk="0" hangingPunct="1">
+              <a:defRPr sz="1200" kern="1200">
+                <a:solidFill>
+                  <a:schemeClr val="tx1">
+                    <a:tint val="75000"/>
+                  </a:schemeClr>
+                </a:solidFill>
+                <a:latin typeface="+mn-lt"/>
+                <a:ea typeface="+mn-ea"/>
+                <a:cs typeface="+mn-cs"/>
+              </a:defRPr>
+            </a:lvl1pPr>
+            <a:lvl2pPr marL="457200" algn="l" defTabSz="914400" rtl="0" eaLnBrk="1" latinLnBrk="0" hangingPunct="1">
+              <a:defRPr sz="1800" kern="1200">
+                <a:solidFill>
+                  <a:schemeClr val="tx1"/>
+                </a:solidFill>
+                <a:latin typeface="+mn-lt"/>
+                <a:ea typeface="+mn-ea"/>
+                <a:cs typeface="+mn-cs"/>
+              </a:defRPr>
+            </a:lvl2pPr>
+            <a:lvl3pPr marL="914400" algn="l" defTabSz="914400" rtl="0" eaLnBrk="1" latinLnBrk="0" hangingPunct="1">
+              <a:defRPr sz="1800" kern="1200">
+                <a:solidFill>
+                  <a:schemeClr val="tx1"/>
+                </a:solidFill>
+                <a:latin typeface="+mn-lt"/>
+                <a:ea typeface="+mn-ea"/>
+                <a:cs typeface="+mn-cs"/>
+              </a:defRPr>
+            </a:lvl3pPr>
+            <a:lvl4pPr marL="1371600" algn="l" defTabSz="914400" rtl="0" eaLnBrk="1" latinLnBrk="0" hangingPunct="1">
+              <a:defRPr sz="1800" kern="1200">
+                <a:solidFill>
+                  <a:schemeClr val="tx1"/>
+                </a:solidFill>
+                <a:latin typeface="+mn-lt"/>
+                <a:ea typeface="+mn-ea"/>
+                <a:cs typeface="+mn-cs"/>
+              </a:defRPr>
+            </a:lvl4pPr>
+            <a:lvl5pPr marL="1828800" algn="l" defTabSz="914400" rtl="0" eaLnBrk="1" latinLnBrk="0" hangingPunct="1">
+              <a:defRPr sz="1800" kern="1200">
+                <a:solidFill>
+                  <a:schemeClr val="tx1"/>
+                </a:solidFill>
+                <a:latin typeface="+mn-lt"/>
+                <a:ea typeface="+mn-ea"/>
+                <a:cs typeface="+mn-cs"/>
+              </a:defRPr>
+            </a:lvl5pPr>
+            <a:lvl6pPr marL="2286000" algn="l" defTabSz="914400" rtl="0" eaLnBrk="1" latinLnBrk="0" hangingPunct="1">
+              <a:defRPr sz="1800" kern="1200">
+                <a:solidFill>
+                  <a:schemeClr val="tx1"/>
+                </a:solidFill>
+                <a:latin typeface="+mn-lt"/>
+                <a:ea typeface="+mn-ea"/>
+                <a:cs typeface="+mn-cs"/>
+              </a:defRPr>
+            </a:lvl6pPr>
+            <a:lvl7pPr marL="2743200" algn="l" defTabSz="914400" rtl="0" eaLnBrk="1" latinLnBrk="0" hangingPunct="1">
+              <a:defRPr sz="1800" kern="1200">
+                <a:solidFill>
+                  <a:schemeClr val="tx1"/>
+                </a:solidFill>
+                <a:latin typeface="+mn-lt"/>
+                <a:ea typeface="+mn-ea"/>
+                <a:cs typeface="+mn-cs"/>
+              </a:defRPr>
+            </a:lvl7pPr>
+            <a:lvl8pPr marL="3200400" algn="l" defTabSz="914400" rtl="0" eaLnBrk="1" latinLnBrk="0" hangingPunct="1">
+              <a:defRPr sz="1800" kern="1200">
+                <a:solidFill>
+                  <a:schemeClr val="tx1"/>
+                </a:solidFill>
+                <a:latin typeface="+mn-lt"/>
+                <a:ea typeface="+mn-ea"/>
+                <a:cs typeface="+mn-cs"/>
+              </a:defRPr>
+            </a:lvl8pPr>
+            <a:lvl9pPr marL="3657600" algn="l" defTabSz="914400" rtl="0" eaLnBrk="1" latinLnBrk="0" hangingPunct="1">
+              <a:defRPr sz="1800" kern="1200">
+                <a:solidFill>
+                  <a:schemeClr val="tx1"/>
+                </a:solidFill>
+                <a:latin typeface="+mn-lt"/>
+                <a:ea typeface="+mn-ea"/>
+                <a:cs typeface="+mn-cs"/>
+              </a:defRPr>
+            </a:lvl9pPr>
+          </a:lstStyle>
+          <a:p>
+            <a:pPr marL="0" marR="0" lvl="0" indent="0" algn="ctr" defTabSz="914400" rtl="0" eaLnBrk="1" fontAlgn="auto" latinLnBrk="0" hangingPunct="1">
+              <a:lnSpc>
+                <a:spcPct val="100000"/>
+              </a:lnSpc>
+              <a:spcBef>
+                <a:spcPts val="0"/>
+              </a:spcBef>
+              <a:spcAft>
+                <a:spcPts val="0"/>
+              </a:spcAft>
+              <a:buClrTx/>
+              <a:buSzTx/>
+              <a:buFontTx/>
+              <a:buNone/>
+              <a:tabLst/>
+              <a:defRPr/>
+            </a:pPr>
+            <a:r>
+              <a:rPr kumimoji="0" lang="en-US" sz="1200" b="0" i="0" u="none" strike="noStrike" kern="1200" cap="none" spc="0" normalizeH="0" baseline="0" noProof="0" dirty="0">
+                <a:ln>
+                  <a:noFill/>
+                </a:ln>
+                <a:solidFill>
+                  <a:prstClr val="black">
+                    <a:tint val="75000"/>
+                  </a:prstClr>
+                </a:solidFill>
+                <a:effectLst/>
+                <a:uLnTx/>
+                <a:uFillTx/>
+                <a:latin typeface="Helvetica Neue" panose="02000503000000020004" pitchFamily="2" charset="0"/>
+                <a:ea typeface="Helvetica Neue" panose="02000503000000020004" pitchFamily="2" charset="0"/>
+                <a:cs typeface="Helvetica Neue" panose="02000503000000020004" pitchFamily="2" charset="0"/>
+              </a:rPr>
+              <a:t>architrino.com</a:t>
+            </a:r>
+          </a:p>
+        </p:txBody>
+      </p:sp>
     </p:spTree>
     <p:extLst>
       <p:ext uri="{BB962C8B-B14F-4D97-AF65-F5344CB8AC3E}">
-        <p14:creationId xmlns:p14="http://schemas.microsoft.com/office/powerpoint/2010/main" val="3704854406"/>
+        <ns4:creationId val="3704854406"/>
       </p:ext>
     </p:extLst>
   </p:cSld>
@@ -9518,7 +10298,7 @@
 </file>
 
 <file path=ppt/slides/slide14.xml><?xml version="1.0" encoding="utf-8"?>
-<p:sld xmlns:a="http://schemas.openxmlformats.org/drawingml/2006/main" xmlns:r="http://schemas.openxmlformats.org/officeDocument/2006/relationships" xmlns:p="http://schemas.openxmlformats.org/presentationml/2006/main">
+<p:sld xmlns:a="http://schemas.openxmlformats.org/drawingml/2006/main" xmlns:a16="http://schemas.microsoft.com/office/drawing/2014/main" xmlns:ns4="http://schemas.microsoft.com/office/powerpoint/2010/main" xmlns:p="http://schemas.openxmlformats.org/presentationml/2006/main" xmlns:r="http://schemas.openxmlformats.org/officeDocument/2006/relationships">
   <p:cSld>
     <p:bg>
       <p:bgPr>
@@ -9533,7 +10313,7 @@
         <p:cNvPr id="1" name="">
           <a:extLst>
             <a:ext uri="{FF2B5EF4-FFF2-40B4-BE49-F238E27FC236}">
-              <a16:creationId xmlns:a16="http://schemas.microsoft.com/office/drawing/2014/main" id="{73430D88-1A63-8AAD-B38F-D98DC73DC464}"/>
+              <a16:creationId id="{73430D88-1A63-8AAD-B38F-D98DC73DC464}"/>
             </a:ext>
           </a:extLst>
         </p:cNvPr>
@@ -9553,7 +10333,7 @@
           <p:cNvPr id="5" name="Footer Placeholder 3">
             <a:extLst>
               <a:ext uri="{FF2B5EF4-FFF2-40B4-BE49-F238E27FC236}">
-                <a16:creationId xmlns:a16="http://schemas.microsoft.com/office/drawing/2014/main" id="{753C8DBD-DDA9-7032-AAC2-D2AAC26F477E}"/>
+                <a16:creationId id="{753C8DBD-DDA9-7032-AAC2-D2AAC26F477E}"/>
               </a:ext>
             </a:extLst>
           </p:cNvPr>
@@ -9715,7 +10495,7 @@
           <p:cNvPr id="3" name="TextBox 2">
             <a:extLst>
               <a:ext uri="{FF2B5EF4-FFF2-40B4-BE49-F238E27FC236}">
-                <a16:creationId xmlns:a16="http://schemas.microsoft.com/office/drawing/2014/main" id="{ACFFDE0A-9B7D-C2B6-E32F-AE01C2F4D5B5}"/>
+                <a16:creationId id="{ACFFDE0A-9B7D-C2B6-E32F-AE01C2F4D5B5}"/>
               </a:ext>
             </a:extLst>
           </p:cNvPr>
@@ -9747,7 +10527,7 @@
                 <a:ea typeface="Helvetica Neue" panose="02000503000000020004" pitchFamily="2" charset="0"/>
                 <a:cs typeface="Helvetica Neue" panose="02000503000000020004" pitchFamily="2" charset="0"/>
               </a:rPr>
-              <a:t>h/t ChatGPT</a:t>
+              <a:t/>
             </a:r>
           </a:p>
         </p:txBody>
@@ -9757,7 +10537,7 @@
           <p:cNvPr id="4" name="Picture 3">
             <a:extLst>
               <a:ext uri="{FF2B5EF4-FFF2-40B4-BE49-F238E27FC236}">
-                <a16:creationId xmlns:a16="http://schemas.microsoft.com/office/drawing/2014/main" id="{5CC8194B-30FC-BE15-3BC4-92A1EB9B3341}"/>
+                <a16:creationId id="{5CC8194B-30FC-BE15-3BC4-92A1EB9B3341}"/>
               </a:ext>
             </a:extLst>
           </p:cNvPr>
@@ -9787,7 +10567,7 @@
           <p:cNvPr id="6" name="TextBox 5">
             <a:extLst>
               <a:ext uri="{FF2B5EF4-FFF2-40B4-BE49-F238E27FC236}">
-                <a16:creationId xmlns:a16="http://schemas.microsoft.com/office/drawing/2014/main" id="{EDE5D03E-88C5-20A2-A1A5-70FB67273DD7}"/>
+                <a16:creationId id="{EDE5D03E-88C5-20A2-A1A5-70FB67273DD7}"/>
               </a:ext>
             </a:extLst>
           </p:cNvPr>
@@ -9990,7 +10770,7 @@
           <p:cNvPr id="2" name="Picture 1">
             <a:extLst>
               <a:ext uri="{FF2B5EF4-FFF2-40B4-BE49-F238E27FC236}">
-                <a16:creationId xmlns:a16="http://schemas.microsoft.com/office/drawing/2014/main" id="{433D4A9F-6D3A-A53F-5EBF-4E3AB3133871}"/>
+                <a16:creationId id="{433D4A9F-6D3A-A53F-5EBF-4E3AB3133871}"/>
               </a:ext>
             </a:extLst>
           </p:cNvPr>
@@ -10020,7 +10800,7 @@
           <p:cNvPr id="7" name="Picture 6">
             <a:extLst>
               <a:ext uri="{FF2B5EF4-FFF2-40B4-BE49-F238E27FC236}">
-                <a16:creationId xmlns:a16="http://schemas.microsoft.com/office/drawing/2014/main" id="{AC32DE47-0DF1-DFA4-F0BF-74CC7FB64625}"/>
+                <a16:creationId id="{AC32DE47-0DF1-DFA4-F0BF-74CC7FB64625}"/>
               </a:ext>
             </a:extLst>
           </p:cNvPr>
@@ -10045,10 +10825,166 @@
           </a:prstGeom>
         </p:spPr>
       </p:pic>
+      <p:sp>
+        <p:nvSpPr>
+          <p:cNvPr id="8" name="Footer Placeholder 3"/>
+          <p:cNvSpPr txBox="1">
+            <a:spLocks/>
+          </p:cNvSpPr>
+          <p:nvPr/>
+        </p:nvSpPr>
+        <p:spPr>
+          <a:xfrm>
+            <a:off x="10942204" y="6481737"/>
+            <a:ext cx="1217443" cy="365125"/>
+          </a:xfrm>
+          <a:prstGeom prst="rect">
+            <a:avLst/>
+          </a:prstGeom>
+        </p:spPr>
+        <p:txBody>
+          <a:bodyPr vert="horz" lIns="91440" tIns="45720" rIns="91440" bIns="45720" rtlCol="0" anchor="ctr"/>
+          <a:lstStyle>
+            <a:defPPr>
+              <a:defRPr lang="en-US"/>
+            </a:defPPr>
+            <a:lvl1pPr marL="0" algn="ctr" defTabSz="914400" rtl="0" eaLnBrk="1" latinLnBrk="0" hangingPunct="1">
+              <a:defRPr sz="1200" kern="1200">
+                <a:solidFill>
+                  <a:schemeClr val="tx1">
+                    <a:tint val="75000"/>
+                  </a:schemeClr>
+                </a:solidFill>
+                <a:latin typeface="+mn-lt"/>
+                <a:ea typeface="+mn-ea"/>
+                <a:cs typeface="+mn-cs"/>
+              </a:defRPr>
+            </a:lvl1pPr>
+            <a:lvl2pPr marL="457200" algn="l" defTabSz="914400" rtl="0" eaLnBrk="1" latinLnBrk="0" hangingPunct="1">
+              <a:defRPr sz="1800" kern="1200">
+                <a:solidFill>
+                  <a:schemeClr val="tx1"/>
+                </a:solidFill>
+                <a:latin typeface="+mn-lt"/>
+                <a:ea typeface="+mn-ea"/>
+                <a:cs typeface="+mn-cs"/>
+              </a:defRPr>
+            </a:lvl2pPr>
+            <a:lvl3pPr marL="914400" algn="l" defTabSz="914400" rtl="0" eaLnBrk="1" latinLnBrk="0" hangingPunct="1">
+              <a:defRPr sz="1800" kern="1200">
+                <a:solidFill>
+                  <a:schemeClr val="tx1"/>
+                </a:solidFill>
+                <a:latin typeface="+mn-lt"/>
+                <a:ea typeface="+mn-ea"/>
+                <a:cs typeface="+mn-cs"/>
+              </a:defRPr>
+            </a:lvl3pPr>
+            <a:lvl4pPr marL="1371600" algn="l" defTabSz="914400" rtl="0" eaLnBrk="1" latinLnBrk="0" hangingPunct="1">
+              <a:defRPr sz="1800" kern="1200">
+                <a:solidFill>
+                  <a:schemeClr val="tx1"/>
+                </a:solidFill>
+                <a:latin typeface="+mn-lt"/>
+                <a:ea typeface="+mn-ea"/>
+                <a:cs typeface="+mn-cs"/>
+              </a:defRPr>
+            </a:lvl4pPr>
+            <a:lvl5pPr marL="1828800" algn="l" defTabSz="914400" rtl="0" eaLnBrk="1" latinLnBrk="0" hangingPunct="1">
+              <a:defRPr sz="1800" kern="1200">
+                <a:solidFill>
+                  <a:schemeClr val="tx1"/>
+                </a:solidFill>
+                <a:latin typeface="+mn-lt"/>
+                <a:ea typeface="+mn-ea"/>
+                <a:cs typeface="+mn-cs"/>
+              </a:defRPr>
+            </a:lvl5pPr>
+            <a:lvl6pPr marL="2286000" algn="l" defTabSz="914400" rtl="0" eaLnBrk="1" latinLnBrk="0" hangingPunct="1">
+              <a:defRPr sz="1800" kern="1200">
+                <a:solidFill>
+                  <a:schemeClr val="tx1"/>
+                </a:solidFill>
+                <a:latin typeface="+mn-lt"/>
+                <a:ea typeface="+mn-ea"/>
+                <a:cs typeface="+mn-cs"/>
+              </a:defRPr>
+            </a:lvl6pPr>
+            <a:lvl7pPr marL="2743200" algn="l" defTabSz="914400" rtl="0" eaLnBrk="1" latinLnBrk="0" hangingPunct="1">
+              <a:defRPr sz="1800" kern="1200">
+                <a:solidFill>
+                  <a:schemeClr val="tx1"/>
+                </a:solidFill>
+                <a:latin typeface="+mn-lt"/>
+                <a:ea typeface="+mn-ea"/>
+                <a:cs typeface="+mn-cs"/>
+              </a:defRPr>
+            </a:lvl7pPr>
+            <a:lvl8pPr marL="3200400" algn="l" defTabSz="914400" rtl="0" eaLnBrk="1" latinLnBrk="0" hangingPunct="1">
+              <a:defRPr sz="1800" kern="1200">
+                <a:solidFill>
+                  <a:schemeClr val="tx1"/>
+                </a:solidFill>
+                <a:latin typeface="+mn-lt"/>
+                <a:ea typeface="+mn-ea"/>
+                <a:cs typeface="+mn-cs"/>
+              </a:defRPr>
+            </a:lvl8pPr>
+            <a:lvl9pPr marL="3657600" algn="l" defTabSz="914400" rtl="0" eaLnBrk="1" latinLnBrk="0" hangingPunct="1">
+              <a:defRPr sz="1800" kern="1200">
+                <a:solidFill>
+                  <a:schemeClr val="tx1"/>
+                </a:solidFill>
+                <a:latin typeface="+mn-lt"/>
+                <a:ea typeface="+mn-ea"/>
+                <a:cs typeface="+mn-cs"/>
+              </a:defRPr>
+            </a:lvl9pPr>
+          </a:lstStyle>
+          <a:p>
+            <a:pPr marL="0" marR="0" lvl="0" indent="0" algn="ctr" defTabSz="914400" rtl="0" eaLnBrk="1" fontAlgn="auto" latinLnBrk="0" hangingPunct="1">
+              <a:lnSpc>
+                <a:spcPct val="100000"/>
+              </a:lnSpc>
+              <a:spcBef>
+                <a:spcPts val="0"/>
+              </a:spcBef>
+              <a:spcAft>
+                <a:spcPts val="0"/>
+              </a:spcAft>
+              <a:buClrTx/>
+              <a:buSzTx/>
+              <a:buFontTx/>
+              <a:buNone/>
+              <a:tabLst/>
+              <a:defRPr/>
+            </a:pPr>
+            <a:r>
+              <a:rPr kumimoji="0" lang="en-US" sz="1200" b="0" i="0" u="none" strike="noStrike" kern="1200" cap="none" spc="0" normalizeH="0" baseline="0" noProof="0" dirty="0">
+                <a:ln>
+                  <a:noFill/>
+                </a:ln>
+                <a:solidFill>
+                  <a:prstClr val="black">
+                    <a:tint val="75000"/>
+                  </a:prstClr>
+                </a:solidFill>
+                <a:effectLst/>
+                <a:uLnTx/>
+                <a:uFillTx/>
+                <a:latin typeface="Helvetica Neue" panose="02000503000000020004" pitchFamily="2" charset="0"/>
+                <a:ea typeface="Helvetica Neue" panose="02000503000000020004" pitchFamily="2" charset="0"/>
+                <a:cs typeface="Helvetica Neue" panose="02000503000000020004" pitchFamily="2" charset="0"/>
+              </a:rPr>
+              <a:t>architrino.com</a:t>
+            </a:r>
+          </a:p>
+        </p:txBody>
+      </p:sp>
     </p:spTree>
     <p:extLst>
       <p:ext uri="{BB962C8B-B14F-4D97-AF65-F5344CB8AC3E}">
-        <p14:creationId xmlns:p14="http://schemas.microsoft.com/office/powerpoint/2010/main" val="2266839906"/>
+        <ns4:creationId val="2266839906"/>
       </p:ext>
     </p:extLst>
   </p:cSld>
@@ -10059,7 +10995,7 @@
 </file>
 
 <file path=ppt/slides/slide15.xml><?xml version="1.0" encoding="utf-8"?>
-<p:sld xmlns:a="http://schemas.openxmlformats.org/drawingml/2006/main" xmlns:r="http://schemas.openxmlformats.org/officeDocument/2006/relationships" xmlns:p="http://schemas.openxmlformats.org/presentationml/2006/main">
+<p:sld xmlns:a="http://schemas.openxmlformats.org/drawingml/2006/main" xmlns:a16="http://schemas.microsoft.com/office/drawing/2014/main" xmlns:ns3="http://schemas.microsoft.com/office/powerpoint/2010/main" xmlns:p="http://schemas.openxmlformats.org/presentationml/2006/main">
   <p:cSld>
     <p:bg>
       <p:bgPr>
@@ -10074,7 +11010,7 @@
         <p:cNvPr id="1" name="">
           <a:extLst>
             <a:ext uri="{FF2B5EF4-FFF2-40B4-BE49-F238E27FC236}">
-              <a16:creationId xmlns:a16="http://schemas.microsoft.com/office/drawing/2014/main" id="{350FC2F0-7016-191E-C62B-2F1043B51523}"/>
+              <a16:creationId id="{350FC2F0-7016-191E-C62B-2F1043B51523}"/>
             </a:ext>
           </a:extLst>
         </p:cNvPr>
@@ -10094,7 +11030,7 @@
           <p:cNvPr id="5" name="Footer Placeholder 3">
             <a:extLst>
               <a:ext uri="{FF2B5EF4-FFF2-40B4-BE49-F238E27FC236}">
-                <a16:creationId xmlns:a16="http://schemas.microsoft.com/office/drawing/2014/main" id="{358ED6BC-E906-5E1F-C9E2-F43798AED530}"/>
+                <a16:creationId id="{358ED6BC-E906-5E1F-C9E2-F43798AED530}"/>
               </a:ext>
             </a:extLst>
           </p:cNvPr>
@@ -10256,7 +11192,7 @@
           <p:cNvPr id="2" name="TextBox 1">
             <a:extLst>
               <a:ext uri="{FF2B5EF4-FFF2-40B4-BE49-F238E27FC236}">
-                <a16:creationId xmlns:a16="http://schemas.microsoft.com/office/drawing/2014/main" id="{132FD10F-4787-35B9-3723-FC903514578F}"/>
+                <a16:creationId id="{132FD10F-4787-35B9-3723-FC903514578F}"/>
               </a:ext>
             </a:extLst>
           </p:cNvPr>
@@ -10308,7 +11244,7 @@
                 <a:ea typeface="Helvetica Neue" panose="02000503000000020004" pitchFamily="2" charset="0"/>
                 <a:cs typeface="Helvetica Neue" panose="02000503000000020004" pitchFamily="2" charset="0"/>
               </a:rPr>
-              <a:t>Use grad, div, curl to make fundamental obserations about the emissions of point potentials.</a:t>
+              <a:t>Use grad, div, curl to make fundamental observations about the emissions of architrinos.</a:t>
             </a:r>
           </a:p>
           <a:p>
@@ -10335,7 +11271,7 @@
                 <a:ea typeface="Helvetica Neue" panose="02000503000000020004" pitchFamily="2" charset="0"/>
                 <a:cs typeface="Helvetica Neue" panose="02000503000000020004" pitchFamily="2" charset="0"/>
               </a:rPr>
-              <a:t>Use systems of up to two point potentials</a:t>
+              <a:t>Use systems of up to two architrinos</a:t>
             </a:r>
           </a:p>
           <a:p>
@@ -10429,7 +11365,7 @@
           <p:cNvPr id="8" name="TextBox 7">
             <a:extLst>
               <a:ext uri="{FF2B5EF4-FFF2-40B4-BE49-F238E27FC236}">
-                <a16:creationId xmlns:a16="http://schemas.microsoft.com/office/drawing/2014/main" id="{66D94C86-9437-C0D1-B6E9-EE6E69B9F6C8}"/>
+                <a16:creationId id="{66D94C86-9437-C0D1-B6E9-EE6E69B9F6C8}"/>
               </a:ext>
             </a:extLst>
           </p:cNvPr>
@@ -10484,7 +11420,7 @@
                 <a:ea typeface="Helvetica Neue" panose="02000503000000020004" pitchFamily="2" charset="0"/>
                 <a:cs typeface="Helvetica Neue" panose="02000503000000020004" pitchFamily="2" charset="0"/>
               </a:rPr>
-              <a:t>Examining the Potential Field of 0, 1, or 2 Point Potentials </a:t>
+              <a:t>Examining the Potential Field of 0, 1, or 2 Architrinos </a:t>
             </a:r>
           </a:p>
         </p:txBody>
@@ -10494,7 +11430,7 @@
           <p:cNvPr id="3" name="Table 2">
             <a:extLst>
               <a:ext uri="{FF2B5EF4-FFF2-40B4-BE49-F238E27FC236}">
-                <a16:creationId xmlns:a16="http://schemas.microsoft.com/office/drawing/2014/main" id="{00BA6015-2262-3C7A-725A-2DB70D52AD3C}"/>
+                <a16:creationId id="{00BA6015-2262-3C7A-725A-2DB70D52AD3C}"/>
               </a:ext>
             </a:extLst>
           </p:cNvPr>
@@ -10504,7 +11440,7 @@
           <p:nvPr>
             <p:extLst>
               <p:ext uri="{D42A27DB-BD31-4B8C-83A1-F6EECF244321}">
-                <p14:modId xmlns:p14="http://schemas.microsoft.com/office/powerpoint/2010/main" val="15347663"/>
+                <ns3:modId val="15347663"/>
               </p:ext>
             </p:extLst>
           </p:nvPr>
@@ -10523,63 +11459,63 @@
                 <a:gridCol w="1825139">
                   <a:extLst>
                     <a:ext uri="{9D8B030D-6E8A-4147-A177-3AD203B41FA5}">
-                      <a16:colId xmlns:a16="http://schemas.microsoft.com/office/drawing/2014/main" val="3215995319"/>
+                      <a16:colId val="3215995319"/>
                     </a:ext>
                   </a:extLst>
                 </a:gridCol>
                 <a:gridCol w="724218">
                   <a:extLst>
                     <a:ext uri="{9D8B030D-6E8A-4147-A177-3AD203B41FA5}">
-                      <a16:colId xmlns:a16="http://schemas.microsoft.com/office/drawing/2014/main" val="2078492112"/>
+                      <a16:colId val="2078492112"/>
                     </a:ext>
                   </a:extLst>
                 </a:gridCol>
                 <a:gridCol w="626872">
                   <a:extLst>
                     <a:ext uri="{9D8B030D-6E8A-4147-A177-3AD203B41FA5}">
-                      <a16:colId xmlns:a16="http://schemas.microsoft.com/office/drawing/2014/main" val="1858572401"/>
+                      <a16:colId val="1858572401"/>
                     </a:ext>
                   </a:extLst>
                 </a:gridCol>
                 <a:gridCol w="1452563">
                   <a:extLst>
                     <a:ext uri="{9D8B030D-6E8A-4147-A177-3AD203B41FA5}">
-                      <a16:colId xmlns:a16="http://schemas.microsoft.com/office/drawing/2014/main" val="1326786380"/>
+                      <a16:colId val="1326786380"/>
                     </a:ext>
                   </a:extLst>
                 </a:gridCol>
                 <a:gridCol w="1154113">
                   <a:extLst>
                     <a:ext uri="{9D8B030D-6E8A-4147-A177-3AD203B41FA5}">
-                      <a16:colId xmlns:a16="http://schemas.microsoft.com/office/drawing/2014/main" val="918904619"/>
+                      <a16:colId val="918904619"/>
                     </a:ext>
                   </a:extLst>
                 </a:gridCol>
                 <a:gridCol w="724218">
                   <a:extLst>
                     <a:ext uri="{9D8B030D-6E8A-4147-A177-3AD203B41FA5}">
-                      <a16:colId xmlns:a16="http://schemas.microsoft.com/office/drawing/2014/main" val="2078907028"/>
+                      <a16:colId val="2078907028"/>
                     </a:ext>
                   </a:extLst>
                 </a:gridCol>
                 <a:gridCol w="1465580">
                   <a:extLst>
                     <a:ext uri="{9D8B030D-6E8A-4147-A177-3AD203B41FA5}">
-                      <a16:colId xmlns:a16="http://schemas.microsoft.com/office/drawing/2014/main" val="2505089680"/>
+                      <a16:colId val="2505089680"/>
                     </a:ext>
                   </a:extLst>
                 </a:gridCol>
                 <a:gridCol w="1167130">
                   <a:extLst>
                     <a:ext uri="{9D8B030D-6E8A-4147-A177-3AD203B41FA5}">
-                      <a16:colId xmlns:a16="http://schemas.microsoft.com/office/drawing/2014/main" val="3084425507"/>
+                      <a16:colId val="3084425507"/>
                     </a:ext>
                   </a:extLst>
                 </a:gridCol>
                 <a:gridCol w="2059894">
                   <a:extLst>
                     <a:ext uri="{9D8B030D-6E8A-4147-A177-3AD203B41FA5}">
-                      <a16:colId xmlns:a16="http://schemas.microsoft.com/office/drawing/2014/main" val="1198364657"/>
+                      <a16:colId val="1198364657"/>
                     </a:ext>
                   </a:extLst>
                 </a:gridCol>
@@ -10659,7 +11595,7 @@
                           <a:ea typeface="Helvetica Neue" panose="02000503000000020004" pitchFamily="2" charset="0"/>
                           <a:cs typeface="Helvetica Neue" panose="02000503000000020004" pitchFamily="2" charset="0"/>
                         </a:rPr>
-                        <a:t>No point potentials</a:t>
+                        <a:t>No architrinos</a:t>
                       </a:r>
                       <a:br>
                         <a:rPr lang="en-US" sz="1600">
@@ -10902,7 +11838,7 @@
                           <a:ea typeface="Helvetica Neue" panose="02000503000000020004" pitchFamily="2" charset="0"/>
                           <a:cs typeface="Helvetica Neue" panose="02000503000000020004" pitchFamily="2" charset="0"/>
                         </a:rPr>
-                        <a:t>One moving point potential</a:t>
+                        <a:t>One moving architrino</a:t>
                       </a:r>
                     </a:p>
                   </a:txBody>
@@ -11070,7 +12006,7 @@
                           <a:ea typeface="Helvetica Neue" panose="02000503000000020004" pitchFamily="2" charset="0"/>
                           <a:cs typeface="Helvetica Neue" panose="02000503000000020004" pitchFamily="2" charset="0"/>
                         </a:rPr>
-                        <a:t>A pair of opposite or same point potentials.</a:t>
+                        <a:t>A pair of opposite or same architrinos.</a:t>
                       </a:r>
                     </a:p>
                   </a:txBody>
@@ -11118,7 +12054,7 @@
                 </a:tc>
                 <a:extLst>
                   <a:ext uri="{0D108BD9-81ED-4DB2-BD59-A6C34878D82A}">
-                    <a16:rowId xmlns:a16="http://schemas.microsoft.com/office/drawing/2014/main" val="602720088"/>
+                    <a16:rowId val="602720088"/>
                   </a:ext>
                 </a:extLst>
               </a:tr>
@@ -11137,7 +12073,7 @@
                           <a:ea typeface="Helvetica Neue" panose="02000503000000020004" pitchFamily="2" charset="0"/>
                           <a:cs typeface="Helvetica Neue" panose="02000503000000020004" pitchFamily="2" charset="0"/>
                         </a:rPr>
-                        <a:t>External Moving Point Potentials</a:t>
+                        <a:t>External Moving Architrinos</a:t>
                       </a:r>
                     </a:p>
                   </a:txBody>
@@ -11793,7 +12729,7 @@
                 </a:tc>
                 <a:extLst>
                   <a:ext uri="{0D108BD9-81ED-4DB2-BD59-A6C34878D82A}">
-                    <a16:rowId xmlns:a16="http://schemas.microsoft.com/office/drawing/2014/main" val="4072284323"/>
+                    <a16:rowId val="4072284323"/>
                   </a:ext>
                 </a:extLst>
               </a:tr>
@@ -12322,7 +13258,7 @@
                 </a:tc>
                 <a:extLst>
                   <a:ext uri="{0D108BD9-81ED-4DB2-BD59-A6C34878D82A}">
-                    <a16:rowId xmlns:a16="http://schemas.microsoft.com/office/drawing/2014/main" val="1810215886"/>
+                    <a16:rowId val="1810215886"/>
                   </a:ext>
                 </a:extLst>
               </a:tr>
@@ -12913,7 +13849,7 @@
                 </a:tc>
                 <a:extLst>
                   <a:ext uri="{0D108BD9-81ED-4DB2-BD59-A6C34878D82A}">
-                    <a16:rowId xmlns:a16="http://schemas.microsoft.com/office/drawing/2014/main" val="3064039919"/>
+                    <a16:rowId val="3064039919"/>
                   </a:ext>
                 </a:extLst>
               </a:tr>
@@ -13439,7 +14375,7 @@
                 </a:tc>
                 <a:extLst>
                   <a:ext uri="{0D108BD9-81ED-4DB2-BD59-A6C34878D82A}">
-                    <a16:rowId xmlns:a16="http://schemas.microsoft.com/office/drawing/2014/main" val="1764217278"/>
+                    <a16:rowId val="1764217278"/>
                   </a:ext>
                 </a:extLst>
               </a:tr>
@@ -13447,10 +14383,166 @@
           </a:graphicData>
         </a:graphic>
       </p:graphicFrame>
+      <p:sp>
+        <p:nvSpPr>
+          <p:cNvPr id="9" name="Footer Placeholder 3"/>
+          <p:cNvSpPr txBox="1">
+            <a:spLocks/>
+          </p:cNvSpPr>
+          <p:nvPr/>
+        </p:nvSpPr>
+        <p:spPr>
+          <a:xfrm>
+            <a:off x="10942204" y="6481737"/>
+            <a:ext cx="1217443" cy="365125"/>
+          </a:xfrm>
+          <a:prstGeom prst="rect">
+            <a:avLst/>
+          </a:prstGeom>
+        </p:spPr>
+        <p:txBody>
+          <a:bodyPr vert="horz" lIns="91440" tIns="45720" rIns="91440" bIns="45720" rtlCol="0" anchor="ctr"/>
+          <a:lstStyle>
+            <a:defPPr>
+              <a:defRPr lang="en-US"/>
+            </a:defPPr>
+            <a:lvl1pPr marL="0" algn="ctr" defTabSz="914400" rtl="0" eaLnBrk="1" latinLnBrk="0" hangingPunct="1">
+              <a:defRPr sz="1200" kern="1200">
+                <a:solidFill>
+                  <a:schemeClr val="tx1">
+                    <a:tint val="75000"/>
+                  </a:schemeClr>
+                </a:solidFill>
+                <a:latin typeface="+mn-lt"/>
+                <a:ea typeface="+mn-ea"/>
+                <a:cs typeface="+mn-cs"/>
+              </a:defRPr>
+            </a:lvl1pPr>
+            <a:lvl2pPr marL="457200" algn="l" defTabSz="914400" rtl="0" eaLnBrk="1" latinLnBrk="0" hangingPunct="1">
+              <a:defRPr sz="1800" kern="1200">
+                <a:solidFill>
+                  <a:schemeClr val="tx1"/>
+                </a:solidFill>
+                <a:latin typeface="+mn-lt"/>
+                <a:ea typeface="+mn-ea"/>
+                <a:cs typeface="+mn-cs"/>
+              </a:defRPr>
+            </a:lvl2pPr>
+            <a:lvl3pPr marL="914400" algn="l" defTabSz="914400" rtl="0" eaLnBrk="1" latinLnBrk="0" hangingPunct="1">
+              <a:defRPr sz="1800" kern="1200">
+                <a:solidFill>
+                  <a:schemeClr val="tx1"/>
+                </a:solidFill>
+                <a:latin typeface="+mn-lt"/>
+                <a:ea typeface="+mn-ea"/>
+                <a:cs typeface="+mn-cs"/>
+              </a:defRPr>
+            </a:lvl3pPr>
+            <a:lvl4pPr marL="1371600" algn="l" defTabSz="914400" rtl="0" eaLnBrk="1" latinLnBrk="0" hangingPunct="1">
+              <a:defRPr sz="1800" kern="1200">
+                <a:solidFill>
+                  <a:schemeClr val="tx1"/>
+                </a:solidFill>
+                <a:latin typeface="+mn-lt"/>
+                <a:ea typeface="+mn-ea"/>
+                <a:cs typeface="+mn-cs"/>
+              </a:defRPr>
+            </a:lvl4pPr>
+            <a:lvl5pPr marL="1828800" algn="l" defTabSz="914400" rtl="0" eaLnBrk="1" latinLnBrk="0" hangingPunct="1">
+              <a:defRPr sz="1800" kern="1200">
+                <a:solidFill>
+                  <a:schemeClr val="tx1"/>
+                </a:solidFill>
+                <a:latin typeface="+mn-lt"/>
+                <a:ea typeface="+mn-ea"/>
+                <a:cs typeface="+mn-cs"/>
+              </a:defRPr>
+            </a:lvl5pPr>
+            <a:lvl6pPr marL="2286000" algn="l" defTabSz="914400" rtl="0" eaLnBrk="1" latinLnBrk="0" hangingPunct="1">
+              <a:defRPr sz="1800" kern="1200">
+                <a:solidFill>
+                  <a:schemeClr val="tx1"/>
+                </a:solidFill>
+                <a:latin typeface="+mn-lt"/>
+                <a:ea typeface="+mn-ea"/>
+                <a:cs typeface="+mn-cs"/>
+              </a:defRPr>
+            </a:lvl6pPr>
+            <a:lvl7pPr marL="2743200" algn="l" defTabSz="914400" rtl="0" eaLnBrk="1" latinLnBrk="0" hangingPunct="1">
+              <a:defRPr sz="1800" kern="1200">
+                <a:solidFill>
+                  <a:schemeClr val="tx1"/>
+                </a:solidFill>
+                <a:latin typeface="+mn-lt"/>
+                <a:ea typeface="+mn-ea"/>
+                <a:cs typeface="+mn-cs"/>
+              </a:defRPr>
+            </a:lvl7pPr>
+            <a:lvl8pPr marL="3200400" algn="l" defTabSz="914400" rtl="0" eaLnBrk="1" latinLnBrk="0" hangingPunct="1">
+              <a:defRPr sz="1800" kern="1200">
+                <a:solidFill>
+                  <a:schemeClr val="tx1"/>
+                </a:solidFill>
+                <a:latin typeface="+mn-lt"/>
+                <a:ea typeface="+mn-ea"/>
+                <a:cs typeface="+mn-cs"/>
+              </a:defRPr>
+            </a:lvl8pPr>
+            <a:lvl9pPr marL="3657600" algn="l" defTabSz="914400" rtl="0" eaLnBrk="1" latinLnBrk="0" hangingPunct="1">
+              <a:defRPr sz="1800" kern="1200">
+                <a:solidFill>
+                  <a:schemeClr val="tx1"/>
+                </a:solidFill>
+                <a:latin typeface="+mn-lt"/>
+                <a:ea typeface="+mn-ea"/>
+                <a:cs typeface="+mn-cs"/>
+              </a:defRPr>
+            </a:lvl9pPr>
+          </a:lstStyle>
+          <a:p>
+            <a:pPr marL="0" marR="0" lvl="0" indent="0" algn="ctr" defTabSz="914400" rtl="0" eaLnBrk="1" fontAlgn="auto" latinLnBrk="0" hangingPunct="1">
+              <a:lnSpc>
+                <a:spcPct val="100000"/>
+              </a:lnSpc>
+              <a:spcBef>
+                <a:spcPts val="0"/>
+              </a:spcBef>
+              <a:spcAft>
+                <a:spcPts val="0"/>
+              </a:spcAft>
+              <a:buClrTx/>
+              <a:buSzTx/>
+              <a:buFontTx/>
+              <a:buNone/>
+              <a:tabLst/>
+              <a:defRPr/>
+            </a:pPr>
+            <a:r>
+              <a:rPr kumimoji="0" lang="en-US" sz="1200" b="0" i="0" u="none" strike="noStrike" kern="1200" cap="none" spc="0" normalizeH="0" baseline="0" noProof="0" dirty="0">
+                <a:ln>
+                  <a:noFill/>
+                </a:ln>
+                <a:solidFill>
+                  <a:prstClr val="black">
+                    <a:tint val="75000"/>
+                  </a:prstClr>
+                </a:solidFill>
+                <a:effectLst/>
+                <a:uLnTx/>
+                <a:uFillTx/>
+                <a:latin typeface="Helvetica Neue" panose="02000503000000020004" pitchFamily="2" charset="0"/>
+                <a:ea typeface="Helvetica Neue" panose="02000503000000020004" pitchFamily="2" charset="0"/>
+                <a:cs typeface="Helvetica Neue" panose="02000503000000020004" pitchFamily="2" charset="0"/>
+              </a:rPr>
+              <a:t>architrino.com</a:t>
+            </a:r>
+          </a:p>
+        </p:txBody>
+      </p:sp>
     </p:spTree>
     <p:extLst>
       <p:ext uri="{BB962C8B-B14F-4D97-AF65-F5344CB8AC3E}">
-        <p14:creationId xmlns:p14="http://schemas.microsoft.com/office/powerpoint/2010/main" val="361260480"/>
+        <ns3:creationId val="361260480"/>
       </p:ext>
     </p:extLst>
   </p:cSld>
@@ -13461,7 +14553,7 @@
 </file>
 
 <file path=ppt/slides/slide2.xml><?xml version="1.0" encoding="utf-8"?>
-<p:sld xmlns:a="http://schemas.openxmlformats.org/drawingml/2006/main" xmlns:r="http://schemas.openxmlformats.org/officeDocument/2006/relationships" xmlns:p="http://schemas.openxmlformats.org/presentationml/2006/main">
+<p:sld xmlns:a="http://schemas.openxmlformats.org/drawingml/2006/main" xmlns:a16="http://schemas.microsoft.com/office/drawing/2014/main" xmlns:ns3="http://schemas.microsoft.com/office/powerpoint/2010/main" xmlns:p="http://schemas.openxmlformats.org/presentationml/2006/main">
   <p:cSld>
     <p:bg>
       <p:bgPr>
@@ -13490,7 +14582,7 @@
           <p:cNvPr id="2" name="Title 1">
             <a:extLst>
               <a:ext uri="{FF2B5EF4-FFF2-40B4-BE49-F238E27FC236}">
-                <a16:creationId xmlns:a16="http://schemas.microsoft.com/office/drawing/2014/main" id="{983D3BD9-EF0C-1E44-A158-923D0C7D4BB3}"/>
+                <a16:creationId id="{983D3BD9-EF0C-1E44-A158-923D0C7D4BB3}"/>
               </a:ext>
             </a:extLst>
           </p:cNvPr>
@@ -13533,7 +14625,7 @@
           <p:cNvPr id="4" name="Footer Placeholder 3">
             <a:extLst>
               <a:ext uri="{FF2B5EF4-FFF2-40B4-BE49-F238E27FC236}">
-                <a16:creationId xmlns:a16="http://schemas.microsoft.com/office/drawing/2014/main" id="{B46B4692-7F2F-6E4B-963F-EC452AE01AA9}"/>
+                <a16:creationId id="{B46B4692-7F2F-6E4B-963F-EC452AE01AA9}"/>
               </a:ext>
             </a:extLst>
           </p:cNvPr>
@@ -13596,7 +14688,7 @@
           <p:cNvPr id="16" name="Group 15">
             <a:extLst>
               <a:ext uri="{FF2B5EF4-FFF2-40B4-BE49-F238E27FC236}">
-                <a16:creationId xmlns:a16="http://schemas.microsoft.com/office/drawing/2014/main" id="{61C70F64-6EA5-EA05-3170-97F09DF5B97A}"/>
+                <a16:creationId id="{61C70F64-6EA5-EA05-3170-97F09DF5B97A}"/>
               </a:ext>
             </a:extLst>
           </p:cNvPr>
@@ -13616,7 +14708,7 @@
             <p:cNvPr id="12" name="Group 11">
               <a:extLst>
                 <a:ext uri="{FF2B5EF4-FFF2-40B4-BE49-F238E27FC236}">
-                  <a16:creationId xmlns:a16="http://schemas.microsoft.com/office/drawing/2014/main" id="{45DB1E4A-5739-CC3A-5405-F5D36EF9F331}"/>
+                  <a16:creationId id="{45DB1E4A-5739-CC3A-5405-F5D36EF9F331}"/>
                 </a:ext>
               </a:extLst>
             </p:cNvPr>
@@ -13636,7 +14728,7 @@
               <p:cNvPr id="6" name="Oval 5">
                 <a:extLst>
                   <a:ext uri="{FF2B5EF4-FFF2-40B4-BE49-F238E27FC236}">
-                    <a16:creationId xmlns:a16="http://schemas.microsoft.com/office/drawing/2014/main" id="{38985803-DA6E-8548-BD14-7743C8492FA0}"/>
+                    <a16:creationId id="{38985803-DA6E-8548-BD14-7743C8492FA0}"/>
                   </a:ext>
                 </a:extLst>
               </p:cNvPr>
@@ -13703,7 +14795,7 @@
               <p:cNvPr id="7" name="Rectangle 6">
                 <a:extLst>
                   <a:ext uri="{FF2B5EF4-FFF2-40B4-BE49-F238E27FC236}">
-                    <a16:creationId xmlns:a16="http://schemas.microsoft.com/office/drawing/2014/main" id="{F2244FC9-B137-EB4E-A718-78190AE91366}"/>
+                    <a16:creationId id="{F2244FC9-B137-EB4E-A718-78190AE91366}"/>
                   </a:ext>
                 </a:extLst>
               </p:cNvPr>
@@ -13768,7 +14860,7 @@
             <p:cNvPr id="14" name="Minus 13">
               <a:extLst>
                 <a:ext uri="{FF2B5EF4-FFF2-40B4-BE49-F238E27FC236}">
-                  <a16:creationId xmlns:a16="http://schemas.microsoft.com/office/drawing/2014/main" id="{09ADC253-730C-264F-8155-E49642931ADA}"/>
+                  <a16:creationId id="{09ADC253-730C-264F-8155-E49642931ADA}"/>
                 </a:ext>
               </a:extLst>
             </p:cNvPr>
@@ -13833,7 +14925,7 @@
           <p:cNvPr id="17" name="Group 16">
             <a:extLst>
               <a:ext uri="{FF2B5EF4-FFF2-40B4-BE49-F238E27FC236}">
-                <a16:creationId xmlns:a16="http://schemas.microsoft.com/office/drawing/2014/main" id="{99197762-1F6C-CC2A-552D-52828CD3C5D3}"/>
+                <a16:creationId id="{99197762-1F6C-CC2A-552D-52828CD3C5D3}"/>
               </a:ext>
             </a:extLst>
           </p:cNvPr>
@@ -13853,7 +14945,7 @@
             <p:cNvPr id="15" name="Group 14">
               <a:extLst>
                 <a:ext uri="{FF2B5EF4-FFF2-40B4-BE49-F238E27FC236}">
-                  <a16:creationId xmlns:a16="http://schemas.microsoft.com/office/drawing/2014/main" id="{FCBB86F0-7603-7410-74CD-64C8990BBE88}"/>
+                  <a16:creationId id="{FCBB86F0-7603-7410-74CD-64C8990BBE88}"/>
                 </a:ext>
               </a:extLst>
             </p:cNvPr>
@@ -13873,7 +14965,7 @@
               <p:cNvPr id="5" name="Oval 4">
                 <a:extLst>
                   <a:ext uri="{FF2B5EF4-FFF2-40B4-BE49-F238E27FC236}">
-                    <a16:creationId xmlns:a16="http://schemas.microsoft.com/office/drawing/2014/main" id="{405A7150-905F-F24D-BF97-63899D0E98A3}"/>
+                    <a16:creationId id="{405A7150-905F-F24D-BF97-63899D0E98A3}"/>
                   </a:ext>
                 </a:extLst>
               </p:cNvPr>
@@ -13940,7 +15032,7 @@
               <p:cNvPr id="8" name="Rectangle 7">
                 <a:extLst>
                   <a:ext uri="{FF2B5EF4-FFF2-40B4-BE49-F238E27FC236}">
-                    <a16:creationId xmlns:a16="http://schemas.microsoft.com/office/drawing/2014/main" id="{930F45C2-0FE5-F04C-B568-5F9239FE086D}"/>
+                    <a16:creationId id="{930F45C2-0FE5-F04C-B568-5F9239FE086D}"/>
                   </a:ext>
                 </a:extLst>
               </p:cNvPr>
@@ -14005,7 +15097,7 @@
             <p:cNvPr id="13" name="Plus 12">
               <a:extLst>
                 <a:ext uri="{FF2B5EF4-FFF2-40B4-BE49-F238E27FC236}">
-                  <a16:creationId xmlns:a16="http://schemas.microsoft.com/office/drawing/2014/main" id="{A2F97F06-5AE9-B844-8A28-B02FF48414FF}"/>
+                  <a16:creationId id="{A2F97F06-5AE9-B844-8A28-B02FF48414FF}"/>
                 </a:ext>
               </a:extLst>
             </p:cNvPr>
@@ -14070,7 +15162,7 @@
           <p:cNvPr id="33" name="Rectangle 32">
             <a:extLst>
               <a:ext uri="{FF2B5EF4-FFF2-40B4-BE49-F238E27FC236}">
-                <a16:creationId xmlns:a16="http://schemas.microsoft.com/office/drawing/2014/main" id="{6FB04752-7BBD-3648-BE22-8D983884B555}"/>
+                <a16:creationId id="{6FB04752-7BBD-3648-BE22-8D983884B555}"/>
               </a:ext>
             </a:extLst>
           </p:cNvPr>
@@ -14124,7 +15216,7 @@
                 <a:ea typeface="Helvetica Neue" panose="02000503000000020004" pitchFamily="2" charset="0"/>
                 <a:cs typeface="Helvetica Neue" panose="02000503000000020004" pitchFamily="2" charset="0"/>
               </a:rPr>
-              <a:t>1D Linear Time, 3D Euclidean Space, Point Potential Emitters</a:t>
+              <a:t>1D Linear Time, 3D Euclidean Space, Architrino Emitters</a:t>
             </a:r>
           </a:p>
         </p:txBody>
@@ -14134,7 +15226,7 @@
           <p:cNvPr id="11" name="Group 10">
             <a:extLst>
               <a:ext uri="{FF2B5EF4-FFF2-40B4-BE49-F238E27FC236}">
-                <a16:creationId xmlns:a16="http://schemas.microsoft.com/office/drawing/2014/main" id="{330CC259-8ECA-9504-DF84-043CB2F2838C}"/>
+                <a16:creationId id="{330CC259-8ECA-9504-DF84-043CB2F2838C}"/>
               </a:ext>
             </a:extLst>
           </p:cNvPr>
@@ -14154,7 +15246,7 @@
             <p:cNvPr id="32" name="Rectangle 31">
               <a:extLst>
                 <a:ext uri="{FF2B5EF4-FFF2-40B4-BE49-F238E27FC236}">
-                  <a16:creationId xmlns:a16="http://schemas.microsoft.com/office/drawing/2014/main" id="{90B4F778-AAF3-8441-A126-EF65BDDCA5EE}"/>
+                  <a16:creationId id="{90B4F778-AAF3-8441-A126-EF65BDDCA5EE}"/>
                 </a:ext>
               </a:extLst>
             </p:cNvPr>
@@ -14290,7 +15382,7 @@
             <p:cNvPr id="24" name="Straight Arrow Connector 23">
               <a:extLst>
                 <a:ext uri="{FF2B5EF4-FFF2-40B4-BE49-F238E27FC236}">
-                  <a16:creationId xmlns:a16="http://schemas.microsoft.com/office/drawing/2014/main" id="{282275DC-2AB9-8842-B077-479BC4E05F88}"/>
+                  <a16:creationId id="{282275DC-2AB9-8842-B077-479BC4E05F88}"/>
                 </a:ext>
               </a:extLst>
             </p:cNvPr>
@@ -14337,7 +15429,7 @@
           <p:cNvPr id="25" name="Footer Placeholder 3">
             <a:extLst>
               <a:ext uri="{FF2B5EF4-FFF2-40B4-BE49-F238E27FC236}">
-                <a16:creationId xmlns:a16="http://schemas.microsoft.com/office/drawing/2014/main" id="{246E4B47-B7AD-0745-91FA-AA77D12D888D}"/>
+                <a16:creationId id="{246E4B47-B7AD-0745-91FA-AA77D12D888D}"/>
               </a:ext>
             </a:extLst>
           </p:cNvPr>
@@ -14499,7 +15591,7 @@
           <p:cNvPr id="9" name="Group 8">
             <a:extLst>
               <a:ext uri="{FF2B5EF4-FFF2-40B4-BE49-F238E27FC236}">
-                <a16:creationId xmlns:a16="http://schemas.microsoft.com/office/drawing/2014/main" id="{31017E8F-4F31-A516-F0AA-7D268180E96C}"/>
+                <a16:creationId id="{31017E8F-4F31-A516-F0AA-7D268180E96C}"/>
               </a:ext>
             </a:extLst>
           </p:cNvPr>
@@ -14519,7 +15611,7 @@
             <p:cNvPr id="20" name="Group 19">
               <a:extLst>
                 <a:ext uri="{FF2B5EF4-FFF2-40B4-BE49-F238E27FC236}">
-                  <a16:creationId xmlns:a16="http://schemas.microsoft.com/office/drawing/2014/main" id="{7B450B60-56DD-E447-B796-B112D6F74ECA}"/>
+                  <a16:creationId id="{7B450B60-56DD-E447-B796-B112D6F74ECA}"/>
                 </a:ext>
               </a:extLst>
             </p:cNvPr>
@@ -14539,7 +15631,7 @@
               <p:cNvPr id="23" name="Straight Arrow Connector 22">
                 <a:extLst>
                   <a:ext uri="{FF2B5EF4-FFF2-40B4-BE49-F238E27FC236}">
-                    <a16:creationId xmlns:a16="http://schemas.microsoft.com/office/drawing/2014/main" id="{CE1E4885-6E99-C949-A2D8-5B8C82D5957E}"/>
+                    <a16:creationId id="{CE1E4885-6E99-C949-A2D8-5B8C82D5957E}"/>
                   </a:ext>
                 </a:extLst>
               </p:cNvPr>
@@ -14585,7 +15677,7 @@
               <p:cNvPr id="28" name="Straight Arrow Connector 27">
                 <a:extLst>
                   <a:ext uri="{FF2B5EF4-FFF2-40B4-BE49-F238E27FC236}">
-                    <a16:creationId xmlns:a16="http://schemas.microsoft.com/office/drawing/2014/main" id="{371FBCDF-30F2-6749-9C7D-FE0A8D83337B}"/>
+                    <a16:creationId id="{371FBCDF-30F2-6749-9C7D-FE0A8D83337B}"/>
                   </a:ext>
                 </a:extLst>
               </p:cNvPr>
@@ -14631,7 +15723,7 @@
               <p:cNvPr id="29" name="Straight Arrow Connector 28">
                 <a:extLst>
                   <a:ext uri="{FF2B5EF4-FFF2-40B4-BE49-F238E27FC236}">
-                    <a16:creationId xmlns:a16="http://schemas.microsoft.com/office/drawing/2014/main" id="{BF5810EE-ACDB-6544-9F58-5DEBD8E72D37}"/>
+                    <a16:creationId id="{BF5810EE-ACDB-6544-9F58-5DEBD8E72D37}"/>
                   </a:ext>
                 </a:extLst>
               </p:cNvPr>
@@ -14678,7 +15770,7 @@
             <p:cNvPr id="3" name="Rectangle 2">
               <a:extLst>
                 <a:ext uri="{FF2B5EF4-FFF2-40B4-BE49-F238E27FC236}">
-                  <a16:creationId xmlns:a16="http://schemas.microsoft.com/office/drawing/2014/main" id="{B3E4CD37-BCF3-72BF-F3B3-DAC45082593B}"/>
+                  <a16:creationId id="{B3E4CD37-BCF3-72BF-F3B3-DAC45082593B}"/>
                 </a:ext>
               </a:extLst>
             </p:cNvPr>
@@ -14810,10 +15902,166 @@
           </p:txBody>
         </p:sp>
       </p:grpSp>
+      <p:sp>
+        <p:nvSpPr>
+          <p:cNvPr id="34" name="Footer Placeholder 3"/>
+          <p:cNvSpPr txBox="1">
+            <a:spLocks/>
+          </p:cNvSpPr>
+          <p:nvPr/>
+        </p:nvSpPr>
+        <p:spPr>
+          <a:xfrm>
+            <a:off x="10942204" y="6481737"/>
+            <a:ext cx="1217443" cy="365125"/>
+          </a:xfrm>
+          <a:prstGeom prst="rect">
+            <a:avLst/>
+          </a:prstGeom>
+        </p:spPr>
+        <p:txBody>
+          <a:bodyPr vert="horz" lIns="91440" tIns="45720" rIns="91440" bIns="45720" rtlCol="0" anchor="ctr"/>
+          <a:lstStyle>
+            <a:defPPr>
+              <a:defRPr lang="en-US"/>
+            </a:defPPr>
+            <a:lvl1pPr marL="0" algn="ctr" defTabSz="914400" rtl="0" eaLnBrk="1" latinLnBrk="0" hangingPunct="1">
+              <a:defRPr sz="1200" kern="1200">
+                <a:solidFill>
+                  <a:schemeClr val="tx1">
+                    <a:tint val="75000"/>
+                  </a:schemeClr>
+                </a:solidFill>
+                <a:latin typeface="+mn-lt"/>
+                <a:ea typeface="+mn-ea"/>
+                <a:cs typeface="+mn-cs"/>
+              </a:defRPr>
+            </a:lvl1pPr>
+            <a:lvl2pPr marL="457200" algn="l" defTabSz="914400" rtl="0" eaLnBrk="1" latinLnBrk="0" hangingPunct="1">
+              <a:defRPr sz="1800" kern="1200">
+                <a:solidFill>
+                  <a:schemeClr val="tx1"/>
+                </a:solidFill>
+                <a:latin typeface="+mn-lt"/>
+                <a:ea typeface="+mn-ea"/>
+                <a:cs typeface="+mn-cs"/>
+              </a:defRPr>
+            </a:lvl2pPr>
+            <a:lvl3pPr marL="914400" algn="l" defTabSz="914400" rtl="0" eaLnBrk="1" latinLnBrk="0" hangingPunct="1">
+              <a:defRPr sz="1800" kern="1200">
+                <a:solidFill>
+                  <a:schemeClr val="tx1"/>
+                </a:solidFill>
+                <a:latin typeface="+mn-lt"/>
+                <a:ea typeface="+mn-ea"/>
+                <a:cs typeface="+mn-cs"/>
+              </a:defRPr>
+            </a:lvl3pPr>
+            <a:lvl4pPr marL="1371600" algn="l" defTabSz="914400" rtl="0" eaLnBrk="1" latinLnBrk="0" hangingPunct="1">
+              <a:defRPr sz="1800" kern="1200">
+                <a:solidFill>
+                  <a:schemeClr val="tx1"/>
+                </a:solidFill>
+                <a:latin typeface="+mn-lt"/>
+                <a:ea typeface="+mn-ea"/>
+                <a:cs typeface="+mn-cs"/>
+              </a:defRPr>
+            </a:lvl4pPr>
+            <a:lvl5pPr marL="1828800" algn="l" defTabSz="914400" rtl="0" eaLnBrk="1" latinLnBrk="0" hangingPunct="1">
+              <a:defRPr sz="1800" kern="1200">
+                <a:solidFill>
+                  <a:schemeClr val="tx1"/>
+                </a:solidFill>
+                <a:latin typeface="+mn-lt"/>
+                <a:ea typeface="+mn-ea"/>
+                <a:cs typeface="+mn-cs"/>
+              </a:defRPr>
+            </a:lvl5pPr>
+            <a:lvl6pPr marL="2286000" algn="l" defTabSz="914400" rtl="0" eaLnBrk="1" latinLnBrk="0" hangingPunct="1">
+              <a:defRPr sz="1800" kern="1200">
+                <a:solidFill>
+                  <a:schemeClr val="tx1"/>
+                </a:solidFill>
+                <a:latin typeface="+mn-lt"/>
+                <a:ea typeface="+mn-ea"/>
+                <a:cs typeface="+mn-cs"/>
+              </a:defRPr>
+            </a:lvl6pPr>
+            <a:lvl7pPr marL="2743200" algn="l" defTabSz="914400" rtl="0" eaLnBrk="1" latinLnBrk="0" hangingPunct="1">
+              <a:defRPr sz="1800" kern="1200">
+                <a:solidFill>
+                  <a:schemeClr val="tx1"/>
+                </a:solidFill>
+                <a:latin typeface="+mn-lt"/>
+                <a:ea typeface="+mn-ea"/>
+                <a:cs typeface="+mn-cs"/>
+              </a:defRPr>
+            </a:lvl7pPr>
+            <a:lvl8pPr marL="3200400" algn="l" defTabSz="914400" rtl="0" eaLnBrk="1" latinLnBrk="0" hangingPunct="1">
+              <a:defRPr sz="1800" kern="1200">
+                <a:solidFill>
+                  <a:schemeClr val="tx1"/>
+                </a:solidFill>
+                <a:latin typeface="+mn-lt"/>
+                <a:ea typeface="+mn-ea"/>
+                <a:cs typeface="+mn-cs"/>
+              </a:defRPr>
+            </a:lvl8pPr>
+            <a:lvl9pPr marL="3657600" algn="l" defTabSz="914400" rtl="0" eaLnBrk="1" latinLnBrk="0" hangingPunct="1">
+              <a:defRPr sz="1800" kern="1200">
+                <a:solidFill>
+                  <a:schemeClr val="tx1"/>
+                </a:solidFill>
+                <a:latin typeface="+mn-lt"/>
+                <a:ea typeface="+mn-ea"/>
+                <a:cs typeface="+mn-cs"/>
+              </a:defRPr>
+            </a:lvl9pPr>
+          </a:lstStyle>
+          <a:p>
+            <a:pPr marL="0" marR="0" lvl="0" indent="0" algn="ctr" defTabSz="914400" rtl="0" eaLnBrk="1" fontAlgn="auto" latinLnBrk="0" hangingPunct="1">
+              <a:lnSpc>
+                <a:spcPct val="100000"/>
+              </a:lnSpc>
+              <a:spcBef>
+                <a:spcPts val="0"/>
+              </a:spcBef>
+              <a:spcAft>
+                <a:spcPts val="0"/>
+              </a:spcAft>
+              <a:buClrTx/>
+              <a:buSzTx/>
+              <a:buFontTx/>
+              <a:buNone/>
+              <a:tabLst/>
+              <a:defRPr/>
+            </a:pPr>
+            <a:r>
+              <a:rPr kumimoji="0" lang="en-US" sz="1200" b="0" i="0" u="none" strike="noStrike" kern="1200" cap="none" spc="0" normalizeH="0" baseline="0" noProof="0" dirty="0">
+                <a:ln>
+                  <a:noFill/>
+                </a:ln>
+                <a:solidFill>
+                  <a:prstClr val="black">
+                    <a:tint val="75000"/>
+                  </a:prstClr>
+                </a:solidFill>
+                <a:effectLst/>
+                <a:uLnTx/>
+                <a:uFillTx/>
+                <a:latin typeface="Helvetica Neue" panose="02000503000000020004" pitchFamily="2" charset="0"/>
+                <a:ea typeface="Helvetica Neue" panose="02000503000000020004" pitchFamily="2" charset="0"/>
+                <a:cs typeface="Helvetica Neue" panose="02000503000000020004" pitchFamily="2" charset="0"/>
+              </a:rPr>
+              <a:t>architrino.com</a:t>
+            </a:r>
+          </a:p>
+        </p:txBody>
+      </p:sp>
     </p:spTree>
     <p:extLst>
       <p:ext uri="{BB962C8B-B14F-4D97-AF65-F5344CB8AC3E}">
-        <p14:creationId xmlns:p14="http://schemas.microsoft.com/office/powerpoint/2010/main" val="2629322166"/>
+        <ns3:creationId val="2629322166"/>
       </p:ext>
     </p:extLst>
   </p:cSld>
@@ -14824,7 +16072,7 @@
 </file>
 
 <file path=ppt/slides/slide3.xml><?xml version="1.0" encoding="utf-8"?>
-<p:sld xmlns:a="http://schemas.openxmlformats.org/drawingml/2006/main" xmlns:r="http://schemas.openxmlformats.org/officeDocument/2006/relationships" xmlns:p="http://schemas.openxmlformats.org/presentationml/2006/main">
+<p:sld xmlns:a="http://schemas.openxmlformats.org/drawingml/2006/main" xmlns:a16="http://schemas.microsoft.com/office/drawing/2014/main" xmlns:ns3="http://schemas.microsoft.com/office/powerpoint/2010/main" xmlns:p="http://schemas.openxmlformats.org/presentationml/2006/main">
   <p:cSld>
     <p:bg>
       <p:bgPr>
@@ -14853,7 +16101,7 @@
           <p:cNvPr id="2" name="Title 1">
             <a:extLst>
               <a:ext uri="{FF2B5EF4-FFF2-40B4-BE49-F238E27FC236}">
-                <a16:creationId xmlns:a16="http://schemas.microsoft.com/office/drawing/2014/main" id="{983D3BD9-EF0C-1E44-A158-923D0C7D4BB3}"/>
+                <a16:creationId id="{983D3BD9-EF0C-1E44-A158-923D0C7D4BB3}"/>
               </a:ext>
             </a:extLst>
           </p:cNvPr>
@@ -14886,7 +16134,7 @@
                 <a:ea typeface="Helvetica Neue" panose="02000503000000020004" pitchFamily="2" charset="0"/>
                 <a:cs typeface="Helvetica Neue" panose="02000503000000020004" pitchFamily="2" charset="0"/>
               </a:rPr>
-              <a:t>Point Potential Magnitude</a:t>
+              <a:t>Architrino Magnitude</a:t>
             </a:r>
           </a:p>
         </p:txBody>
@@ -14896,7 +16144,7 @@
           <p:cNvPr id="4" name="Footer Placeholder 3">
             <a:extLst>
               <a:ext uri="{FF2B5EF4-FFF2-40B4-BE49-F238E27FC236}">
-                <a16:creationId xmlns:a16="http://schemas.microsoft.com/office/drawing/2014/main" id="{B46B4692-7F2F-6E4B-963F-EC452AE01AA9}"/>
+                <a16:creationId id="{B46B4692-7F2F-6E4B-963F-EC452AE01AA9}"/>
               </a:ext>
             </a:extLst>
           </p:cNvPr>
@@ -14959,7 +16207,7 @@
           <p:cNvPr id="16" name="Group 15">
             <a:extLst>
               <a:ext uri="{FF2B5EF4-FFF2-40B4-BE49-F238E27FC236}">
-                <a16:creationId xmlns:a16="http://schemas.microsoft.com/office/drawing/2014/main" id="{61C70F64-6EA5-EA05-3170-97F09DF5B97A}"/>
+                <a16:creationId id="{61C70F64-6EA5-EA05-3170-97F09DF5B97A}"/>
               </a:ext>
             </a:extLst>
           </p:cNvPr>
@@ -14979,7 +16227,7 @@
             <p:cNvPr id="12" name="Group 11">
               <a:extLst>
                 <a:ext uri="{FF2B5EF4-FFF2-40B4-BE49-F238E27FC236}">
-                  <a16:creationId xmlns:a16="http://schemas.microsoft.com/office/drawing/2014/main" id="{45DB1E4A-5739-CC3A-5405-F5D36EF9F331}"/>
+                  <a16:creationId id="{45DB1E4A-5739-CC3A-5405-F5D36EF9F331}"/>
                 </a:ext>
               </a:extLst>
             </p:cNvPr>
@@ -14999,7 +16247,7 @@
               <p:cNvPr id="6" name="Oval 5">
                 <a:extLst>
                   <a:ext uri="{FF2B5EF4-FFF2-40B4-BE49-F238E27FC236}">
-                    <a16:creationId xmlns:a16="http://schemas.microsoft.com/office/drawing/2014/main" id="{38985803-DA6E-8548-BD14-7743C8492FA0}"/>
+                    <a16:creationId id="{38985803-DA6E-8548-BD14-7743C8492FA0}"/>
                   </a:ext>
                 </a:extLst>
               </p:cNvPr>
@@ -15066,7 +16314,7 @@
               <p:cNvPr id="7" name="Rectangle 6">
                 <a:extLst>
                   <a:ext uri="{FF2B5EF4-FFF2-40B4-BE49-F238E27FC236}">
-                    <a16:creationId xmlns:a16="http://schemas.microsoft.com/office/drawing/2014/main" id="{F2244FC9-B137-EB4E-A718-78190AE91366}"/>
+                    <a16:creationId id="{F2244FC9-B137-EB4E-A718-78190AE91366}"/>
                   </a:ext>
                 </a:extLst>
               </p:cNvPr>
@@ -15131,7 +16379,7 @@
             <p:cNvPr id="14" name="Minus 13">
               <a:extLst>
                 <a:ext uri="{FF2B5EF4-FFF2-40B4-BE49-F238E27FC236}">
-                  <a16:creationId xmlns:a16="http://schemas.microsoft.com/office/drawing/2014/main" id="{09ADC253-730C-264F-8155-E49642931ADA}"/>
+                  <a16:creationId id="{09ADC253-730C-264F-8155-E49642931ADA}"/>
                 </a:ext>
               </a:extLst>
             </p:cNvPr>
@@ -15196,7 +16444,7 @@
           <p:cNvPr id="17" name="Group 16">
             <a:extLst>
               <a:ext uri="{FF2B5EF4-FFF2-40B4-BE49-F238E27FC236}">
-                <a16:creationId xmlns:a16="http://schemas.microsoft.com/office/drawing/2014/main" id="{99197762-1F6C-CC2A-552D-52828CD3C5D3}"/>
+                <a16:creationId id="{99197762-1F6C-CC2A-552D-52828CD3C5D3}"/>
               </a:ext>
             </a:extLst>
           </p:cNvPr>
@@ -15216,7 +16464,7 @@
             <p:cNvPr id="15" name="Group 14">
               <a:extLst>
                 <a:ext uri="{FF2B5EF4-FFF2-40B4-BE49-F238E27FC236}">
-                  <a16:creationId xmlns:a16="http://schemas.microsoft.com/office/drawing/2014/main" id="{FCBB86F0-7603-7410-74CD-64C8990BBE88}"/>
+                  <a16:creationId id="{FCBB86F0-7603-7410-74CD-64C8990BBE88}"/>
                 </a:ext>
               </a:extLst>
             </p:cNvPr>
@@ -15236,7 +16484,7 @@
               <p:cNvPr id="5" name="Oval 4">
                 <a:extLst>
                   <a:ext uri="{FF2B5EF4-FFF2-40B4-BE49-F238E27FC236}">
-                    <a16:creationId xmlns:a16="http://schemas.microsoft.com/office/drawing/2014/main" id="{405A7150-905F-F24D-BF97-63899D0E98A3}"/>
+                    <a16:creationId id="{405A7150-905F-F24D-BF97-63899D0E98A3}"/>
                   </a:ext>
                 </a:extLst>
               </p:cNvPr>
@@ -15303,7 +16551,7 @@
               <p:cNvPr id="8" name="Rectangle 7">
                 <a:extLst>
                   <a:ext uri="{FF2B5EF4-FFF2-40B4-BE49-F238E27FC236}">
-                    <a16:creationId xmlns:a16="http://schemas.microsoft.com/office/drawing/2014/main" id="{930F45C2-0FE5-F04C-B568-5F9239FE086D}"/>
+                    <a16:creationId id="{930F45C2-0FE5-F04C-B568-5F9239FE086D}"/>
                   </a:ext>
                 </a:extLst>
               </p:cNvPr>
@@ -15368,7 +16616,7 @@
             <p:cNvPr id="13" name="Plus 12">
               <a:extLst>
                 <a:ext uri="{FF2B5EF4-FFF2-40B4-BE49-F238E27FC236}">
-                  <a16:creationId xmlns:a16="http://schemas.microsoft.com/office/drawing/2014/main" id="{A2F97F06-5AE9-B844-8A28-B02FF48414FF}"/>
+                  <a16:creationId id="{A2F97F06-5AE9-B844-8A28-B02FF48414FF}"/>
                 </a:ext>
               </a:extLst>
             </p:cNvPr>
@@ -15433,7 +16681,7 @@
           <p:cNvPr id="33" name="Rectangle 32">
             <a:extLst>
               <a:ext uri="{FF2B5EF4-FFF2-40B4-BE49-F238E27FC236}">
-                <a16:creationId xmlns:a16="http://schemas.microsoft.com/office/drawing/2014/main" id="{6FB04752-7BBD-3648-BE22-8D983884B555}"/>
+                <a16:creationId id="{6FB04752-7BBD-3648-BE22-8D983884B555}"/>
               </a:ext>
             </a:extLst>
           </p:cNvPr>
@@ -15505,7 +16753,7 @@
           <p:cNvPr id="11" name="Group 10">
             <a:extLst>
               <a:ext uri="{FF2B5EF4-FFF2-40B4-BE49-F238E27FC236}">
-                <a16:creationId xmlns:a16="http://schemas.microsoft.com/office/drawing/2014/main" id="{330CC259-8ECA-9504-DF84-043CB2F2838C}"/>
+                <a16:creationId id="{330CC259-8ECA-9504-DF84-043CB2F2838C}"/>
               </a:ext>
             </a:extLst>
           </p:cNvPr>
@@ -15525,7 +16773,7 @@
             <p:cNvPr id="32" name="Rectangle 31">
               <a:extLst>
                 <a:ext uri="{FF2B5EF4-FFF2-40B4-BE49-F238E27FC236}">
-                  <a16:creationId xmlns:a16="http://schemas.microsoft.com/office/drawing/2014/main" id="{90B4F778-AAF3-8441-A126-EF65BDDCA5EE}"/>
+                  <a16:creationId id="{90B4F778-AAF3-8441-A126-EF65BDDCA5EE}"/>
                 </a:ext>
               </a:extLst>
             </p:cNvPr>
@@ -15661,7 +16909,7 @@
             <p:cNvPr id="24" name="Straight Arrow Connector 23">
               <a:extLst>
                 <a:ext uri="{FF2B5EF4-FFF2-40B4-BE49-F238E27FC236}">
-                  <a16:creationId xmlns:a16="http://schemas.microsoft.com/office/drawing/2014/main" id="{282275DC-2AB9-8842-B077-479BC4E05F88}"/>
+                  <a16:creationId id="{282275DC-2AB9-8842-B077-479BC4E05F88}"/>
                 </a:ext>
               </a:extLst>
             </p:cNvPr>
@@ -15708,7 +16956,7 @@
           <p:cNvPr id="25" name="Footer Placeholder 3">
             <a:extLst>
               <a:ext uri="{FF2B5EF4-FFF2-40B4-BE49-F238E27FC236}">
-                <a16:creationId xmlns:a16="http://schemas.microsoft.com/office/drawing/2014/main" id="{246E4B47-B7AD-0745-91FA-AA77D12D888D}"/>
+                <a16:creationId id="{246E4B47-B7AD-0745-91FA-AA77D12D888D}"/>
               </a:ext>
             </a:extLst>
           </p:cNvPr>
@@ -15886,7 +17134,7 @@
           <p:cNvPr id="9" name="Group 8">
             <a:extLst>
               <a:ext uri="{FF2B5EF4-FFF2-40B4-BE49-F238E27FC236}">
-                <a16:creationId xmlns:a16="http://schemas.microsoft.com/office/drawing/2014/main" id="{31017E8F-4F31-A516-F0AA-7D268180E96C}"/>
+                <a16:creationId id="{31017E8F-4F31-A516-F0AA-7D268180E96C}"/>
               </a:ext>
             </a:extLst>
           </p:cNvPr>
@@ -15906,7 +17154,7 @@
             <p:cNvPr id="20" name="Group 19">
               <a:extLst>
                 <a:ext uri="{FF2B5EF4-FFF2-40B4-BE49-F238E27FC236}">
-                  <a16:creationId xmlns:a16="http://schemas.microsoft.com/office/drawing/2014/main" id="{7B450B60-56DD-E447-B796-B112D6F74ECA}"/>
+                  <a16:creationId id="{7B450B60-56DD-E447-B796-B112D6F74ECA}"/>
                 </a:ext>
               </a:extLst>
             </p:cNvPr>
@@ -15926,7 +17174,7 @@
               <p:cNvPr id="23" name="Straight Arrow Connector 22">
                 <a:extLst>
                   <a:ext uri="{FF2B5EF4-FFF2-40B4-BE49-F238E27FC236}">
-                    <a16:creationId xmlns:a16="http://schemas.microsoft.com/office/drawing/2014/main" id="{CE1E4885-6E99-C949-A2D8-5B8C82D5957E}"/>
+                    <a16:creationId id="{CE1E4885-6E99-C949-A2D8-5B8C82D5957E}"/>
                   </a:ext>
                 </a:extLst>
               </p:cNvPr>
@@ -15972,7 +17220,7 @@
               <p:cNvPr id="28" name="Straight Arrow Connector 27">
                 <a:extLst>
                   <a:ext uri="{FF2B5EF4-FFF2-40B4-BE49-F238E27FC236}">
-                    <a16:creationId xmlns:a16="http://schemas.microsoft.com/office/drawing/2014/main" id="{371FBCDF-30F2-6749-9C7D-FE0A8D83337B}"/>
+                    <a16:creationId id="{371FBCDF-30F2-6749-9C7D-FE0A8D83337B}"/>
                   </a:ext>
                 </a:extLst>
               </p:cNvPr>
@@ -16018,7 +17266,7 @@
               <p:cNvPr id="29" name="Straight Arrow Connector 28">
                 <a:extLst>
                   <a:ext uri="{FF2B5EF4-FFF2-40B4-BE49-F238E27FC236}">
-                    <a16:creationId xmlns:a16="http://schemas.microsoft.com/office/drawing/2014/main" id="{BF5810EE-ACDB-6544-9F58-5DEBD8E72D37}"/>
+                    <a16:creationId id="{BF5810EE-ACDB-6544-9F58-5DEBD8E72D37}"/>
                   </a:ext>
                 </a:extLst>
               </p:cNvPr>
@@ -16065,7 +17313,7 @@
             <p:cNvPr id="3" name="Rectangle 2">
               <a:extLst>
                 <a:ext uri="{FF2B5EF4-FFF2-40B4-BE49-F238E27FC236}">
-                  <a16:creationId xmlns:a16="http://schemas.microsoft.com/office/drawing/2014/main" id="{B3E4CD37-BCF3-72BF-F3B3-DAC45082593B}"/>
+                  <a16:creationId id="{B3E4CD37-BCF3-72BF-F3B3-DAC45082593B}"/>
                 </a:ext>
               </a:extLst>
             </p:cNvPr>
@@ -16197,10 +17445,166 @@
           </p:txBody>
         </p:sp>
       </p:grpSp>
+      <p:sp>
+        <p:nvSpPr>
+          <p:cNvPr id="34" name="Footer Placeholder 3"/>
+          <p:cNvSpPr txBox="1">
+            <a:spLocks/>
+          </p:cNvSpPr>
+          <p:nvPr/>
+        </p:nvSpPr>
+        <p:spPr>
+          <a:xfrm>
+            <a:off x="10942204" y="6481737"/>
+            <a:ext cx="1217443" cy="365125"/>
+          </a:xfrm>
+          <a:prstGeom prst="rect">
+            <a:avLst/>
+          </a:prstGeom>
+        </p:spPr>
+        <p:txBody>
+          <a:bodyPr vert="horz" lIns="91440" tIns="45720" rIns="91440" bIns="45720" rtlCol="0" anchor="ctr"/>
+          <a:lstStyle>
+            <a:defPPr>
+              <a:defRPr lang="en-US"/>
+            </a:defPPr>
+            <a:lvl1pPr marL="0" algn="ctr" defTabSz="914400" rtl="0" eaLnBrk="1" latinLnBrk="0" hangingPunct="1">
+              <a:defRPr sz="1200" kern="1200">
+                <a:solidFill>
+                  <a:schemeClr val="tx1">
+                    <a:tint val="75000"/>
+                  </a:schemeClr>
+                </a:solidFill>
+                <a:latin typeface="+mn-lt"/>
+                <a:ea typeface="+mn-ea"/>
+                <a:cs typeface="+mn-cs"/>
+              </a:defRPr>
+            </a:lvl1pPr>
+            <a:lvl2pPr marL="457200" algn="l" defTabSz="914400" rtl="0" eaLnBrk="1" latinLnBrk="0" hangingPunct="1">
+              <a:defRPr sz="1800" kern="1200">
+                <a:solidFill>
+                  <a:schemeClr val="tx1"/>
+                </a:solidFill>
+                <a:latin typeface="+mn-lt"/>
+                <a:ea typeface="+mn-ea"/>
+                <a:cs typeface="+mn-cs"/>
+              </a:defRPr>
+            </a:lvl2pPr>
+            <a:lvl3pPr marL="914400" algn="l" defTabSz="914400" rtl="0" eaLnBrk="1" latinLnBrk="0" hangingPunct="1">
+              <a:defRPr sz="1800" kern="1200">
+                <a:solidFill>
+                  <a:schemeClr val="tx1"/>
+                </a:solidFill>
+                <a:latin typeface="+mn-lt"/>
+                <a:ea typeface="+mn-ea"/>
+                <a:cs typeface="+mn-cs"/>
+              </a:defRPr>
+            </a:lvl3pPr>
+            <a:lvl4pPr marL="1371600" algn="l" defTabSz="914400" rtl="0" eaLnBrk="1" latinLnBrk="0" hangingPunct="1">
+              <a:defRPr sz="1800" kern="1200">
+                <a:solidFill>
+                  <a:schemeClr val="tx1"/>
+                </a:solidFill>
+                <a:latin typeface="+mn-lt"/>
+                <a:ea typeface="+mn-ea"/>
+                <a:cs typeface="+mn-cs"/>
+              </a:defRPr>
+            </a:lvl4pPr>
+            <a:lvl5pPr marL="1828800" algn="l" defTabSz="914400" rtl="0" eaLnBrk="1" latinLnBrk="0" hangingPunct="1">
+              <a:defRPr sz="1800" kern="1200">
+                <a:solidFill>
+                  <a:schemeClr val="tx1"/>
+                </a:solidFill>
+                <a:latin typeface="+mn-lt"/>
+                <a:ea typeface="+mn-ea"/>
+                <a:cs typeface="+mn-cs"/>
+              </a:defRPr>
+            </a:lvl5pPr>
+            <a:lvl6pPr marL="2286000" algn="l" defTabSz="914400" rtl="0" eaLnBrk="1" latinLnBrk="0" hangingPunct="1">
+              <a:defRPr sz="1800" kern="1200">
+                <a:solidFill>
+                  <a:schemeClr val="tx1"/>
+                </a:solidFill>
+                <a:latin typeface="+mn-lt"/>
+                <a:ea typeface="+mn-ea"/>
+                <a:cs typeface="+mn-cs"/>
+              </a:defRPr>
+            </a:lvl6pPr>
+            <a:lvl7pPr marL="2743200" algn="l" defTabSz="914400" rtl="0" eaLnBrk="1" latinLnBrk="0" hangingPunct="1">
+              <a:defRPr sz="1800" kern="1200">
+                <a:solidFill>
+                  <a:schemeClr val="tx1"/>
+                </a:solidFill>
+                <a:latin typeface="+mn-lt"/>
+                <a:ea typeface="+mn-ea"/>
+                <a:cs typeface="+mn-cs"/>
+              </a:defRPr>
+            </a:lvl7pPr>
+            <a:lvl8pPr marL="3200400" algn="l" defTabSz="914400" rtl="0" eaLnBrk="1" latinLnBrk="0" hangingPunct="1">
+              <a:defRPr sz="1800" kern="1200">
+                <a:solidFill>
+                  <a:schemeClr val="tx1"/>
+                </a:solidFill>
+                <a:latin typeface="+mn-lt"/>
+                <a:ea typeface="+mn-ea"/>
+                <a:cs typeface="+mn-cs"/>
+              </a:defRPr>
+            </a:lvl8pPr>
+            <a:lvl9pPr marL="3657600" algn="l" defTabSz="914400" rtl="0" eaLnBrk="1" latinLnBrk="0" hangingPunct="1">
+              <a:defRPr sz="1800" kern="1200">
+                <a:solidFill>
+                  <a:schemeClr val="tx1"/>
+                </a:solidFill>
+                <a:latin typeface="+mn-lt"/>
+                <a:ea typeface="+mn-ea"/>
+                <a:cs typeface="+mn-cs"/>
+              </a:defRPr>
+            </a:lvl9pPr>
+          </a:lstStyle>
+          <a:p>
+            <a:pPr marL="0" marR="0" lvl="0" indent="0" algn="ctr" defTabSz="914400" rtl="0" eaLnBrk="1" fontAlgn="auto" latinLnBrk="0" hangingPunct="1">
+              <a:lnSpc>
+                <a:spcPct val="100000"/>
+              </a:lnSpc>
+              <a:spcBef>
+                <a:spcPts val="0"/>
+              </a:spcBef>
+              <a:spcAft>
+                <a:spcPts val="0"/>
+              </a:spcAft>
+              <a:buClrTx/>
+              <a:buSzTx/>
+              <a:buFontTx/>
+              <a:buNone/>
+              <a:tabLst/>
+              <a:defRPr/>
+            </a:pPr>
+            <a:r>
+              <a:rPr kumimoji="0" lang="en-US" sz="1200" b="0" i="0" u="none" strike="noStrike" kern="1200" cap="none" spc="0" normalizeH="0" baseline="0" noProof="0" dirty="0">
+                <a:ln>
+                  <a:noFill/>
+                </a:ln>
+                <a:solidFill>
+                  <a:prstClr val="black">
+                    <a:tint val="75000"/>
+                  </a:prstClr>
+                </a:solidFill>
+                <a:effectLst/>
+                <a:uLnTx/>
+                <a:uFillTx/>
+                <a:latin typeface="Helvetica Neue" panose="02000503000000020004" pitchFamily="2" charset="0"/>
+                <a:ea typeface="Helvetica Neue" panose="02000503000000020004" pitchFamily="2" charset="0"/>
+                <a:cs typeface="Helvetica Neue" panose="02000503000000020004" pitchFamily="2" charset="0"/>
+              </a:rPr>
+              <a:t>architrino.com</a:t>
+            </a:r>
+          </a:p>
+        </p:txBody>
+      </p:sp>
     </p:spTree>
     <p:extLst>
       <p:ext uri="{BB962C8B-B14F-4D97-AF65-F5344CB8AC3E}">
-        <p14:creationId xmlns:p14="http://schemas.microsoft.com/office/powerpoint/2010/main" val="3552449441"/>
+        <ns3:creationId val="3552449441"/>
       </p:ext>
     </p:extLst>
   </p:cSld>
@@ -16211,7 +17615,7 @@
 </file>
 
 <file path=ppt/slides/slide4.xml><?xml version="1.0" encoding="utf-8"?>
-<p:sld xmlns:a="http://schemas.openxmlformats.org/drawingml/2006/main" xmlns:r="http://schemas.openxmlformats.org/officeDocument/2006/relationships" xmlns:p="http://schemas.openxmlformats.org/presentationml/2006/main">
+<p:sld xmlns:a="http://schemas.openxmlformats.org/drawingml/2006/main" xmlns:a16="http://schemas.microsoft.com/office/drawing/2014/main" xmlns:ns3="http://schemas.microsoft.com/office/powerpoint/2010/main" xmlns:p="http://schemas.openxmlformats.org/presentationml/2006/main">
   <p:cSld>
     <p:bg>
       <p:bgPr>
@@ -16240,7 +17644,7 @@
           <p:cNvPr id="2" name="Title 1">
             <a:extLst>
               <a:ext uri="{FF2B5EF4-FFF2-40B4-BE49-F238E27FC236}">
-                <a16:creationId xmlns:a16="http://schemas.microsoft.com/office/drawing/2014/main" id="{983D3BD9-EF0C-1E44-A158-923D0C7D4BB3}"/>
+                <a16:creationId id="{983D3BD9-EF0C-1E44-A158-923D0C7D4BB3}"/>
               </a:ext>
             </a:extLst>
           </p:cNvPr>
@@ -16273,7 +17677,7 @@
                 <a:ea typeface="Helvetica Neue" panose="02000503000000020004" pitchFamily="2" charset="0"/>
                 <a:cs typeface="Helvetica Neue" panose="02000503000000020004" pitchFamily="2" charset="0"/>
               </a:rPr>
-              <a:t>Point Potentials are Immutable</a:t>
+              <a:t>Architrinos are Immutable</a:t>
             </a:r>
           </a:p>
         </p:txBody>
@@ -16283,7 +17687,7 @@
           <p:cNvPr id="4" name="Footer Placeholder 3">
             <a:extLst>
               <a:ext uri="{FF2B5EF4-FFF2-40B4-BE49-F238E27FC236}">
-                <a16:creationId xmlns:a16="http://schemas.microsoft.com/office/drawing/2014/main" id="{B46B4692-7F2F-6E4B-963F-EC452AE01AA9}"/>
+                <a16:creationId id="{B46B4692-7F2F-6E4B-963F-EC452AE01AA9}"/>
               </a:ext>
             </a:extLst>
           </p:cNvPr>
@@ -16346,7 +17750,7 @@
           <p:cNvPr id="16" name="Group 15">
             <a:extLst>
               <a:ext uri="{FF2B5EF4-FFF2-40B4-BE49-F238E27FC236}">
-                <a16:creationId xmlns:a16="http://schemas.microsoft.com/office/drawing/2014/main" id="{61C70F64-6EA5-EA05-3170-97F09DF5B97A}"/>
+                <a16:creationId id="{61C70F64-6EA5-EA05-3170-97F09DF5B97A}"/>
               </a:ext>
             </a:extLst>
           </p:cNvPr>
@@ -16366,7 +17770,7 @@
             <p:cNvPr id="12" name="Group 11">
               <a:extLst>
                 <a:ext uri="{FF2B5EF4-FFF2-40B4-BE49-F238E27FC236}">
-                  <a16:creationId xmlns:a16="http://schemas.microsoft.com/office/drawing/2014/main" id="{45DB1E4A-5739-CC3A-5405-F5D36EF9F331}"/>
+                  <a16:creationId id="{45DB1E4A-5739-CC3A-5405-F5D36EF9F331}"/>
                 </a:ext>
               </a:extLst>
             </p:cNvPr>
@@ -16386,7 +17790,7 @@
               <p:cNvPr id="6" name="Oval 5">
                 <a:extLst>
                   <a:ext uri="{FF2B5EF4-FFF2-40B4-BE49-F238E27FC236}">
-                    <a16:creationId xmlns:a16="http://schemas.microsoft.com/office/drawing/2014/main" id="{38985803-DA6E-8548-BD14-7743C8492FA0}"/>
+                    <a16:creationId id="{38985803-DA6E-8548-BD14-7743C8492FA0}"/>
                   </a:ext>
                 </a:extLst>
               </p:cNvPr>
@@ -16453,7 +17857,7 @@
               <p:cNvPr id="7" name="Rectangle 6">
                 <a:extLst>
                   <a:ext uri="{FF2B5EF4-FFF2-40B4-BE49-F238E27FC236}">
-                    <a16:creationId xmlns:a16="http://schemas.microsoft.com/office/drawing/2014/main" id="{F2244FC9-B137-EB4E-A718-78190AE91366}"/>
+                    <a16:creationId id="{F2244FC9-B137-EB4E-A718-78190AE91366}"/>
                   </a:ext>
                 </a:extLst>
               </p:cNvPr>
@@ -16518,7 +17922,7 @@
             <p:cNvPr id="14" name="Minus 13">
               <a:extLst>
                 <a:ext uri="{FF2B5EF4-FFF2-40B4-BE49-F238E27FC236}">
-                  <a16:creationId xmlns:a16="http://schemas.microsoft.com/office/drawing/2014/main" id="{09ADC253-730C-264F-8155-E49642931ADA}"/>
+                  <a16:creationId id="{09ADC253-730C-264F-8155-E49642931ADA}"/>
                 </a:ext>
               </a:extLst>
             </p:cNvPr>
@@ -16583,7 +17987,7 @@
           <p:cNvPr id="17" name="Group 16">
             <a:extLst>
               <a:ext uri="{FF2B5EF4-FFF2-40B4-BE49-F238E27FC236}">
-                <a16:creationId xmlns:a16="http://schemas.microsoft.com/office/drawing/2014/main" id="{99197762-1F6C-CC2A-552D-52828CD3C5D3}"/>
+                <a16:creationId id="{99197762-1F6C-CC2A-552D-52828CD3C5D3}"/>
               </a:ext>
             </a:extLst>
           </p:cNvPr>
@@ -16603,7 +18007,7 @@
             <p:cNvPr id="15" name="Group 14">
               <a:extLst>
                 <a:ext uri="{FF2B5EF4-FFF2-40B4-BE49-F238E27FC236}">
-                  <a16:creationId xmlns:a16="http://schemas.microsoft.com/office/drawing/2014/main" id="{FCBB86F0-7603-7410-74CD-64C8990BBE88}"/>
+                  <a16:creationId id="{FCBB86F0-7603-7410-74CD-64C8990BBE88}"/>
                 </a:ext>
               </a:extLst>
             </p:cNvPr>
@@ -16623,7 +18027,7 @@
               <p:cNvPr id="5" name="Oval 4">
                 <a:extLst>
                   <a:ext uri="{FF2B5EF4-FFF2-40B4-BE49-F238E27FC236}">
-                    <a16:creationId xmlns:a16="http://schemas.microsoft.com/office/drawing/2014/main" id="{405A7150-905F-F24D-BF97-63899D0E98A3}"/>
+                    <a16:creationId id="{405A7150-905F-F24D-BF97-63899D0E98A3}"/>
                   </a:ext>
                 </a:extLst>
               </p:cNvPr>
@@ -16690,7 +18094,7 @@
               <p:cNvPr id="8" name="Rectangle 7">
                 <a:extLst>
                   <a:ext uri="{FF2B5EF4-FFF2-40B4-BE49-F238E27FC236}">
-                    <a16:creationId xmlns:a16="http://schemas.microsoft.com/office/drawing/2014/main" id="{930F45C2-0FE5-F04C-B568-5F9239FE086D}"/>
+                    <a16:creationId id="{930F45C2-0FE5-F04C-B568-5F9239FE086D}"/>
                   </a:ext>
                 </a:extLst>
               </p:cNvPr>
@@ -16755,7 +18159,7 @@
             <p:cNvPr id="13" name="Plus 12">
               <a:extLst>
                 <a:ext uri="{FF2B5EF4-FFF2-40B4-BE49-F238E27FC236}">
-                  <a16:creationId xmlns:a16="http://schemas.microsoft.com/office/drawing/2014/main" id="{A2F97F06-5AE9-B844-8A28-B02FF48414FF}"/>
+                  <a16:creationId id="{A2F97F06-5AE9-B844-8A28-B02FF48414FF}"/>
                 </a:ext>
               </a:extLst>
             </p:cNvPr>
@@ -16820,7 +18224,7 @@
           <p:cNvPr id="33" name="Rectangle 32">
             <a:extLst>
               <a:ext uri="{FF2B5EF4-FFF2-40B4-BE49-F238E27FC236}">
-                <a16:creationId xmlns:a16="http://schemas.microsoft.com/office/drawing/2014/main" id="{6FB04752-7BBD-3648-BE22-8D983884B555}"/>
+                <a16:creationId id="{6FB04752-7BBD-3648-BE22-8D983884B555}"/>
               </a:ext>
             </a:extLst>
           </p:cNvPr>
@@ -16892,7 +18296,7 @@
           <p:cNvPr id="11" name="Group 10">
             <a:extLst>
               <a:ext uri="{FF2B5EF4-FFF2-40B4-BE49-F238E27FC236}">
-                <a16:creationId xmlns:a16="http://schemas.microsoft.com/office/drawing/2014/main" id="{330CC259-8ECA-9504-DF84-043CB2F2838C}"/>
+                <a16:creationId id="{330CC259-8ECA-9504-DF84-043CB2F2838C}"/>
               </a:ext>
             </a:extLst>
           </p:cNvPr>
@@ -16912,7 +18316,7 @@
             <p:cNvPr id="32" name="Rectangle 31">
               <a:extLst>
                 <a:ext uri="{FF2B5EF4-FFF2-40B4-BE49-F238E27FC236}">
-                  <a16:creationId xmlns:a16="http://schemas.microsoft.com/office/drawing/2014/main" id="{90B4F778-AAF3-8441-A126-EF65BDDCA5EE}"/>
+                  <a16:creationId id="{90B4F778-AAF3-8441-A126-EF65BDDCA5EE}"/>
                 </a:ext>
               </a:extLst>
             </p:cNvPr>
@@ -17048,7 +18452,7 @@
             <p:cNvPr id="24" name="Straight Arrow Connector 23">
               <a:extLst>
                 <a:ext uri="{FF2B5EF4-FFF2-40B4-BE49-F238E27FC236}">
-                  <a16:creationId xmlns:a16="http://schemas.microsoft.com/office/drawing/2014/main" id="{282275DC-2AB9-8842-B077-479BC4E05F88}"/>
+                  <a16:creationId id="{282275DC-2AB9-8842-B077-479BC4E05F88}"/>
                 </a:ext>
               </a:extLst>
             </p:cNvPr>
@@ -17095,7 +18499,7 @@
           <p:cNvPr id="25" name="Footer Placeholder 3">
             <a:extLst>
               <a:ext uri="{FF2B5EF4-FFF2-40B4-BE49-F238E27FC236}">
-                <a16:creationId xmlns:a16="http://schemas.microsoft.com/office/drawing/2014/main" id="{246E4B47-B7AD-0745-91FA-AA77D12D888D}"/>
+                <a16:creationId id="{246E4B47-B7AD-0745-91FA-AA77D12D888D}"/>
               </a:ext>
             </a:extLst>
           </p:cNvPr>
@@ -17273,7 +18677,7 @@
           <p:cNvPr id="9" name="Group 8">
             <a:extLst>
               <a:ext uri="{FF2B5EF4-FFF2-40B4-BE49-F238E27FC236}">
-                <a16:creationId xmlns:a16="http://schemas.microsoft.com/office/drawing/2014/main" id="{31017E8F-4F31-A516-F0AA-7D268180E96C}"/>
+                <a16:creationId id="{31017E8F-4F31-A516-F0AA-7D268180E96C}"/>
               </a:ext>
             </a:extLst>
           </p:cNvPr>
@@ -17293,7 +18697,7 @@
             <p:cNvPr id="20" name="Group 19">
               <a:extLst>
                 <a:ext uri="{FF2B5EF4-FFF2-40B4-BE49-F238E27FC236}">
-                  <a16:creationId xmlns:a16="http://schemas.microsoft.com/office/drawing/2014/main" id="{7B450B60-56DD-E447-B796-B112D6F74ECA}"/>
+                  <a16:creationId id="{7B450B60-56DD-E447-B796-B112D6F74ECA}"/>
                 </a:ext>
               </a:extLst>
             </p:cNvPr>
@@ -17313,7 +18717,7 @@
               <p:cNvPr id="23" name="Straight Arrow Connector 22">
                 <a:extLst>
                   <a:ext uri="{FF2B5EF4-FFF2-40B4-BE49-F238E27FC236}">
-                    <a16:creationId xmlns:a16="http://schemas.microsoft.com/office/drawing/2014/main" id="{CE1E4885-6E99-C949-A2D8-5B8C82D5957E}"/>
+                    <a16:creationId id="{CE1E4885-6E99-C949-A2D8-5B8C82D5957E}"/>
                   </a:ext>
                 </a:extLst>
               </p:cNvPr>
@@ -17359,7 +18763,7 @@
               <p:cNvPr id="28" name="Straight Arrow Connector 27">
                 <a:extLst>
                   <a:ext uri="{FF2B5EF4-FFF2-40B4-BE49-F238E27FC236}">
-                    <a16:creationId xmlns:a16="http://schemas.microsoft.com/office/drawing/2014/main" id="{371FBCDF-30F2-6749-9C7D-FE0A8D83337B}"/>
+                    <a16:creationId id="{371FBCDF-30F2-6749-9C7D-FE0A8D83337B}"/>
                   </a:ext>
                 </a:extLst>
               </p:cNvPr>
@@ -17405,7 +18809,7 @@
               <p:cNvPr id="29" name="Straight Arrow Connector 28">
                 <a:extLst>
                   <a:ext uri="{FF2B5EF4-FFF2-40B4-BE49-F238E27FC236}">
-                    <a16:creationId xmlns:a16="http://schemas.microsoft.com/office/drawing/2014/main" id="{BF5810EE-ACDB-6544-9F58-5DEBD8E72D37}"/>
+                    <a16:creationId id="{BF5810EE-ACDB-6544-9F58-5DEBD8E72D37}"/>
                   </a:ext>
                 </a:extLst>
               </p:cNvPr>
@@ -17452,7 +18856,7 @@
             <p:cNvPr id="3" name="Rectangle 2">
               <a:extLst>
                 <a:ext uri="{FF2B5EF4-FFF2-40B4-BE49-F238E27FC236}">
-                  <a16:creationId xmlns:a16="http://schemas.microsoft.com/office/drawing/2014/main" id="{B3E4CD37-BCF3-72BF-F3B3-DAC45082593B}"/>
+                  <a16:creationId id="{B3E4CD37-BCF3-72BF-F3B3-DAC45082593B}"/>
                 </a:ext>
               </a:extLst>
             </p:cNvPr>
@@ -17589,7 +18993,7 @@
           <p:cNvPr id="10" name="Rectangle 9">
             <a:extLst>
               <a:ext uri="{FF2B5EF4-FFF2-40B4-BE49-F238E27FC236}">
-                <a16:creationId xmlns:a16="http://schemas.microsoft.com/office/drawing/2014/main" id="{92D7FC57-9DDC-21AE-9917-F7C426BFA952}"/>
+                <a16:creationId id="{92D7FC57-9DDC-21AE-9917-F7C426BFA952}"/>
               </a:ext>
             </a:extLst>
           </p:cNvPr>
@@ -17656,10 +19060,166 @@
           </a:p>
         </p:txBody>
       </p:sp>
+      <p:sp>
+        <p:nvSpPr>
+          <p:cNvPr id="34" name="Footer Placeholder 3"/>
+          <p:cNvSpPr txBox="1">
+            <a:spLocks/>
+          </p:cNvSpPr>
+          <p:nvPr/>
+        </p:nvSpPr>
+        <p:spPr>
+          <a:xfrm>
+            <a:off x="10942204" y="6481737"/>
+            <a:ext cx="1217443" cy="365125"/>
+          </a:xfrm>
+          <a:prstGeom prst="rect">
+            <a:avLst/>
+          </a:prstGeom>
+        </p:spPr>
+        <p:txBody>
+          <a:bodyPr vert="horz" lIns="91440" tIns="45720" rIns="91440" bIns="45720" rtlCol="0" anchor="ctr"/>
+          <a:lstStyle>
+            <a:defPPr>
+              <a:defRPr lang="en-US"/>
+            </a:defPPr>
+            <a:lvl1pPr marL="0" algn="ctr" defTabSz="914400" rtl="0" eaLnBrk="1" latinLnBrk="0" hangingPunct="1">
+              <a:defRPr sz="1200" kern="1200">
+                <a:solidFill>
+                  <a:schemeClr val="tx1">
+                    <a:tint val="75000"/>
+                  </a:schemeClr>
+                </a:solidFill>
+                <a:latin typeface="+mn-lt"/>
+                <a:ea typeface="+mn-ea"/>
+                <a:cs typeface="+mn-cs"/>
+              </a:defRPr>
+            </a:lvl1pPr>
+            <a:lvl2pPr marL="457200" algn="l" defTabSz="914400" rtl="0" eaLnBrk="1" latinLnBrk="0" hangingPunct="1">
+              <a:defRPr sz="1800" kern="1200">
+                <a:solidFill>
+                  <a:schemeClr val="tx1"/>
+                </a:solidFill>
+                <a:latin typeface="+mn-lt"/>
+                <a:ea typeface="+mn-ea"/>
+                <a:cs typeface="+mn-cs"/>
+              </a:defRPr>
+            </a:lvl2pPr>
+            <a:lvl3pPr marL="914400" algn="l" defTabSz="914400" rtl="0" eaLnBrk="1" latinLnBrk="0" hangingPunct="1">
+              <a:defRPr sz="1800" kern="1200">
+                <a:solidFill>
+                  <a:schemeClr val="tx1"/>
+                </a:solidFill>
+                <a:latin typeface="+mn-lt"/>
+                <a:ea typeface="+mn-ea"/>
+                <a:cs typeface="+mn-cs"/>
+              </a:defRPr>
+            </a:lvl3pPr>
+            <a:lvl4pPr marL="1371600" algn="l" defTabSz="914400" rtl="0" eaLnBrk="1" latinLnBrk="0" hangingPunct="1">
+              <a:defRPr sz="1800" kern="1200">
+                <a:solidFill>
+                  <a:schemeClr val="tx1"/>
+                </a:solidFill>
+                <a:latin typeface="+mn-lt"/>
+                <a:ea typeface="+mn-ea"/>
+                <a:cs typeface="+mn-cs"/>
+              </a:defRPr>
+            </a:lvl4pPr>
+            <a:lvl5pPr marL="1828800" algn="l" defTabSz="914400" rtl="0" eaLnBrk="1" latinLnBrk="0" hangingPunct="1">
+              <a:defRPr sz="1800" kern="1200">
+                <a:solidFill>
+                  <a:schemeClr val="tx1"/>
+                </a:solidFill>
+                <a:latin typeface="+mn-lt"/>
+                <a:ea typeface="+mn-ea"/>
+                <a:cs typeface="+mn-cs"/>
+              </a:defRPr>
+            </a:lvl5pPr>
+            <a:lvl6pPr marL="2286000" algn="l" defTabSz="914400" rtl="0" eaLnBrk="1" latinLnBrk="0" hangingPunct="1">
+              <a:defRPr sz="1800" kern="1200">
+                <a:solidFill>
+                  <a:schemeClr val="tx1"/>
+                </a:solidFill>
+                <a:latin typeface="+mn-lt"/>
+                <a:ea typeface="+mn-ea"/>
+                <a:cs typeface="+mn-cs"/>
+              </a:defRPr>
+            </a:lvl6pPr>
+            <a:lvl7pPr marL="2743200" algn="l" defTabSz="914400" rtl="0" eaLnBrk="1" latinLnBrk="0" hangingPunct="1">
+              <a:defRPr sz="1800" kern="1200">
+                <a:solidFill>
+                  <a:schemeClr val="tx1"/>
+                </a:solidFill>
+                <a:latin typeface="+mn-lt"/>
+                <a:ea typeface="+mn-ea"/>
+                <a:cs typeface="+mn-cs"/>
+              </a:defRPr>
+            </a:lvl7pPr>
+            <a:lvl8pPr marL="3200400" algn="l" defTabSz="914400" rtl="0" eaLnBrk="1" latinLnBrk="0" hangingPunct="1">
+              <a:defRPr sz="1800" kern="1200">
+                <a:solidFill>
+                  <a:schemeClr val="tx1"/>
+                </a:solidFill>
+                <a:latin typeface="+mn-lt"/>
+                <a:ea typeface="+mn-ea"/>
+                <a:cs typeface="+mn-cs"/>
+              </a:defRPr>
+            </a:lvl8pPr>
+            <a:lvl9pPr marL="3657600" algn="l" defTabSz="914400" rtl="0" eaLnBrk="1" latinLnBrk="0" hangingPunct="1">
+              <a:defRPr sz="1800" kern="1200">
+                <a:solidFill>
+                  <a:schemeClr val="tx1"/>
+                </a:solidFill>
+                <a:latin typeface="+mn-lt"/>
+                <a:ea typeface="+mn-ea"/>
+                <a:cs typeface="+mn-cs"/>
+              </a:defRPr>
+            </a:lvl9pPr>
+          </a:lstStyle>
+          <a:p>
+            <a:pPr marL="0" marR="0" lvl="0" indent="0" algn="ctr" defTabSz="914400" rtl="0" eaLnBrk="1" fontAlgn="auto" latinLnBrk="0" hangingPunct="1">
+              <a:lnSpc>
+                <a:spcPct val="100000"/>
+              </a:lnSpc>
+              <a:spcBef>
+                <a:spcPts val="0"/>
+              </a:spcBef>
+              <a:spcAft>
+                <a:spcPts val="0"/>
+              </a:spcAft>
+              <a:buClrTx/>
+              <a:buSzTx/>
+              <a:buFontTx/>
+              <a:buNone/>
+              <a:tabLst/>
+              <a:defRPr/>
+            </a:pPr>
+            <a:r>
+              <a:rPr kumimoji="0" lang="en-US" sz="1200" b="0" i="0" u="none" strike="noStrike" kern="1200" cap="none" spc="0" normalizeH="0" baseline="0" noProof="0" dirty="0">
+                <a:ln>
+                  <a:noFill/>
+                </a:ln>
+                <a:solidFill>
+                  <a:prstClr val="black">
+                    <a:tint val="75000"/>
+                  </a:prstClr>
+                </a:solidFill>
+                <a:effectLst/>
+                <a:uLnTx/>
+                <a:uFillTx/>
+                <a:latin typeface="Helvetica Neue" panose="02000503000000020004" pitchFamily="2" charset="0"/>
+                <a:ea typeface="Helvetica Neue" panose="02000503000000020004" pitchFamily="2" charset="0"/>
+                <a:cs typeface="Helvetica Neue" panose="02000503000000020004" pitchFamily="2" charset="0"/>
+              </a:rPr>
+              <a:t>architrino.com</a:t>
+            </a:r>
+          </a:p>
+        </p:txBody>
+      </p:sp>
     </p:spTree>
     <p:extLst>
       <p:ext uri="{BB962C8B-B14F-4D97-AF65-F5344CB8AC3E}">
-        <p14:creationId xmlns:p14="http://schemas.microsoft.com/office/powerpoint/2010/main" val="768824540"/>
+        <ns3:creationId val="768824540"/>
       </p:ext>
     </p:extLst>
   </p:cSld>
@@ -17670,7 +19230,7 @@
 </file>
 
 <file path=ppt/slides/slide5.xml><?xml version="1.0" encoding="utf-8"?>
-<p:sld xmlns:a="http://schemas.openxmlformats.org/drawingml/2006/main" xmlns:r="http://schemas.openxmlformats.org/officeDocument/2006/relationships" xmlns:p="http://schemas.openxmlformats.org/presentationml/2006/main">
+<p:sld xmlns:a="http://schemas.openxmlformats.org/drawingml/2006/main" xmlns:a16="http://schemas.microsoft.com/office/drawing/2014/main" xmlns:ns3="http://schemas.microsoft.com/office/powerpoint/2010/main" xmlns:p="http://schemas.openxmlformats.org/presentationml/2006/main">
   <p:cSld>
     <p:bg>
       <p:bgPr>
@@ -17699,7 +19259,7 @@
           <p:cNvPr id="2" name="Title 1">
             <a:extLst>
               <a:ext uri="{FF2B5EF4-FFF2-40B4-BE49-F238E27FC236}">
-                <a16:creationId xmlns:a16="http://schemas.microsoft.com/office/drawing/2014/main" id="{983D3BD9-EF0C-1E44-A158-923D0C7D4BB3}"/>
+                <a16:creationId id="{983D3BD9-EF0C-1E44-A158-923D0C7D4BB3}"/>
               </a:ext>
             </a:extLst>
           </p:cNvPr>
@@ -17732,7 +19292,7 @@
                 <a:ea typeface="Helvetica Neue" panose="02000503000000020004" pitchFamily="2" charset="0"/>
                 <a:cs typeface="Helvetica Neue" panose="02000503000000020004" pitchFamily="2" charset="0"/>
               </a:rPr>
-              <a:t>Point Potential Energy</a:t>
+              <a:t>Architrino Energy</a:t>
             </a:r>
           </a:p>
         </p:txBody>
@@ -17742,7 +19302,7 @@
           <p:cNvPr id="4" name="Footer Placeholder 3">
             <a:extLst>
               <a:ext uri="{FF2B5EF4-FFF2-40B4-BE49-F238E27FC236}">
-                <a16:creationId xmlns:a16="http://schemas.microsoft.com/office/drawing/2014/main" id="{B46B4692-7F2F-6E4B-963F-EC452AE01AA9}"/>
+                <a16:creationId id="{B46B4692-7F2F-6E4B-963F-EC452AE01AA9}"/>
               </a:ext>
             </a:extLst>
           </p:cNvPr>
@@ -17805,7 +19365,7 @@
           <p:cNvPr id="16" name="Group 15">
             <a:extLst>
               <a:ext uri="{FF2B5EF4-FFF2-40B4-BE49-F238E27FC236}">
-                <a16:creationId xmlns:a16="http://schemas.microsoft.com/office/drawing/2014/main" id="{61C70F64-6EA5-EA05-3170-97F09DF5B97A}"/>
+                <a16:creationId id="{61C70F64-6EA5-EA05-3170-97F09DF5B97A}"/>
               </a:ext>
             </a:extLst>
           </p:cNvPr>
@@ -17825,7 +19385,7 @@
             <p:cNvPr id="12" name="Group 11">
               <a:extLst>
                 <a:ext uri="{FF2B5EF4-FFF2-40B4-BE49-F238E27FC236}">
-                  <a16:creationId xmlns:a16="http://schemas.microsoft.com/office/drawing/2014/main" id="{45DB1E4A-5739-CC3A-5405-F5D36EF9F331}"/>
+                  <a16:creationId id="{45DB1E4A-5739-CC3A-5405-F5D36EF9F331}"/>
                 </a:ext>
               </a:extLst>
             </p:cNvPr>
@@ -17845,7 +19405,7 @@
               <p:cNvPr id="6" name="Oval 5">
                 <a:extLst>
                   <a:ext uri="{FF2B5EF4-FFF2-40B4-BE49-F238E27FC236}">
-                    <a16:creationId xmlns:a16="http://schemas.microsoft.com/office/drawing/2014/main" id="{38985803-DA6E-8548-BD14-7743C8492FA0}"/>
+                    <a16:creationId id="{38985803-DA6E-8548-BD14-7743C8492FA0}"/>
                   </a:ext>
                 </a:extLst>
               </p:cNvPr>
@@ -17912,7 +19472,7 @@
               <p:cNvPr id="7" name="Rectangle 6">
                 <a:extLst>
                   <a:ext uri="{FF2B5EF4-FFF2-40B4-BE49-F238E27FC236}">
-                    <a16:creationId xmlns:a16="http://schemas.microsoft.com/office/drawing/2014/main" id="{F2244FC9-B137-EB4E-A718-78190AE91366}"/>
+                    <a16:creationId id="{F2244FC9-B137-EB4E-A718-78190AE91366}"/>
                   </a:ext>
                 </a:extLst>
               </p:cNvPr>
@@ -17977,7 +19537,7 @@
             <p:cNvPr id="14" name="Minus 13">
               <a:extLst>
                 <a:ext uri="{FF2B5EF4-FFF2-40B4-BE49-F238E27FC236}">
-                  <a16:creationId xmlns:a16="http://schemas.microsoft.com/office/drawing/2014/main" id="{09ADC253-730C-264F-8155-E49642931ADA}"/>
+                  <a16:creationId id="{09ADC253-730C-264F-8155-E49642931ADA}"/>
                 </a:ext>
               </a:extLst>
             </p:cNvPr>
@@ -18042,7 +19602,7 @@
           <p:cNvPr id="17" name="Group 16">
             <a:extLst>
               <a:ext uri="{FF2B5EF4-FFF2-40B4-BE49-F238E27FC236}">
-                <a16:creationId xmlns:a16="http://schemas.microsoft.com/office/drawing/2014/main" id="{99197762-1F6C-CC2A-552D-52828CD3C5D3}"/>
+                <a16:creationId id="{99197762-1F6C-CC2A-552D-52828CD3C5D3}"/>
               </a:ext>
             </a:extLst>
           </p:cNvPr>
@@ -18062,7 +19622,7 @@
             <p:cNvPr id="15" name="Group 14">
               <a:extLst>
                 <a:ext uri="{FF2B5EF4-FFF2-40B4-BE49-F238E27FC236}">
-                  <a16:creationId xmlns:a16="http://schemas.microsoft.com/office/drawing/2014/main" id="{FCBB86F0-7603-7410-74CD-64C8990BBE88}"/>
+                  <a16:creationId id="{FCBB86F0-7603-7410-74CD-64C8990BBE88}"/>
                 </a:ext>
               </a:extLst>
             </p:cNvPr>
@@ -18082,7 +19642,7 @@
               <p:cNvPr id="5" name="Oval 4">
                 <a:extLst>
                   <a:ext uri="{FF2B5EF4-FFF2-40B4-BE49-F238E27FC236}">
-                    <a16:creationId xmlns:a16="http://schemas.microsoft.com/office/drawing/2014/main" id="{405A7150-905F-F24D-BF97-63899D0E98A3}"/>
+                    <a16:creationId id="{405A7150-905F-F24D-BF97-63899D0E98A3}"/>
                   </a:ext>
                 </a:extLst>
               </p:cNvPr>
@@ -18149,7 +19709,7 @@
               <p:cNvPr id="8" name="Rectangle 7">
                 <a:extLst>
                   <a:ext uri="{FF2B5EF4-FFF2-40B4-BE49-F238E27FC236}">
-                    <a16:creationId xmlns:a16="http://schemas.microsoft.com/office/drawing/2014/main" id="{930F45C2-0FE5-F04C-B568-5F9239FE086D}"/>
+                    <a16:creationId id="{930F45C2-0FE5-F04C-B568-5F9239FE086D}"/>
                   </a:ext>
                 </a:extLst>
               </p:cNvPr>
@@ -18214,7 +19774,7 @@
             <p:cNvPr id="13" name="Plus 12">
               <a:extLst>
                 <a:ext uri="{FF2B5EF4-FFF2-40B4-BE49-F238E27FC236}">
-                  <a16:creationId xmlns:a16="http://schemas.microsoft.com/office/drawing/2014/main" id="{A2F97F06-5AE9-B844-8A28-B02FF48414FF}"/>
+                  <a16:creationId id="{A2F97F06-5AE9-B844-8A28-B02FF48414FF}"/>
                 </a:ext>
               </a:extLst>
             </p:cNvPr>
@@ -18279,7 +19839,7 @@
           <p:cNvPr id="33" name="Rectangle 32">
             <a:extLst>
               <a:ext uri="{FF2B5EF4-FFF2-40B4-BE49-F238E27FC236}">
-                <a16:creationId xmlns:a16="http://schemas.microsoft.com/office/drawing/2014/main" id="{6FB04752-7BBD-3648-BE22-8D983884B555}"/>
+                <a16:creationId id="{6FB04752-7BBD-3648-BE22-8D983884B555}"/>
               </a:ext>
             </a:extLst>
           </p:cNvPr>
@@ -18327,7 +19887,7 @@
                 <a:ea typeface="Helvetica Neue" panose="02000503000000020004" pitchFamily="2" charset="0"/>
                 <a:cs typeface="Helvetica Neue" panose="02000503000000020004" pitchFamily="2" charset="0"/>
               </a:rPr>
-              <a:t>Point Potentials are Constant Rate Emitters of Potential.</a:t>
+              <a:t>Architrinos are Constant Rate Emitters of Potential.</a:t>
             </a:r>
           </a:p>
           <a:p>
@@ -18363,7 +19923,7 @@
                 <a:ea typeface="Helvetica Neue" panose="02000503000000020004" pitchFamily="2" charset="0"/>
                 <a:cs typeface="Helvetica Neue" panose="02000503000000020004" pitchFamily="2" charset="0"/>
               </a:rPr>
-              <a:t>Action of Potential Emissions on Point Potentials Changes Energy.</a:t>
+              <a:t>Action of Potential Emissions on Architrinos Changes Energy.</a:t>
             </a:r>
           </a:p>
         </p:txBody>
@@ -18373,7 +19933,7 @@
           <p:cNvPr id="11" name="Group 10">
             <a:extLst>
               <a:ext uri="{FF2B5EF4-FFF2-40B4-BE49-F238E27FC236}">
-                <a16:creationId xmlns:a16="http://schemas.microsoft.com/office/drawing/2014/main" id="{330CC259-8ECA-9504-DF84-043CB2F2838C}"/>
+                <a16:creationId id="{330CC259-8ECA-9504-DF84-043CB2F2838C}"/>
               </a:ext>
             </a:extLst>
           </p:cNvPr>
@@ -18393,7 +19953,7 @@
             <p:cNvPr id="32" name="Rectangle 31">
               <a:extLst>
                 <a:ext uri="{FF2B5EF4-FFF2-40B4-BE49-F238E27FC236}">
-                  <a16:creationId xmlns:a16="http://schemas.microsoft.com/office/drawing/2014/main" id="{90B4F778-AAF3-8441-A126-EF65BDDCA5EE}"/>
+                  <a16:creationId id="{90B4F778-AAF3-8441-A126-EF65BDDCA5EE}"/>
                 </a:ext>
               </a:extLst>
             </p:cNvPr>
@@ -18529,7 +20089,7 @@
             <p:cNvPr id="24" name="Straight Arrow Connector 23">
               <a:extLst>
                 <a:ext uri="{FF2B5EF4-FFF2-40B4-BE49-F238E27FC236}">
-                  <a16:creationId xmlns:a16="http://schemas.microsoft.com/office/drawing/2014/main" id="{282275DC-2AB9-8842-B077-479BC4E05F88}"/>
+                  <a16:creationId id="{282275DC-2AB9-8842-B077-479BC4E05F88}"/>
                 </a:ext>
               </a:extLst>
             </p:cNvPr>
@@ -18576,7 +20136,7 @@
           <p:cNvPr id="25" name="Footer Placeholder 3">
             <a:extLst>
               <a:ext uri="{FF2B5EF4-FFF2-40B4-BE49-F238E27FC236}">
-                <a16:creationId xmlns:a16="http://schemas.microsoft.com/office/drawing/2014/main" id="{246E4B47-B7AD-0745-91FA-AA77D12D888D}"/>
+                <a16:creationId id="{246E4B47-B7AD-0745-91FA-AA77D12D888D}"/>
               </a:ext>
             </a:extLst>
           </p:cNvPr>
@@ -18754,7 +20314,7 @@
           <p:cNvPr id="9" name="Group 8">
             <a:extLst>
               <a:ext uri="{FF2B5EF4-FFF2-40B4-BE49-F238E27FC236}">
-                <a16:creationId xmlns:a16="http://schemas.microsoft.com/office/drawing/2014/main" id="{31017E8F-4F31-A516-F0AA-7D268180E96C}"/>
+                <a16:creationId id="{31017E8F-4F31-A516-F0AA-7D268180E96C}"/>
               </a:ext>
             </a:extLst>
           </p:cNvPr>
@@ -18774,7 +20334,7 @@
             <p:cNvPr id="20" name="Group 19">
               <a:extLst>
                 <a:ext uri="{FF2B5EF4-FFF2-40B4-BE49-F238E27FC236}">
-                  <a16:creationId xmlns:a16="http://schemas.microsoft.com/office/drawing/2014/main" id="{7B450B60-56DD-E447-B796-B112D6F74ECA}"/>
+                  <a16:creationId id="{7B450B60-56DD-E447-B796-B112D6F74ECA}"/>
                 </a:ext>
               </a:extLst>
             </p:cNvPr>
@@ -18794,7 +20354,7 @@
               <p:cNvPr id="23" name="Straight Arrow Connector 22">
                 <a:extLst>
                   <a:ext uri="{FF2B5EF4-FFF2-40B4-BE49-F238E27FC236}">
-                    <a16:creationId xmlns:a16="http://schemas.microsoft.com/office/drawing/2014/main" id="{CE1E4885-6E99-C949-A2D8-5B8C82D5957E}"/>
+                    <a16:creationId id="{CE1E4885-6E99-C949-A2D8-5B8C82D5957E}"/>
                   </a:ext>
                 </a:extLst>
               </p:cNvPr>
@@ -18840,7 +20400,7 @@
               <p:cNvPr id="28" name="Straight Arrow Connector 27">
                 <a:extLst>
                   <a:ext uri="{FF2B5EF4-FFF2-40B4-BE49-F238E27FC236}">
-                    <a16:creationId xmlns:a16="http://schemas.microsoft.com/office/drawing/2014/main" id="{371FBCDF-30F2-6749-9C7D-FE0A8D83337B}"/>
+                    <a16:creationId id="{371FBCDF-30F2-6749-9C7D-FE0A8D83337B}"/>
                   </a:ext>
                 </a:extLst>
               </p:cNvPr>
@@ -18886,7 +20446,7 @@
               <p:cNvPr id="29" name="Straight Arrow Connector 28">
                 <a:extLst>
                   <a:ext uri="{FF2B5EF4-FFF2-40B4-BE49-F238E27FC236}">
-                    <a16:creationId xmlns:a16="http://schemas.microsoft.com/office/drawing/2014/main" id="{BF5810EE-ACDB-6544-9F58-5DEBD8E72D37}"/>
+                    <a16:creationId id="{BF5810EE-ACDB-6544-9F58-5DEBD8E72D37}"/>
                   </a:ext>
                 </a:extLst>
               </p:cNvPr>
@@ -18933,7 +20493,7 @@
             <p:cNvPr id="3" name="Rectangle 2">
               <a:extLst>
                 <a:ext uri="{FF2B5EF4-FFF2-40B4-BE49-F238E27FC236}">
-                  <a16:creationId xmlns:a16="http://schemas.microsoft.com/office/drawing/2014/main" id="{B3E4CD37-BCF3-72BF-F3B3-DAC45082593B}"/>
+                  <a16:creationId id="{B3E4CD37-BCF3-72BF-F3B3-DAC45082593B}"/>
                 </a:ext>
               </a:extLst>
             </p:cNvPr>
@@ -19065,10 +20625,166 @@
           </p:txBody>
         </p:sp>
       </p:grpSp>
+      <p:sp>
+        <p:nvSpPr>
+          <p:cNvPr id="34" name="Footer Placeholder 3"/>
+          <p:cNvSpPr txBox="1">
+            <a:spLocks/>
+          </p:cNvSpPr>
+          <p:nvPr/>
+        </p:nvSpPr>
+        <p:spPr>
+          <a:xfrm>
+            <a:off x="10942204" y="6481737"/>
+            <a:ext cx="1217443" cy="365125"/>
+          </a:xfrm>
+          <a:prstGeom prst="rect">
+            <a:avLst/>
+          </a:prstGeom>
+        </p:spPr>
+        <p:txBody>
+          <a:bodyPr vert="horz" lIns="91440" tIns="45720" rIns="91440" bIns="45720" rtlCol="0" anchor="ctr"/>
+          <a:lstStyle>
+            <a:defPPr>
+              <a:defRPr lang="en-US"/>
+            </a:defPPr>
+            <a:lvl1pPr marL="0" algn="ctr" defTabSz="914400" rtl="0" eaLnBrk="1" latinLnBrk="0" hangingPunct="1">
+              <a:defRPr sz="1200" kern="1200">
+                <a:solidFill>
+                  <a:schemeClr val="tx1">
+                    <a:tint val="75000"/>
+                  </a:schemeClr>
+                </a:solidFill>
+                <a:latin typeface="+mn-lt"/>
+                <a:ea typeface="+mn-ea"/>
+                <a:cs typeface="+mn-cs"/>
+              </a:defRPr>
+            </a:lvl1pPr>
+            <a:lvl2pPr marL="457200" algn="l" defTabSz="914400" rtl="0" eaLnBrk="1" latinLnBrk="0" hangingPunct="1">
+              <a:defRPr sz="1800" kern="1200">
+                <a:solidFill>
+                  <a:schemeClr val="tx1"/>
+                </a:solidFill>
+                <a:latin typeface="+mn-lt"/>
+                <a:ea typeface="+mn-ea"/>
+                <a:cs typeface="+mn-cs"/>
+              </a:defRPr>
+            </a:lvl2pPr>
+            <a:lvl3pPr marL="914400" algn="l" defTabSz="914400" rtl="0" eaLnBrk="1" latinLnBrk="0" hangingPunct="1">
+              <a:defRPr sz="1800" kern="1200">
+                <a:solidFill>
+                  <a:schemeClr val="tx1"/>
+                </a:solidFill>
+                <a:latin typeface="+mn-lt"/>
+                <a:ea typeface="+mn-ea"/>
+                <a:cs typeface="+mn-cs"/>
+              </a:defRPr>
+            </a:lvl3pPr>
+            <a:lvl4pPr marL="1371600" algn="l" defTabSz="914400" rtl="0" eaLnBrk="1" latinLnBrk="0" hangingPunct="1">
+              <a:defRPr sz="1800" kern="1200">
+                <a:solidFill>
+                  <a:schemeClr val="tx1"/>
+                </a:solidFill>
+                <a:latin typeface="+mn-lt"/>
+                <a:ea typeface="+mn-ea"/>
+                <a:cs typeface="+mn-cs"/>
+              </a:defRPr>
+            </a:lvl4pPr>
+            <a:lvl5pPr marL="1828800" algn="l" defTabSz="914400" rtl="0" eaLnBrk="1" latinLnBrk="0" hangingPunct="1">
+              <a:defRPr sz="1800" kern="1200">
+                <a:solidFill>
+                  <a:schemeClr val="tx1"/>
+                </a:solidFill>
+                <a:latin typeface="+mn-lt"/>
+                <a:ea typeface="+mn-ea"/>
+                <a:cs typeface="+mn-cs"/>
+              </a:defRPr>
+            </a:lvl5pPr>
+            <a:lvl6pPr marL="2286000" algn="l" defTabSz="914400" rtl="0" eaLnBrk="1" latinLnBrk="0" hangingPunct="1">
+              <a:defRPr sz="1800" kern="1200">
+                <a:solidFill>
+                  <a:schemeClr val="tx1"/>
+                </a:solidFill>
+                <a:latin typeface="+mn-lt"/>
+                <a:ea typeface="+mn-ea"/>
+                <a:cs typeface="+mn-cs"/>
+              </a:defRPr>
+            </a:lvl6pPr>
+            <a:lvl7pPr marL="2743200" algn="l" defTabSz="914400" rtl="0" eaLnBrk="1" latinLnBrk="0" hangingPunct="1">
+              <a:defRPr sz="1800" kern="1200">
+                <a:solidFill>
+                  <a:schemeClr val="tx1"/>
+                </a:solidFill>
+                <a:latin typeface="+mn-lt"/>
+                <a:ea typeface="+mn-ea"/>
+                <a:cs typeface="+mn-cs"/>
+              </a:defRPr>
+            </a:lvl7pPr>
+            <a:lvl8pPr marL="3200400" algn="l" defTabSz="914400" rtl="0" eaLnBrk="1" latinLnBrk="0" hangingPunct="1">
+              <a:defRPr sz="1800" kern="1200">
+                <a:solidFill>
+                  <a:schemeClr val="tx1"/>
+                </a:solidFill>
+                <a:latin typeface="+mn-lt"/>
+                <a:ea typeface="+mn-ea"/>
+                <a:cs typeface="+mn-cs"/>
+              </a:defRPr>
+            </a:lvl8pPr>
+            <a:lvl9pPr marL="3657600" algn="l" defTabSz="914400" rtl="0" eaLnBrk="1" latinLnBrk="0" hangingPunct="1">
+              <a:defRPr sz="1800" kern="1200">
+                <a:solidFill>
+                  <a:schemeClr val="tx1"/>
+                </a:solidFill>
+                <a:latin typeface="+mn-lt"/>
+                <a:ea typeface="+mn-ea"/>
+                <a:cs typeface="+mn-cs"/>
+              </a:defRPr>
+            </a:lvl9pPr>
+          </a:lstStyle>
+          <a:p>
+            <a:pPr marL="0" marR="0" lvl="0" indent="0" algn="ctr" defTabSz="914400" rtl="0" eaLnBrk="1" fontAlgn="auto" latinLnBrk="0" hangingPunct="1">
+              <a:lnSpc>
+                <a:spcPct val="100000"/>
+              </a:lnSpc>
+              <a:spcBef>
+                <a:spcPts val="0"/>
+              </a:spcBef>
+              <a:spcAft>
+                <a:spcPts val="0"/>
+              </a:spcAft>
+              <a:buClrTx/>
+              <a:buSzTx/>
+              <a:buFontTx/>
+              <a:buNone/>
+              <a:tabLst/>
+              <a:defRPr/>
+            </a:pPr>
+            <a:r>
+              <a:rPr kumimoji="0" lang="en-US" sz="1200" b="0" i="0" u="none" strike="noStrike" kern="1200" cap="none" spc="0" normalizeH="0" baseline="0" noProof="0" dirty="0">
+                <a:ln>
+                  <a:noFill/>
+                </a:ln>
+                <a:solidFill>
+                  <a:prstClr val="black">
+                    <a:tint val="75000"/>
+                  </a:prstClr>
+                </a:solidFill>
+                <a:effectLst/>
+                <a:uLnTx/>
+                <a:uFillTx/>
+                <a:latin typeface="Helvetica Neue" panose="02000503000000020004" pitchFamily="2" charset="0"/>
+                <a:ea typeface="Helvetica Neue" panose="02000503000000020004" pitchFamily="2" charset="0"/>
+                <a:cs typeface="Helvetica Neue" panose="02000503000000020004" pitchFamily="2" charset="0"/>
+              </a:rPr>
+              <a:t>architrino.com</a:t>
+            </a:r>
+          </a:p>
+        </p:txBody>
+      </p:sp>
     </p:spTree>
     <p:extLst>
       <p:ext uri="{BB962C8B-B14F-4D97-AF65-F5344CB8AC3E}">
-        <p14:creationId xmlns:p14="http://schemas.microsoft.com/office/powerpoint/2010/main" val="1016810738"/>
+        <ns3:creationId val="1016810738"/>
       </p:ext>
     </p:extLst>
   </p:cSld>
@@ -19079,7 +20795,7 @@
 </file>
 
 <file path=ppt/slides/slide6.xml><?xml version="1.0" encoding="utf-8"?>
-<p:sld xmlns:a="http://schemas.openxmlformats.org/drawingml/2006/main" xmlns:r="http://schemas.openxmlformats.org/officeDocument/2006/relationships" xmlns:p="http://schemas.openxmlformats.org/presentationml/2006/main">
+<p:sld xmlns:a="http://schemas.openxmlformats.org/drawingml/2006/main" xmlns:a16="http://schemas.microsoft.com/office/drawing/2014/main" xmlns:ns3="http://schemas.microsoft.com/office/powerpoint/2010/main" xmlns:p="http://schemas.openxmlformats.org/presentationml/2006/main">
   <p:cSld>
     <p:bg>
       <p:bgPr>
@@ -19108,7 +20824,7 @@
           <p:cNvPr id="2" name="Title 1">
             <a:extLst>
               <a:ext uri="{FF2B5EF4-FFF2-40B4-BE49-F238E27FC236}">
-                <a16:creationId xmlns:a16="http://schemas.microsoft.com/office/drawing/2014/main" id="{983D3BD9-EF0C-1E44-A158-923D0C7D4BB3}"/>
+                <a16:creationId id="{983D3BD9-EF0C-1E44-A158-923D0C7D4BB3}"/>
               </a:ext>
             </a:extLst>
           </p:cNvPr>
@@ -19141,7 +20857,7 @@
                 <a:ea typeface="Helvetica Neue" panose="02000503000000020004" pitchFamily="2" charset="0"/>
                 <a:cs typeface="Helvetica Neue" panose="02000503000000020004" pitchFamily="2" charset="0"/>
               </a:rPr>
-              <a:t>Large Scale Point Potential Observables</a:t>
+              <a:t>Large Scale Architrino Observables</a:t>
             </a:r>
           </a:p>
         </p:txBody>
@@ -19151,7 +20867,7 @@
           <p:cNvPr id="4" name="Footer Placeholder 3">
             <a:extLst>
               <a:ext uri="{FF2B5EF4-FFF2-40B4-BE49-F238E27FC236}">
-                <a16:creationId xmlns:a16="http://schemas.microsoft.com/office/drawing/2014/main" id="{B46B4692-7F2F-6E4B-963F-EC452AE01AA9}"/>
+                <a16:creationId id="{B46B4692-7F2F-6E4B-963F-EC452AE01AA9}"/>
               </a:ext>
             </a:extLst>
           </p:cNvPr>
@@ -19214,7 +20930,7 @@
           <p:cNvPr id="16" name="Group 15">
             <a:extLst>
               <a:ext uri="{FF2B5EF4-FFF2-40B4-BE49-F238E27FC236}">
-                <a16:creationId xmlns:a16="http://schemas.microsoft.com/office/drawing/2014/main" id="{61C70F64-6EA5-EA05-3170-97F09DF5B97A}"/>
+                <a16:creationId id="{61C70F64-6EA5-EA05-3170-97F09DF5B97A}"/>
               </a:ext>
             </a:extLst>
           </p:cNvPr>
@@ -19234,7 +20950,7 @@
             <p:cNvPr id="12" name="Group 11">
               <a:extLst>
                 <a:ext uri="{FF2B5EF4-FFF2-40B4-BE49-F238E27FC236}">
-                  <a16:creationId xmlns:a16="http://schemas.microsoft.com/office/drawing/2014/main" id="{45DB1E4A-5739-CC3A-5405-F5D36EF9F331}"/>
+                  <a16:creationId id="{45DB1E4A-5739-CC3A-5405-F5D36EF9F331}"/>
                 </a:ext>
               </a:extLst>
             </p:cNvPr>
@@ -19254,7 +20970,7 @@
               <p:cNvPr id="6" name="Oval 5">
                 <a:extLst>
                   <a:ext uri="{FF2B5EF4-FFF2-40B4-BE49-F238E27FC236}">
-                    <a16:creationId xmlns:a16="http://schemas.microsoft.com/office/drawing/2014/main" id="{38985803-DA6E-8548-BD14-7743C8492FA0}"/>
+                    <a16:creationId id="{38985803-DA6E-8548-BD14-7743C8492FA0}"/>
                   </a:ext>
                 </a:extLst>
               </p:cNvPr>
@@ -19321,7 +21037,7 @@
               <p:cNvPr id="7" name="Rectangle 6">
                 <a:extLst>
                   <a:ext uri="{FF2B5EF4-FFF2-40B4-BE49-F238E27FC236}">
-                    <a16:creationId xmlns:a16="http://schemas.microsoft.com/office/drawing/2014/main" id="{F2244FC9-B137-EB4E-A718-78190AE91366}"/>
+                    <a16:creationId id="{F2244FC9-B137-EB4E-A718-78190AE91366}"/>
                   </a:ext>
                 </a:extLst>
               </p:cNvPr>
@@ -19386,7 +21102,7 @@
             <p:cNvPr id="14" name="Minus 13">
               <a:extLst>
                 <a:ext uri="{FF2B5EF4-FFF2-40B4-BE49-F238E27FC236}">
-                  <a16:creationId xmlns:a16="http://schemas.microsoft.com/office/drawing/2014/main" id="{09ADC253-730C-264F-8155-E49642931ADA}"/>
+                  <a16:creationId id="{09ADC253-730C-264F-8155-E49642931ADA}"/>
                 </a:ext>
               </a:extLst>
             </p:cNvPr>
@@ -19451,7 +21167,7 @@
           <p:cNvPr id="17" name="Group 16">
             <a:extLst>
               <a:ext uri="{FF2B5EF4-FFF2-40B4-BE49-F238E27FC236}">
-                <a16:creationId xmlns:a16="http://schemas.microsoft.com/office/drawing/2014/main" id="{99197762-1F6C-CC2A-552D-52828CD3C5D3}"/>
+                <a16:creationId id="{99197762-1F6C-CC2A-552D-52828CD3C5D3}"/>
               </a:ext>
             </a:extLst>
           </p:cNvPr>
@@ -19471,7 +21187,7 @@
             <p:cNvPr id="15" name="Group 14">
               <a:extLst>
                 <a:ext uri="{FF2B5EF4-FFF2-40B4-BE49-F238E27FC236}">
-                  <a16:creationId xmlns:a16="http://schemas.microsoft.com/office/drawing/2014/main" id="{FCBB86F0-7603-7410-74CD-64C8990BBE88}"/>
+                  <a16:creationId id="{FCBB86F0-7603-7410-74CD-64C8990BBE88}"/>
                 </a:ext>
               </a:extLst>
             </p:cNvPr>
@@ -19491,7 +21207,7 @@
               <p:cNvPr id="5" name="Oval 4">
                 <a:extLst>
                   <a:ext uri="{FF2B5EF4-FFF2-40B4-BE49-F238E27FC236}">
-                    <a16:creationId xmlns:a16="http://schemas.microsoft.com/office/drawing/2014/main" id="{405A7150-905F-F24D-BF97-63899D0E98A3}"/>
+                    <a16:creationId id="{405A7150-905F-F24D-BF97-63899D0E98A3}"/>
                   </a:ext>
                 </a:extLst>
               </p:cNvPr>
@@ -19558,7 +21274,7 @@
               <p:cNvPr id="8" name="Rectangle 7">
                 <a:extLst>
                   <a:ext uri="{FF2B5EF4-FFF2-40B4-BE49-F238E27FC236}">
-                    <a16:creationId xmlns:a16="http://schemas.microsoft.com/office/drawing/2014/main" id="{930F45C2-0FE5-F04C-B568-5F9239FE086D}"/>
+                    <a16:creationId id="{930F45C2-0FE5-F04C-B568-5F9239FE086D}"/>
                   </a:ext>
                 </a:extLst>
               </p:cNvPr>
@@ -19623,7 +21339,7 @@
             <p:cNvPr id="13" name="Plus 12">
               <a:extLst>
                 <a:ext uri="{FF2B5EF4-FFF2-40B4-BE49-F238E27FC236}">
-                  <a16:creationId xmlns:a16="http://schemas.microsoft.com/office/drawing/2014/main" id="{A2F97F06-5AE9-B844-8A28-B02FF48414FF}"/>
+                  <a16:creationId id="{A2F97F06-5AE9-B844-8A28-B02FF48414FF}"/>
                 </a:ext>
               </a:extLst>
             </p:cNvPr>
@@ -19688,7 +21404,7 @@
           <p:cNvPr id="33" name="Rectangle 32">
             <a:extLst>
               <a:ext uri="{FF2B5EF4-FFF2-40B4-BE49-F238E27FC236}">
-                <a16:creationId xmlns:a16="http://schemas.microsoft.com/office/drawing/2014/main" id="{6FB04752-7BBD-3648-BE22-8D983884B555}"/>
+                <a16:creationId id="{6FB04752-7BBD-3648-BE22-8D983884B555}"/>
               </a:ext>
             </a:extLst>
           </p:cNvPr>
@@ -19782,7 +21498,7 @@
           <p:cNvPr id="11" name="Group 10">
             <a:extLst>
               <a:ext uri="{FF2B5EF4-FFF2-40B4-BE49-F238E27FC236}">
-                <a16:creationId xmlns:a16="http://schemas.microsoft.com/office/drawing/2014/main" id="{330CC259-8ECA-9504-DF84-043CB2F2838C}"/>
+                <a16:creationId id="{330CC259-8ECA-9504-DF84-043CB2F2838C}"/>
               </a:ext>
             </a:extLst>
           </p:cNvPr>
@@ -19802,7 +21518,7 @@
             <p:cNvPr id="32" name="Rectangle 31">
               <a:extLst>
                 <a:ext uri="{FF2B5EF4-FFF2-40B4-BE49-F238E27FC236}">
-                  <a16:creationId xmlns:a16="http://schemas.microsoft.com/office/drawing/2014/main" id="{90B4F778-AAF3-8441-A126-EF65BDDCA5EE}"/>
+                  <a16:creationId id="{90B4F778-AAF3-8441-A126-EF65BDDCA5EE}"/>
                 </a:ext>
               </a:extLst>
             </p:cNvPr>
@@ -19938,7 +21654,7 @@
             <p:cNvPr id="24" name="Straight Arrow Connector 23">
               <a:extLst>
                 <a:ext uri="{FF2B5EF4-FFF2-40B4-BE49-F238E27FC236}">
-                  <a16:creationId xmlns:a16="http://schemas.microsoft.com/office/drawing/2014/main" id="{282275DC-2AB9-8842-B077-479BC4E05F88}"/>
+                  <a16:creationId id="{282275DC-2AB9-8842-B077-479BC4E05F88}"/>
                 </a:ext>
               </a:extLst>
             </p:cNvPr>
@@ -19985,7 +21701,7 @@
           <p:cNvPr id="25" name="Footer Placeholder 3">
             <a:extLst>
               <a:ext uri="{FF2B5EF4-FFF2-40B4-BE49-F238E27FC236}">
-                <a16:creationId xmlns:a16="http://schemas.microsoft.com/office/drawing/2014/main" id="{246E4B47-B7AD-0745-91FA-AA77D12D888D}"/>
+                <a16:creationId id="{246E4B47-B7AD-0745-91FA-AA77D12D888D}"/>
               </a:ext>
             </a:extLst>
           </p:cNvPr>
@@ -20163,7 +21879,7 @@
           <p:cNvPr id="9" name="Group 8">
             <a:extLst>
               <a:ext uri="{FF2B5EF4-FFF2-40B4-BE49-F238E27FC236}">
-                <a16:creationId xmlns:a16="http://schemas.microsoft.com/office/drawing/2014/main" id="{31017E8F-4F31-A516-F0AA-7D268180E96C}"/>
+                <a16:creationId id="{31017E8F-4F31-A516-F0AA-7D268180E96C}"/>
               </a:ext>
             </a:extLst>
           </p:cNvPr>
@@ -20183,7 +21899,7 @@
             <p:cNvPr id="20" name="Group 19">
               <a:extLst>
                 <a:ext uri="{FF2B5EF4-FFF2-40B4-BE49-F238E27FC236}">
-                  <a16:creationId xmlns:a16="http://schemas.microsoft.com/office/drawing/2014/main" id="{7B450B60-56DD-E447-B796-B112D6F74ECA}"/>
+                  <a16:creationId id="{7B450B60-56DD-E447-B796-B112D6F74ECA}"/>
                 </a:ext>
               </a:extLst>
             </p:cNvPr>
@@ -20203,7 +21919,7 @@
               <p:cNvPr id="23" name="Straight Arrow Connector 22">
                 <a:extLst>
                   <a:ext uri="{FF2B5EF4-FFF2-40B4-BE49-F238E27FC236}">
-                    <a16:creationId xmlns:a16="http://schemas.microsoft.com/office/drawing/2014/main" id="{CE1E4885-6E99-C949-A2D8-5B8C82D5957E}"/>
+                    <a16:creationId id="{CE1E4885-6E99-C949-A2D8-5B8C82D5957E}"/>
                   </a:ext>
                 </a:extLst>
               </p:cNvPr>
@@ -20249,7 +21965,7 @@
               <p:cNvPr id="28" name="Straight Arrow Connector 27">
                 <a:extLst>
                   <a:ext uri="{FF2B5EF4-FFF2-40B4-BE49-F238E27FC236}">
-                    <a16:creationId xmlns:a16="http://schemas.microsoft.com/office/drawing/2014/main" id="{371FBCDF-30F2-6749-9C7D-FE0A8D83337B}"/>
+                    <a16:creationId id="{371FBCDF-30F2-6749-9C7D-FE0A8D83337B}"/>
                   </a:ext>
                 </a:extLst>
               </p:cNvPr>
@@ -20295,7 +22011,7 @@
               <p:cNvPr id="29" name="Straight Arrow Connector 28">
                 <a:extLst>
                   <a:ext uri="{FF2B5EF4-FFF2-40B4-BE49-F238E27FC236}">
-                    <a16:creationId xmlns:a16="http://schemas.microsoft.com/office/drawing/2014/main" id="{BF5810EE-ACDB-6544-9F58-5DEBD8E72D37}"/>
+                    <a16:creationId id="{BF5810EE-ACDB-6544-9F58-5DEBD8E72D37}"/>
                   </a:ext>
                 </a:extLst>
               </p:cNvPr>
@@ -20342,7 +22058,7 @@
             <p:cNvPr id="3" name="Rectangle 2">
               <a:extLst>
                 <a:ext uri="{FF2B5EF4-FFF2-40B4-BE49-F238E27FC236}">
-                  <a16:creationId xmlns:a16="http://schemas.microsoft.com/office/drawing/2014/main" id="{B3E4CD37-BCF3-72BF-F3B3-DAC45082593B}"/>
+                  <a16:creationId id="{B3E4CD37-BCF3-72BF-F3B3-DAC45082593B}"/>
                 </a:ext>
               </a:extLst>
             </p:cNvPr>
@@ -20474,10 +22190,166 @@
           </p:txBody>
         </p:sp>
       </p:grpSp>
+      <p:sp>
+        <p:nvSpPr>
+          <p:cNvPr id="34" name="Footer Placeholder 3"/>
+          <p:cNvSpPr txBox="1">
+            <a:spLocks/>
+          </p:cNvSpPr>
+          <p:nvPr/>
+        </p:nvSpPr>
+        <p:spPr>
+          <a:xfrm>
+            <a:off x="10942204" y="6481737"/>
+            <a:ext cx="1217443" cy="365125"/>
+          </a:xfrm>
+          <a:prstGeom prst="rect">
+            <a:avLst/>
+          </a:prstGeom>
+        </p:spPr>
+        <p:txBody>
+          <a:bodyPr vert="horz" lIns="91440" tIns="45720" rIns="91440" bIns="45720" rtlCol="0" anchor="ctr"/>
+          <a:lstStyle>
+            <a:defPPr>
+              <a:defRPr lang="en-US"/>
+            </a:defPPr>
+            <a:lvl1pPr marL="0" algn="ctr" defTabSz="914400" rtl="0" eaLnBrk="1" latinLnBrk="0" hangingPunct="1">
+              <a:defRPr sz="1200" kern="1200">
+                <a:solidFill>
+                  <a:schemeClr val="tx1">
+                    <a:tint val="75000"/>
+                  </a:schemeClr>
+                </a:solidFill>
+                <a:latin typeface="+mn-lt"/>
+                <a:ea typeface="+mn-ea"/>
+                <a:cs typeface="+mn-cs"/>
+              </a:defRPr>
+            </a:lvl1pPr>
+            <a:lvl2pPr marL="457200" algn="l" defTabSz="914400" rtl="0" eaLnBrk="1" latinLnBrk="0" hangingPunct="1">
+              <a:defRPr sz="1800" kern="1200">
+                <a:solidFill>
+                  <a:schemeClr val="tx1"/>
+                </a:solidFill>
+                <a:latin typeface="+mn-lt"/>
+                <a:ea typeface="+mn-ea"/>
+                <a:cs typeface="+mn-cs"/>
+              </a:defRPr>
+            </a:lvl2pPr>
+            <a:lvl3pPr marL="914400" algn="l" defTabSz="914400" rtl="0" eaLnBrk="1" latinLnBrk="0" hangingPunct="1">
+              <a:defRPr sz="1800" kern="1200">
+                <a:solidFill>
+                  <a:schemeClr val="tx1"/>
+                </a:solidFill>
+                <a:latin typeface="+mn-lt"/>
+                <a:ea typeface="+mn-ea"/>
+                <a:cs typeface="+mn-cs"/>
+              </a:defRPr>
+            </a:lvl3pPr>
+            <a:lvl4pPr marL="1371600" algn="l" defTabSz="914400" rtl="0" eaLnBrk="1" latinLnBrk="0" hangingPunct="1">
+              <a:defRPr sz="1800" kern="1200">
+                <a:solidFill>
+                  <a:schemeClr val="tx1"/>
+                </a:solidFill>
+                <a:latin typeface="+mn-lt"/>
+                <a:ea typeface="+mn-ea"/>
+                <a:cs typeface="+mn-cs"/>
+              </a:defRPr>
+            </a:lvl4pPr>
+            <a:lvl5pPr marL="1828800" algn="l" defTabSz="914400" rtl="0" eaLnBrk="1" latinLnBrk="0" hangingPunct="1">
+              <a:defRPr sz="1800" kern="1200">
+                <a:solidFill>
+                  <a:schemeClr val="tx1"/>
+                </a:solidFill>
+                <a:latin typeface="+mn-lt"/>
+                <a:ea typeface="+mn-ea"/>
+                <a:cs typeface="+mn-cs"/>
+              </a:defRPr>
+            </a:lvl5pPr>
+            <a:lvl6pPr marL="2286000" algn="l" defTabSz="914400" rtl="0" eaLnBrk="1" latinLnBrk="0" hangingPunct="1">
+              <a:defRPr sz="1800" kern="1200">
+                <a:solidFill>
+                  <a:schemeClr val="tx1"/>
+                </a:solidFill>
+                <a:latin typeface="+mn-lt"/>
+                <a:ea typeface="+mn-ea"/>
+                <a:cs typeface="+mn-cs"/>
+              </a:defRPr>
+            </a:lvl6pPr>
+            <a:lvl7pPr marL="2743200" algn="l" defTabSz="914400" rtl="0" eaLnBrk="1" latinLnBrk="0" hangingPunct="1">
+              <a:defRPr sz="1800" kern="1200">
+                <a:solidFill>
+                  <a:schemeClr val="tx1"/>
+                </a:solidFill>
+                <a:latin typeface="+mn-lt"/>
+                <a:ea typeface="+mn-ea"/>
+                <a:cs typeface="+mn-cs"/>
+              </a:defRPr>
+            </a:lvl7pPr>
+            <a:lvl8pPr marL="3200400" algn="l" defTabSz="914400" rtl="0" eaLnBrk="1" latinLnBrk="0" hangingPunct="1">
+              <a:defRPr sz="1800" kern="1200">
+                <a:solidFill>
+                  <a:schemeClr val="tx1"/>
+                </a:solidFill>
+                <a:latin typeface="+mn-lt"/>
+                <a:ea typeface="+mn-ea"/>
+                <a:cs typeface="+mn-cs"/>
+              </a:defRPr>
+            </a:lvl8pPr>
+            <a:lvl9pPr marL="3657600" algn="l" defTabSz="914400" rtl="0" eaLnBrk="1" latinLnBrk="0" hangingPunct="1">
+              <a:defRPr sz="1800" kern="1200">
+                <a:solidFill>
+                  <a:schemeClr val="tx1"/>
+                </a:solidFill>
+                <a:latin typeface="+mn-lt"/>
+                <a:ea typeface="+mn-ea"/>
+                <a:cs typeface="+mn-cs"/>
+              </a:defRPr>
+            </a:lvl9pPr>
+          </a:lstStyle>
+          <a:p>
+            <a:pPr marL="0" marR="0" lvl="0" indent="0" algn="ctr" defTabSz="914400" rtl="0" eaLnBrk="1" fontAlgn="auto" latinLnBrk="0" hangingPunct="1">
+              <a:lnSpc>
+                <a:spcPct val="100000"/>
+              </a:lnSpc>
+              <a:spcBef>
+                <a:spcPts val="0"/>
+              </a:spcBef>
+              <a:spcAft>
+                <a:spcPts val="0"/>
+              </a:spcAft>
+              <a:buClrTx/>
+              <a:buSzTx/>
+              <a:buFontTx/>
+              <a:buNone/>
+              <a:tabLst/>
+              <a:defRPr/>
+            </a:pPr>
+            <a:r>
+              <a:rPr kumimoji="0" lang="en-US" sz="1200" b="0" i="0" u="none" strike="noStrike" kern="1200" cap="none" spc="0" normalizeH="0" baseline="0" noProof="0" dirty="0">
+                <a:ln>
+                  <a:noFill/>
+                </a:ln>
+                <a:solidFill>
+                  <a:prstClr val="black">
+                    <a:tint val="75000"/>
+                  </a:prstClr>
+                </a:solidFill>
+                <a:effectLst/>
+                <a:uLnTx/>
+                <a:uFillTx/>
+                <a:latin typeface="Helvetica Neue" panose="02000503000000020004" pitchFamily="2" charset="0"/>
+                <a:ea typeface="Helvetica Neue" panose="02000503000000020004" pitchFamily="2" charset="0"/>
+                <a:cs typeface="Helvetica Neue" panose="02000503000000020004" pitchFamily="2" charset="0"/>
+              </a:rPr>
+              <a:t>architrino.com</a:t>
+            </a:r>
+          </a:p>
+        </p:txBody>
+      </p:sp>
     </p:spTree>
     <p:extLst>
       <p:ext uri="{BB962C8B-B14F-4D97-AF65-F5344CB8AC3E}">
-        <p14:creationId xmlns:p14="http://schemas.microsoft.com/office/powerpoint/2010/main" val="3883687408"/>
+        <ns3:creationId val="3883687408"/>
       </p:ext>
     </p:extLst>
   </p:cSld>
@@ -20488,7 +22360,7 @@
 </file>
 
 <file path=ppt/slides/slide7.xml><?xml version="1.0" encoding="utf-8"?>
-<p:sld xmlns:a="http://schemas.openxmlformats.org/drawingml/2006/main" xmlns:r="http://schemas.openxmlformats.org/officeDocument/2006/relationships" xmlns:p="http://schemas.openxmlformats.org/presentationml/2006/main">
+<p:sld xmlns:a="http://schemas.openxmlformats.org/drawingml/2006/main" xmlns:a16="http://schemas.microsoft.com/office/drawing/2014/main" xmlns:ns3="http://schemas.microsoft.com/office/powerpoint/2010/main" xmlns:p="http://schemas.openxmlformats.org/presentationml/2006/main">
   <p:cSld>
     <p:bg>
       <p:bgPr>
@@ -20517,7 +22389,7 @@
           <p:cNvPr id="2" name="Title 1">
             <a:extLst>
               <a:ext uri="{FF2B5EF4-FFF2-40B4-BE49-F238E27FC236}">
-                <a16:creationId xmlns:a16="http://schemas.microsoft.com/office/drawing/2014/main" id="{983D3BD9-EF0C-1E44-A158-923D0C7D4BB3}"/>
+                <a16:creationId id="{983D3BD9-EF0C-1E44-A158-923D0C7D4BB3}"/>
               </a:ext>
             </a:extLst>
           </p:cNvPr>
@@ -20550,7 +22422,7 @@
                 <a:ea typeface="Helvetica Neue" panose="02000503000000020004" pitchFamily="2" charset="0"/>
                 <a:cs typeface="Helvetica Neue" panose="02000503000000020004" pitchFamily="2" charset="0"/>
               </a:rPr>
-              <a:t>Constant Rate Point Potential Emitters</a:t>
+              <a:t>Constant Rate Architrino Emitters</a:t>
             </a:r>
           </a:p>
         </p:txBody>
@@ -20560,7 +22432,7 @@
           <p:cNvPr id="16" name="Group 15">
             <a:extLst>
               <a:ext uri="{FF2B5EF4-FFF2-40B4-BE49-F238E27FC236}">
-                <a16:creationId xmlns:a16="http://schemas.microsoft.com/office/drawing/2014/main" id="{61C70F64-6EA5-EA05-3170-97F09DF5B97A}"/>
+                <a16:creationId id="{61C70F64-6EA5-EA05-3170-97F09DF5B97A}"/>
               </a:ext>
             </a:extLst>
           </p:cNvPr>
@@ -20580,7 +22452,7 @@
             <p:cNvPr id="12" name="Group 11">
               <a:extLst>
                 <a:ext uri="{FF2B5EF4-FFF2-40B4-BE49-F238E27FC236}">
-                  <a16:creationId xmlns:a16="http://schemas.microsoft.com/office/drawing/2014/main" id="{45DB1E4A-5739-CC3A-5405-F5D36EF9F331}"/>
+                  <a16:creationId id="{45DB1E4A-5739-CC3A-5405-F5D36EF9F331}"/>
                 </a:ext>
               </a:extLst>
             </p:cNvPr>
@@ -20600,7 +22472,7 @@
               <p:cNvPr id="6" name="Oval 5">
                 <a:extLst>
                   <a:ext uri="{FF2B5EF4-FFF2-40B4-BE49-F238E27FC236}">
-                    <a16:creationId xmlns:a16="http://schemas.microsoft.com/office/drawing/2014/main" id="{38985803-DA6E-8548-BD14-7743C8492FA0}"/>
+                    <a16:creationId id="{38985803-DA6E-8548-BD14-7743C8492FA0}"/>
                   </a:ext>
                 </a:extLst>
               </p:cNvPr>
@@ -20667,7 +22539,7 @@
               <p:cNvPr id="7" name="Rectangle 6">
                 <a:extLst>
                   <a:ext uri="{FF2B5EF4-FFF2-40B4-BE49-F238E27FC236}">
-                    <a16:creationId xmlns:a16="http://schemas.microsoft.com/office/drawing/2014/main" id="{F2244FC9-B137-EB4E-A718-78190AE91366}"/>
+                    <a16:creationId id="{F2244FC9-B137-EB4E-A718-78190AE91366}"/>
                   </a:ext>
                 </a:extLst>
               </p:cNvPr>
@@ -20732,7 +22604,7 @@
             <p:cNvPr id="14" name="Minus 13">
               <a:extLst>
                 <a:ext uri="{FF2B5EF4-FFF2-40B4-BE49-F238E27FC236}">
-                  <a16:creationId xmlns:a16="http://schemas.microsoft.com/office/drawing/2014/main" id="{09ADC253-730C-264F-8155-E49642931ADA}"/>
+                  <a16:creationId id="{09ADC253-730C-264F-8155-E49642931ADA}"/>
                 </a:ext>
               </a:extLst>
             </p:cNvPr>
@@ -20797,7 +22669,7 @@
           <p:cNvPr id="17" name="Group 16">
             <a:extLst>
               <a:ext uri="{FF2B5EF4-FFF2-40B4-BE49-F238E27FC236}">
-                <a16:creationId xmlns:a16="http://schemas.microsoft.com/office/drawing/2014/main" id="{99197762-1F6C-CC2A-552D-52828CD3C5D3}"/>
+                <a16:creationId id="{99197762-1F6C-CC2A-552D-52828CD3C5D3}"/>
               </a:ext>
             </a:extLst>
           </p:cNvPr>
@@ -20817,7 +22689,7 @@
             <p:cNvPr id="15" name="Group 14">
               <a:extLst>
                 <a:ext uri="{FF2B5EF4-FFF2-40B4-BE49-F238E27FC236}">
-                  <a16:creationId xmlns:a16="http://schemas.microsoft.com/office/drawing/2014/main" id="{FCBB86F0-7603-7410-74CD-64C8990BBE88}"/>
+                  <a16:creationId id="{FCBB86F0-7603-7410-74CD-64C8990BBE88}"/>
                 </a:ext>
               </a:extLst>
             </p:cNvPr>
@@ -20837,7 +22709,7 @@
               <p:cNvPr id="5" name="Oval 4">
                 <a:extLst>
                   <a:ext uri="{FF2B5EF4-FFF2-40B4-BE49-F238E27FC236}">
-                    <a16:creationId xmlns:a16="http://schemas.microsoft.com/office/drawing/2014/main" id="{405A7150-905F-F24D-BF97-63899D0E98A3}"/>
+                    <a16:creationId id="{405A7150-905F-F24D-BF97-63899D0E98A3}"/>
                   </a:ext>
                 </a:extLst>
               </p:cNvPr>
@@ -20904,7 +22776,7 @@
               <p:cNvPr id="8" name="Rectangle 7">
                 <a:extLst>
                   <a:ext uri="{FF2B5EF4-FFF2-40B4-BE49-F238E27FC236}">
-                    <a16:creationId xmlns:a16="http://schemas.microsoft.com/office/drawing/2014/main" id="{930F45C2-0FE5-F04C-B568-5F9239FE086D}"/>
+                    <a16:creationId id="{930F45C2-0FE5-F04C-B568-5F9239FE086D}"/>
                   </a:ext>
                 </a:extLst>
               </p:cNvPr>
@@ -20969,7 +22841,7 @@
             <p:cNvPr id="13" name="Plus 12">
               <a:extLst>
                 <a:ext uri="{FF2B5EF4-FFF2-40B4-BE49-F238E27FC236}">
-                  <a16:creationId xmlns:a16="http://schemas.microsoft.com/office/drawing/2014/main" id="{A2F97F06-5AE9-B844-8A28-B02FF48414FF}"/>
+                  <a16:creationId id="{A2F97F06-5AE9-B844-8A28-B02FF48414FF}"/>
                 </a:ext>
               </a:extLst>
             </p:cNvPr>
@@ -21034,7 +22906,7 @@
           <p:cNvPr id="11" name="Group 10">
             <a:extLst>
               <a:ext uri="{FF2B5EF4-FFF2-40B4-BE49-F238E27FC236}">
-                <a16:creationId xmlns:a16="http://schemas.microsoft.com/office/drawing/2014/main" id="{330CC259-8ECA-9504-DF84-043CB2F2838C}"/>
+                <a16:creationId id="{330CC259-8ECA-9504-DF84-043CB2F2838C}"/>
               </a:ext>
             </a:extLst>
           </p:cNvPr>
@@ -21054,7 +22926,7 @@
             <p:cNvPr id="32" name="Rectangle 31">
               <a:extLst>
                 <a:ext uri="{FF2B5EF4-FFF2-40B4-BE49-F238E27FC236}">
-                  <a16:creationId xmlns:a16="http://schemas.microsoft.com/office/drawing/2014/main" id="{90B4F778-AAF3-8441-A126-EF65BDDCA5EE}"/>
+                  <a16:creationId id="{90B4F778-AAF3-8441-A126-EF65BDDCA5EE}"/>
                 </a:ext>
               </a:extLst>
             </p:cNvPr>
@@ -21190,7 +23062,7 @@
             <p:cNvPr id="24" name="Straight Arrow Connector 23">
               <a:extLst>
                 <a:ext uri="{FF2B5EF4-FFF2-40B4-BE49-F238E27FC236}">
-                  <a16:creationId xmlns:a16="http://schemas.microsoft.com/office/drawing/2014/main" id="{282275DC-2AB9-8842-B077-479BC4E05F88}"/>
+                  <a16:creationId id="{282275DC-2AB9-8842-B077-479BC4E05F88}"/>
                 </a:ext>
               </a:extLst>
             </p:cNvPr>
@@ -21237,7 +23109,7 @@
           <p:cNvPr id="25" name="Footer Placeholder 3">
             <a:extLst>
               <a:ext uri="{FF2B5EF4-FFF2-40B4-BE49-F238E27FC236}">
-                <a16:creationId xmlns:a16="http://schemas.microsoft.com/office/drawing/2014/main" id="{246E4B47-B7AD-0745-91FA-AA77D12D888D}"/>
+                <a16:creationId id="{246E4B47-B7AD-0745-91FA-AA77D12D888D}"/>
               </a:ext>
             </a:extLst>
           </p:cNvPr>
@@ -21415,7 +23287,7 @@
           <p:cNvPr id="9" name="Group 8">
             <a:extLst>
               <a:ext uri="{FF2B5EF4-FFF2-40B4-BE49-F238E27FC236}">
-                <a16:creationId xmlns:a16="http://schemas.microsoft.com/office/drawing/2014/main" id="{31017E8F-4F31-A516-F0AA-7D268180E96C}"/>
+                <a16:creationId id="{31017E8F-4F31-A516-F0AA-7D268180E96C}"/>
               </a:ext>
             </a:extLst>
           </p:cNvPr>
@@ -21435,7 +23307,7 @@
             <p:cNvPr id="20" name="Group 19">
               <a:extLst>
                 <a:ext uri="{FF2B5EF4-FFF2-40B4-BE49-F238E27FC236}">
-                  <a16:creationId xmlns:a16="http://schemas.microsoft.com/office/drawing/2014/main" id="{7B450B60-56DD-E447-B796-B112D6F74ECA}"/>
+                  <a16:creationId id="{7B450B60-56DD-E447-B796-B112D6F74ECA}"/>
                 </a:ext>
               </a:extLst>
             </p:cNvPr>
@@ -21455,7 +23327,7 @@
               <p:cNvPr id="23" name="Straight Arrow Connector 22">
                 <a:extLst>
                   <a:ext uri="{FF2B5EF4-FFF2-40B4-BE49-F238E27FC236}">
-                    <a16:creationId xmlns:a16="http://schemas.microsoft.com/office/drawing/2014/main" id="{CE1E4885-6E99-C949-A2D8-5B8C82D5957E}"/>
+                    <a16:creationId id="{CE1E4885-6E99-C949-A2D8-5B8C82D5957E}"/>
                   </a:ext>
                 </a:extLst>
               </p:cNvPr>
@@ -21501,7 +23373,7 @@
               <p:cNvPr id="28" name="Straight Arrow Connector 27">
                 <a:extLst>
                   <a:ext uri="{FF2B5EF4-FFF2-40B4-BE49-F238E27FC236}">
-                    <a16:creationId xmlns:a16="http://schemas.microsoft.com/office/drawing/2014/main" id="{371FBCDF-30F2-6749-9C7D-FE0A8D83337B}"/>
+                    <a16:creationId id="{371FBCDF-30F2-6749-9C7D-FE0A8D83337B}"/>
                   </a:ext>
                 </a:extLst>
               </p:cNvPr>
@@ -21547,7 +23419,7 @@
               <p:cNvPr id="29" name="Straight Arrow Connector 28">
                 <a:extLst>
                   <a:ext uri="{FF2B5EF4-FFF2-40B4-BE49-F238E27FC236}">
-                    <a16:creationId xmlns:a16="http://schemas.microsoft.com/office/drawing/2014/main" id="{BF5810EE-ACDB-6544-9F58-5DEBD8E72D37}"/>
+                    <a16:creationId id="{BF5810EE-ACDB-6544-9F58-5DEBD8E72D37}"/>
                   </a:ext>
                 </a:extLst>
               </p:cNvPr>
@@ -21594,7 +23466,7 @@
             <p:cNvPr id="3" name="Rectangle 2">
               <a:extLst>
                 <a:ext uri="{FF2B5EF4-FFF2-40B4-BE49-F238E27FC236}">
-                  <a16:creationId xmlns:a16="http://schemas.microsoft.com/office/drawing/2014/main" id="{B3E4CD37-BCF3-72BF-F3B3-DAC45082593B}"/>
+                  <a16:creationId id="{B3E4CD37-BCF3-72BF-F3B3-DAC45082593B}"/>
                 </a:ext>
               </a:extLst>
             </p:cNvPr>
@@ -21731,7 +23603,7 @@
           <p:cNvPr id="4" name="Table 3">
             <a:extLst>
               <a:ext uri="{FF2B5EF4-FFF2-40B4-BE49-F238E27FC236}">
-                <a16:creationId xmlns:a16="http://schemas.microsoft.com/office/drawing/2014/main" id="{7707D154-8E32-2921-5D12-B70ACEF66B1A}"/>
+                <a16:creationId id="{7707D154-8E32-2921-5D12-B70ACEF66B1A}"/>
               </a:ext>
             </a:extLst>
           </p:cNvPr>
@@ -21741,7 +23613,7 @@
           <p:nvPr>
             <p:extLst>
               <p:ext uri="{D42A27DB-BD31-4B8C-83A1-F6EECF244321}">
-                <p14:modId xmlns:p14="http://schemas.microsoft.com/office/powerpoint/2010/main" val="3248151803"/>
+                <ns3:modId val="3248151803"/>
               </p:ext>
             </p:extLst>
           </p:nvPr>
@@ -21760,21 +23632,21 @@
                 <a:gridCol w="2424684">
                   <a:extLst>
                     <a:ext uri="{9D8B030D-6E8A-4147-A177-3AD203B41FA5}">
-                      <a16:colId xmlns:a16="http://schemas.microsoft.com/office/drawing/2014/main" val="458263716"/>
+                      <a16:colId val="458263716"/>
                     </a:ext>
                   </a:extLst>
                 </a:gridCol>
                 <a:gridCol w="1861757">
                   <a:extLst>
                     <a:ext uri="{9D8B030D-6E8A-4147-A177-3AD203B41FA5}">
-                      <a16:colId xmlns:a16="http://schemas.microsoft.com/office/drawing/2014/main" val="2551242871"/>
+                      <a16:colId val="2551242871"/>
                     </a:ext>
                   </a:extLst>
                 </a:gridCol>
                 <a:gridCol w="1625600">
                   <a:extLst>
                     <a:ext uri="{9D8B030D-6E8A-4147-A177-3AD203B41FA5}">
-                      <a16:colId xmlns:a16="http://schemas.microsoft.com/office/drawing/2014/main" val="1660022195"/>
+                      <a16:colId val="1660022195"/>
                     </a:ext>
                   </a:extLst>
                 </a:gridCol>
@@ -21950,7 +23822,7 @@
                 </a:tc>
                 <a:extLst>
                   <a:ext uri="{0D108BD9-81ED-4DB2-BD59-A6C34878D82A}">
-                    <a16:rowId xmlns:a16="http://schemas.microsoft.com/office/drawing/2014/main" val="551843901"/>
+                    <a16:rowId val="551843901"/>
                   </a:ext>
                 </a:extLst>
               </a:tr>
@@ -22146,7 +24018,7 @@
                 </a:tc>
                 <a:extLst>
                   <a:ext uri="{0D108BD9-81ED-4DB2-BD59-A6C34878D82A}">
-                    <a16:rowId xmlns:a16="http://schemas.microsoft.com/office/drawing/2014/main" val="558312125"/>
+                    <a16:rowId val="558312125"/>
                   </a:ext>
                 </a:extLst>
               </a:tr>
@@ -22358,7 +24230,7 @@
                 </a:tc>
                 <a:extLst>
                   <a:ext uri="{0D108BD9-81ED-4DB2-BD59-A6C34878D82A}">
-                    <a16:rowId xmlns:a16="http://schemas.microsoft.com/office/drawing/2014/main" val="3912571088"/>
+                    <a16:rowId val="3912571088"/>
                   </a:ext>
                 </a:extLst>
               </a:tr>
@@ -22366,10 +24238,166 @@
           </a:graphicData>
         </a:graphic>
       </p:graphicFrame>
+      <p:sp>
+        <p:nvSpPr>
+          <p:cNvPr id="33" name="Footer Placeholder 3"/>
+          <p:cNvSpPr txBox="1">
+            <a:spLocks/>
+          </p:cNvSpPr>
+          <p:nvPr/>
+        </p:nvSpPr>
+        <p:spPr>
+          <a:xfrm>
+            <a:off x="10942204" y="6481737"/>
+            <a:ext cx="1217443" cy="365125"/>
+          </a:xfrm>
+          <a:prstGeom prst="rect">
+            <a:avLst/>
+          </a:prstGeom>
+        </p:spPr>
+        <p:txBody>
+          <a:bodyPr vert="horz" lIns="91440" tIns="45720" rIns="91440" bIns="45720" rtlCol="0" anchor="ctr"/>
+          <a:lstStyle>
+            <a:defPPr>
+              <a:defRPr lang="en-US"/>
+            </a:defPPr>
+            <a:lvl1pPr marL="0" algn="ctr" defTabSz="914400" rtl="0" eaLnBrk="1" latinLnBrk="0" hangingPunct="1">
+              <a:defRPr sz="1200" kern="1200">
+                <a:solidFill>
+                  <a:schemeClr val="tx1">
+                    <a:tint val="75000"/>
+                  </a:schemeClr>
+                </a:solidFill>
+                <a:latin typeface="+mn-lt"/>
+                <a:ea typeface="+mn-ea"/>
+                <a:cs typeface="+mn-cs"/>
+              </a:defRPr>
+            </a:lvl1pPr>
+            <a:lvl2pPr marL="457200" algn="l" defTabSz="914400" rtl="0" eaLnBrk="1" latinLnBrk="0" hangingPunct="1">
+              <a:defRPr sz="1800" kern="1200">
+                <a:solidFill>
+                  <a:schemeClr val="tx1"/>
+                </a:solidFill>
+                <a:latin typeface="+mn-lt"/>
+                <a:ea typeface="+mn-ea"/>
+                <a:cs typeface="+mn-cs"/>
+              </a:defRPr>
+            </a:lvl2pPr>
+            <a:lvl3pPr marL="914400" algn="l" defTabSz="914400" rtl="0" eaLnBrk="1" latinLnBrk="0" hangingPunct="1">
+              <a:defRPr sz="1800" kern="1200">
+                <a:solidFill>
+                  <a:schemeClr val="tx1"/>
+                </a:solidFill>
+                <a:latin typeface="+mn-lt"/>
+                <a:ea typeface="+mn-ea"/>
+                <a:cs typeface="+mn-cs"/>
+              </a:defRPr>
+            </a:lvl3pPr>
+            <a:lvl4pPr marL="1371600" algn="l" defTabSz="914400" rtl="0" eaLnBrk="1" latinLnBrk="0" hangingPunct="1">
+              <a:defRPr sz="1800" kern="1200">
+                <a:solidFill>
+                  <a:schemeClr val="tx1"/>
+                </a:solidFill>
+                <a:latin typeface="+mn-lt"/>
+                <a:ea typeface="+mn-ea"/>
+                <a:cs typeface="+mn-cs"/>
+              </a:defRPr>
+            </a:lvl4pPr>
+            <a:lvl5pPr marL="1828800" algn="l" defTabSz="914400" rtl="0" eaLnBrk="1" latinLnBrk="0" hangingPunct="1">
+              <a:defRPr sz="1800" kern="1200">
+                <a:solidFill>
+                  <a:schemeClr val="tx1"/>
+                </a:solidFill>
+                <a:latin typeface="+mn-lt"/>
+                <a:ea typeface="+mn-ea"/>
+                <a:cs typeface="+mn-cs"/>
+              </a:defRPr>
+            </a:lvl5pPr>
+            <a:lvl6pPr marL="2286000" algn="l" defTabSz="914400" rtl="0" eaLnBrk="1" latinLnBrk="0" hangingPunct="1">
+              <a:defRPr sz="1800" kern="1200">
+                <a:solidFill>
+                  <a:schemeClr val="tx1"/>
+                </a:solidFill>
+                <a:latin typeface="+mn-lt"/>
+                <a:ea typeface="+mn-ea"/>
+                <a:cs typeface="+mn-cs"/>
+              </a:defRPr>
+            </a:lvl6pPr>
+            <a:lvl7pPr marL="2743200" algn="l" defTabSz="914400" rtl="0" eaLnBrk="1" latinLnBrk="0" hangingPunct="1">
+              <a:defRPr sz="1800" kern="1200">
+                <a:solidFill>
+                  <a:schemeClr val="tx1"/>
+                </a:solidFill>
+                <a:latin typeface="+mn-lt"/>
+                <a:ea typeface="+mn-ea"/>
+                <a:cs typeface="+mn-cs"/>
+              </a:defRPr>
+            </a:lvl7pPr>
+            <a:lvl8pPr marL="3200400" algn="l" defTabSz="914400" rtl="0" eaLnBrk="1" latinLnBrk="0" hangingPunct="1">
+              <a:defRPr sz="1800" kern="1200">
+                <a:solidFill>
+                  <a:schemeClr val="tx1"/>
+                </a:solidFill>
+                <a:latin typeface="+mn-lt"/>
+                <a:ea typeface="+mn-ea"/>
+                <a:cs typeface="+mn-cs"/>
+              </a:defRPr>
+            </a:lvl8pPr>
+            <a:lvl9pPr marL="3657600" algn="l" defTabSz="914400" rtl="0" eaLnBrk="1" latinLnBrk="0" hangingPunct="1">
+              <a:defRPr sz="1800" kern="1200">
+                <a:solidFill>
+                  <a:schemeClr val="tx1"/>
+                </a:solidFill>
+                <a:latin typeface="+mn-lt"/>
+                <a:ea typeface="+mn-ea"/>
+                <a:cs typeface="+mn-cs"/>
+              </a:defRPr>
+            </a:lvl9pPr>
+          </a:lstStyle>
+          <a:p>
+            <a:pPr marL="0" marR="0" lvl="0" indent="0" algn="ctr" defTabSz="914400" rtl="0" eaLnBrk="1" fontAlgn="auto" latinLnBrk="0" hangingPunct="1">
+              <a:lnSpc>
+                <a:spcPct val="100000"/>
+              </a:lnSpc>
+              <a:spcBef>
+                <a:spcPts val="0"/>
+              </a:spcBef>
+              <a:spcAft>
+                <a:spcPts val="0"/>
+              </a:spcAft>
+              <a:buClrTx/>
+              <a:buSzTx/>
+              <a:buFontTx/>
+              <a:buNone/>
+              <a:tabLst/>
+              <a:defRPr/>
+            </a:pPr>
+            <a:r>
+              <a:rPr kumimoji="0" lang="en-US" sz="1200" b="0" i="0" u="none" strike="noStrike" kern="1200" cap="none" spc="0" normalizeH="0" baseline="0" noProof="0" dirty="0">
+                <a:ln>
+                  <a:noFill/>
+                </a:ln>
+                <a:solidFill>
+                  <a:prstClr val="black">
+                    <a:tint val="75000"/>
+                  </a:prstClr>
+                </a:solidFill>
+                <a:effectLst/>
+                <a:uLnTx/>
+                <a:uFillTx/>
+                <a:latin typeface="Helvetica Neue" panose="02000503000000020004" pitchFamily="2" charset="0"/>
+                <a:ea typeface="Helvetica Neue" panose="02000503000000020004" pitchFamily="2" charset="0"/>
+                <a:cs typeface="Helvetica Neue" panose="02000503000000020004" pitchFamily="2" charset="0"/>
+              </a:rPr>
+              <a:t>architrino.com</a:t>
+            </a:r>
+          </a:p>
+        </p:txBody>
+      </p:sp>
     </p:spTree>
     <p:extLst>
       <p:ext uri="{BB962C8B-B14F-4D97-AF65-F5344CB8AC3E}">
-        <p14:creationId xmlns:p14="http://schemas.microsoft.com/office/powerpoint/2010/main" val="1590353211"/>
+        <ns3:creationId val="1590353211"/>
       </p:ext>
     </p:extLst>
   </p:cSld>
@@ -22380,7 +24408,7 @@
 </file>
 
 <file path=ppt/slides/slide8.xml><?xml version="1.0" encoding="utf-8"?>
-<p:sld xmlns:a="http://schemas.openxmlformats.org/drawingml/2006/main" xmlns:r="http://schemas.openxmlformats.org/officeDocument/2006/relationships" xmlns:p="http://schemas.openxmlformats.org/presentationml/2006/main">
+<p:sld xmlns:a="http://schemas.openxmlformats.org/drawingml/2006/main" xmlns:a16="http://schemas.microsoft.com/office/drawing/2014/main" xmlns:ns3="http://schemas.microsoft.com/office/powerpoint/2010/main" xmlns:p="http://schemas.openxmlformats.org/presentationml/2006/main">
   <p:cSld>
     <p:bg>
       <p:bgPr>
@@ -22409,7 +24437,7 @@
           <p:cNvPr id="2" name="Title 1">
             <a:extLst>
               <a:ext uri="{FF2B5EF4-FFF2-40B4-BE49-F238E27FC236}">
-                <a16:creationId xmlns:a16="http://schemas.microsoft.com/office/drawing/2014/main" id="{983D3BD9-EF0C-1E44-A158-923D0C7D4BB3}"/>
+                <a16:creationId id="{983D3BD9-EF0C-1E44-A158-923D0C7D4BB3}"/>
               </a:ext>
             </a:extLst>
           </p:cNvPr>
@@ -22442,7 +24470,7 @@
                 <a:ea typeface="Helvetica Neue" panose="02000503000000020004" pitchFamily="2" charset="0"/>
                 <a:cs typeface="Helvetica Neue" panose="02000503000000020004" pitchFamily="2" charset="0"/>
               </a:rPr>
-              <a:t>Point Potential Have No Speed Limit</a:t>
+              <a:t>Architrino Have No Speed Limit</a:t>
             </a:r>
           </a:p>
         </p:txBody>
@@ -22452,7 +24480,7 @@
           <p:cNvPr id="16" name="Group 15">
             <a:extLst>
               <a:ext uri="{FF2B5EF4-FFF2-40B4-BE49-F238E27FC236}">
-                <a16:creationId xmlns:a16="http://schemas.microsoft.com/office/drawing/2014/main" id="{61C70F64-6EA5-EA05-3170-97F09DF5B97A}"/>
+                <a16:creationId id="{61C70F64-6EA5-EA05-3170-97F09DF5B97A}"/>
               </a:ext>
             </a:extLst>
           </p:cNvPr>
@@ -22472,7 +24500,7 @@
             <p:cNvPr id="12" name="Group 11">
               <a:extLst>
                 <a:ext uri="{FF2B5EF4-FFF2-40B4-BE49-F238E27FC236}">
-                  <a16:creationId xmlns:a16="http://schemas.microsoft.com/office/drawing/2014/main" id="{45DB1E4A-5739-CC3A-5405-F5D36EF9F331}"/>
+                  <a16:creationId id="{45DB1E4A-5739-CC3A-5405-F5D36EF9F331}"/>
                 </a:ext>
               </a:extLst>
             </p:cNvPr>
@@ -22492,7 +24520,7 @@
               <p:cNvPr id="6" name="Oval 5">
                 <a:extLst>
                   <a:ext uri="{FF2B5EF4-FFF2-40B4-BE49-F238E27FC236}">
-                    <a16:creationId xmlns:a16="http://schemas.microsoft.com/office/drawing/2014/main" id="{38985803-DA6E-8548-BD14-7743C8492FA0}"/>
+                    <a16:creationId id="{38985803-DA6E-8548-BD14-7743C8492FA0}"/>
                   </a:ext>
                 </a:extLst>
               </p:cNvPr>
@@ -22559,7 +24587,7 @@
               <p:cNvPr id="7" name="Rectangle 6">
                 <a:extLst>
                   <a:ext uri="{FF2B5EF4-FFF2-40B4-BE49-F238E27FC236}">
-                    <a16:creationId xmlns:a16="http://schemas.microsoft.com/office/drawing/2014/main" id="{F2244FC9-B137-EB4E-A718-78190AE91366}"/>
+                    <a16:creationId id="{F2244FC9-B137-EB4E-A718-78190AE91366}"/>
                   </a:ext>
                 </a:extLst>
               </p:cNvPr>
@@ -22624,7 +24652,7 @@
             <p:cNvPr id="14" name="Minus 13">
               <a:extLst>
                 <a:ext uri="{FF2B5EF4-FFF2-40B4-BE49-F238E27FC236}">
-                  <a16:creationId xmlns:a16="http://schemas.microsoft.com/office/drawing/2014/main" id="{09ADC253-730C-264F-8155-E49642931ADA}"/>
+                  <a16:creationId id="{09ADC253-730C-264F-8155-E49642931ADA}"/>
                 </a:ext>
               </a:extLst>
             </p:cNvPr>
@@ -22689,7 +24717,7 @@
           <p:cNvPr id="17" name="Group 16">
             <a:extLst>
               <a:ext uri="{FF2B5EF4-FFF2-40B4-BE49-F238E27FC236}">
-                <a16:creationId xmlns:a16="http://schemas.microsoft.com/office/drawing/2014/main" id="{99197762-1F6C-CC2A-552D-52828CD3C5D3}"/>
+                <a16:creationId id="{99197762-1F6C-CC2A-552D-52828CD3C5D3}"/>
               </a:ext>
             </a:extLst>
           </p:cNvPr>
@@ -22709,7 +24737,7 @@
             <p:cNvPr id="15" name="Group 14">
               <a:extLst>
                 <a:ext uri="{FF2B5EF4-FFF2-40B4-BE49-F238E27FC236}">
-                  <a16:creationId xmlns:a16="http://schemas.microsoft.com/office/drawing/2014/main" id="{FCBB86F0-7603-7410-74CD-64C8990BBE88}"/>
+                  <a16:creationId id="{FCBB86F0-7603-7410-74CD-64C8990BBE88}"/>
                 </a:ext>
               </a:extLst>
             </p:cNvPr>
@@ -22729,7 +24757,7 @@
               <p:cNvPr id="5" name="Oval 4">
                 <a:extLst>
                   <a:ext uri="{FF2B5EF4-FFF2-40B4-BE49-F238E27FC236}">
-                    <a16:creationId xmlns:a16="http://schemas.microsoft.com/office/drawing/2014/main" id="{405A7150-905F-F24D-BF97-63899D0E98A3}"/>
+                    <a16:creationId id="{405A7150-905F-F24D-BF97-63899D0E98A3}"/>
                   </a:ext>
                 </a:extLst>
               </p:cNvPr>
@@ -22796,7 +24824,7 @@
               <p:cNvPr id="8" name="Rectangle 7">
                 <a:extLst>
                   <a:ext uri="{FF2B5EF4-FFF2-40B4-BE49-F238E27FC236}">
-                    <a16:creationId xmlns:a16="http://schemas.microsoft.com/office/drawing/2014/main" id="{930F45C2-0FE5-F04C-B568-5F9239FE086D}"/>
+                    <a16:creationId id="{930F45C2-0FE5-F04C-B568-5F9239FE086D}"/>
                   </a:ext>
                 </a:extLst>
               </p:cNvPr>
@@ -22861,7 +24889,7 @@
             <p:cNvPr id="13" name="Plus 12">
               <a:extLst>
                 <a:ext uri="{FF2B5EF4-FFF2-40B4-BE49-F238E27FC236}">
-                  <a16:creationId xmlns:a16="http://schemas.microsoft.com/office/drawing/2014/main" id="{A2F97F06-5AE9-B844-8A28-B02FF48414FF}"/>
+                  <a16:creationId id="{A2F97F06-5AE9-B844-8A28-B02FF48414FF}"/>
                 </a:ext>
               </a:extLst>
             </p:cNvPr>
@@ -22926,7 +24954,7 @@
           <p:cNvPr id="33" name="Rectangle 32">
             <a:extLst>
               <a:ext uri="{FF2B5EF4-FFF2-40B4-BE49-F238E27FC236}">
-                <a16:creationId xmlns:a16="http://schemas.microsoft.com/office/drawing/2014/main" id="{6FB04752-7BBD-3648-BE22-8D983884B555}"/>
+                <a16:creationId id="{6FB04752-7BBD-3648-BE22-8D983884B555}"/>
               </a:ext>
             </a:extLst>
           </p:cNvPr>
@@ -23032,7 +25060,7 @@
           <p:cNvPr id="11" name="Group 10">
             <a:extLst>
               <a:ext uri="{FF2B5EF4-FFF2-40B4-BE49-F238E27FC236}">
-                <a16:creationId xmlns:a16="http://schemas.microsoft.com/office/drawing/2014/main" id="{330CC259-8ECA-9504-DF84-043CB2F2838C}"/>
+                <a16:creationId id="{330CC259-8ECA-9504-DF84-043CB2F2838C}"/>
               </a:ext>
             </a:extLst>
           </p:cNvPr>
@@ -23052,7 +25080,7 @@
             <p:cNvPr id="32" name="Rectangle 31">
               <a:extLst>
                 <a:ext uri="{FF2B5EF4-FFF2-40B4-BE49-F238E27FC236}">
-                  <a16:creationId xmlns:a16="http://schemas.microsoft.com/office/drawing/2014/main" id="{90B4F778-AAF3-8441-A126-EF65BDDCA5EE}"/>
+                  <a16:creationId id="{90B4F778-AAF3-8441-A126-EF65BDDCA5EE}"/>
                 </a:ext>
               </a:extLst>
             </p:cNvPr>
@@ -23188,7 +25216,7 @@
             <p:cNvPr id="24" name="Straight Arrow Connector 23">
               <a:extLst>
                 <a:ext uri="{FF2B5EF4-FFF2-40B4-BE49-F238E27FC236}">
-                  <a16:creationId xmlns:a16="http://schemas.microsoft.com/office/drawing/2014/main" id="{282275DC-2AB9-8842-B077-479BC4E05F88}"/>
+                  <a16:creationId id="{282275DC-2AB9-8842-B077-479BC4E05F88}"/>
                 </a:ext>
               </a:extLst>
             </p:cNvPr>
@@ -23235,7 +25263,7 @@
           <p:cNvPr id="25" name="Footer Placeholder 3">
             <a:extLst>
               <a:ext uri="{FF2B5EF4-FFF2-40B4-BE49-F238E27FC236}">
-                <a16:creationId xmlns:a16="http://schemas.microsoft.com/office/drawing/2014/main" id="{246E4B47-B7AD-0745-91FA-AA77D12D888D}"/>
+                <a16:creationId id="{246E4B47-B7AD-0745-91FA-AA77D12D888D}"/>
               </a:ext>
             </a:extLst>
           </p:cNvPr>
@@ -23413,7 +25441,7 @@
           <p:cNvPr id="9" name="Group 8">
             <a:extLst>
               <a:ext uri="{FF2B5EF4-FFF2-40B4-BE49-F238E27FC236}">
-                <a16:creationId xmlns:a16="http://schemas.microsoft.com/office/drawing/2014/main" id="{31017E8F-4F31-A516-F0AA-7D268180E96C}"/>
+                <a16:creationId id="{31017E8F-4F31-A516-F0AA-7D268180E96C}"/>
               </a:ext>
             </a:extLst>
           </p:cNvPr>
@@ -23433,7 +25461,7 @@
             <p:cNvPr id="20" name="Group 19">
               <a:extLst>
                 <a:ext uri="{FF2B5EF4-FFF2-40B4-BE49-F238E27FC236}">
-                  <a16:creationId xmlns:a16="http://schemas.microsoft.com/office/drawing/2014/main" id="{7B450B60-56DD-E447-B796-B112D6F74ECA}"/>
+                  <a16:creationId id="{7B450B60-56DD-E447-B796-B112D6F74ECA}"/>
                 </a:ext>
               </a:extLst>
             </p:cNvPr>
@@ -23453,7 +25481,7 @@
               <p:cNvPr id="23" name="Straight Arrow Connector 22">
                 <a:extLst>
                   <a:ext uri="{FF2B5EF4-FFF2-40B4-BE49-F238E27FC236}">
-                    <a16:creationId xmlns:a16="http://schemas.microsoft.com/office/drawing/2014/main" id="{CE1E4885-6E99-C949-A2D8-5B8C82D5957E}"/>
+                    <a16:creationId id="{CE1E4885-6E99-C949-A2D8-5B8C82D5957E}"/>
                   </a:ext>
                 </a:extLst>
               </p:cNvPr>
@@ -23499,7 +25527,7 @@
               <p:cNvPr id="28" name="Straight Arrow Connector 27">
                 <a:extLst>
                   <a:ext uri="{FF2B5EF4-FFF2-40B4-BE49-F238E27FC236}">
-                    <a16:creationId xmlns:a16="http://schemas.microsoft.com/office/drawing/2014/main" id="{371FBCDF-30F2-6749-9C7D-FE0A8D83337B}"/>
+                    <a16:creationId id="{371FBCDF-30F2-6749-9C7D-FE0A8D83337B}"/>
                   </a:ext>
                 </a:extLst>
               </p:cNvPr>
@@ -23545,7 +25573,7 @@
               <p:cNvPr id="29" name="Straight Arrow Connector 28">
                 <a:extLst>
                   <a:ext uri="{FF2B5EF4-FFF2-40B4-BE49-F238E27FC236}">
-                    <a16:creationId xmlns:a16="http://schemas.microsoft.com/office/drawing/2014/main" id="{BF5810EE-ACDB-6544-9F58-5DEBD8E72D37}"/>
+                    <a16:creationId id="{BF5810EE-ACDB-6544-9F58-5DEBD8E72D37}"/>
                   </a:ext>
                 </a:extLst>
               </p:cNvPr>
@@ -23592,7 +25620,7 @@
             <p:cNvPr id="3" name="Rectangle 2">
               <a:extLst>
                 <a:ext uri="{FF2B5EF4-FFF2-40B4-BE49-F238E27FC236}">
-                  <a16:creationId xmlns:a16="http://schemas.microsoft.com/office/drawing/2014/main" id="{B3E4CD37-BCF3-72BF-F3B3-DAC45082593B}"/>
+                  <a16:creationId id="{B3E4CD37-BCF3-72BF-F3B3-DAC45082593B}"/>
                 </a:ext>
               </a:extLst>
             </p:cNvPr>
@@ -23724,10 +25752,166 @@
           </p:txBody>
         </p:sp>
       </p:grpSp>
+      <p:sp>
+        <p:nvSpPr>
+          <p:cNvPr id="34" name="Footer Placeholder 3"/>
+          <p:cNvSpPr txBox="1">
+            <a:spLocks/>
+          </p:cNvSpPr>
+          <p:nvPr/>
+        </p:nvSpPr>
+        <p:spPr>
+          <a:xfrm>
+            <a:off x="10942204" y="6481737"/>
+            <a:ext cx="1217443" cy="365125"/>
+          </a:xfrm>
+          <a:prstGeom prst="rect">
+            <a:avLst/>
+          </a:prstGeom>
+        </p:spPr>
+        <p:txBody>
+          <a:bodyPr vert="horz" lIns="91440" tIns="45720" rIns="91440" bIns="45720" rtlCol="0" anchor="ctr"/>
+          <a:lstStyle>
+            <a:defPPr>
+              <a:defRPr lang="en-US"/>
+            </a:defPPr>
+            <a:lvl1pPr marL="0" algn="ctr" defTabSz="914400" rtl="0" eaLnBrk="1" latinLnBrk="0" hangingPunct="1">
+              <a:defRPr sz="1200" kern="1200">
+                <a:solidFill>
+                  <a:schemeClr val="tx1">
+                    <a:tint val="75000"/>
+                  </a:schemeClr>
+                </a:solidFill>
+                <a:latin typeface="+mn-lt"/>
+                <a:ea typeface="+mn-ea"/>
+                <a:cs typeface="+mn-cs"/>
+              </a:defRPr>
+            </a:lvl1pPr>
+            <a:lvl2pPr marL="457200" algn="l" defTabSz="914400" rtl="0" eaLnBrk="1" latinLnBrk="0" hangingPunct="1">
+              <a:defRPr sz="1800" kern="1200">
+                <a:solidFill>
+                  <a:schemeClr val="tx1"/>
+                </a:solidFill>
+                <a:latin typeface="+mn-lt"/>
+                <a:ea typeface="+mn-ea"/>
+                <a:cs typeface="+mn-cs"/>
+              </a:defRPr>
+            </a:lvl2pPr>
+            <a:lvl3pPr marL="914400" algn="l" defTabSz="914400" rtl="0" eaLnBrk="1" latinLnBrk="0" hangingPunct="1">
+              <a:defRPr sz="1800" kern="1200">
+                <a:solidFill>
+                  <a:schemeClr val="tx1"/>
+                </a:solidFill>
+                <a:latin typeface="+mn-lt"/>
+                <a:ea typeface="+mn-ea"/>
+                <a:cs typeface="+mn-cs"/>
+              </a:defRPr>
+            </a:lvl3pPr>
+            <a:lvl4pPr marL="1371600" algn="l" defTabSz="914400" rtl="0" eaLnBrk="1" latinLnBrk="0" hangingPunct="1">
+              <a:defRPr sz="1800" kern="1200">
+                <a:solidFill>
+                  <a:schemeClr val="tx1"/>
+                </a:solidFill>
+                <a:latin typeface="+mn-lt"/>
+                <a:ea typeface="+mn-ea"/>
+                <a:cs typeface="+mn-cs"/>
+              </a:defRPr>
+            </a:lvl4pPr>
+            <a:lvl5pPr marL="1828800" algn="l" defTabSz="914400" rtl="0" eaLnBrk="1" latinLnBrk="0" hangingPunct="1">
+              <a:defRPr sz="1800" kern="1200">
+                <a:solidFill>
+                  <a:schemeClr val="tx1"/>
+                </a:solidFill>
+                <a:latin typeface="+mn-lt"/>
+                <a:ea typeface="+mn-ea"/>
+                <a:cs typeface="+mn-cs"/>
+              </a:defRPr>
+            </a:lvl5pPr>
+            <a:lvl6pPr marL="2286000" algn="l" defTabSz="914400" rtl="0" eaLnBrk="1" latinLnBrk="0" hangingPunct="1">
+              <a:defRPr sz="1800" kern="1200">
+                <a:solidFill>
+                  <a:schemeClr val="tx1"/>
+                </a:solidFill>
+                <a:latin typeface="+mn-lt"/>
+                <a:ea typeface="+mn-ea"/>
+                <a:cs typeface="+mn-cs"/>
+              </a:defRPr>
+            </a:lvl6pPr>
+            <a:lvl7pPr marL="2743200" algn="l" defTabSz="914400" rtl="0" eaLnBrk="1" latinLnBrk="0" hangingPunct="1">
+              <a:defRPr sz="1800" kern="1200">
+                <a:solidFill>
+                  <a:schemeClr val="tx1"/>
+                </a:solidFill>
+                <a:latin typeface="+mn-lt"/>
+                <a:ea typeface="+mn-ea"/>
+                <a:cs typeface="+mn-cs"/>
+              </a:defRPr>
+            </a:lvl7pPr>
+            <a:lvl8pPr marL="3200400" algn="l" defTabSz="914400" rtl="0" eaLnBrk="1" latinLnBrk="0" hangingPunct="1">
+              <a:defRPr sz="1800" kern="1200">
+                <a:solidFill>
+                  <a:schemeClr val="tx1"/>
+                </a:solidFill>
+                <a:latin typeface="+mn-lt"/>
+                <a:ea typeface="+mn-ea"/>
+                <a:cs typeface="+mn-cs"/>
+              </a:defRPr>
+            </a:lvl8pPr>
+            <a:lvl9pPr marL="3657600" algn="l" defTabSz="914400" rtl="0" eaLnBrk="1" latinLnBrk="0" hangingPunct="1">
+              <a:defRPr sz="1800" kern="1200">
+                <a:solidFill>
+                  <a:schemeClr val="tx1"/>
+                </a:solidFill>
+                <a:latin typeface="+mn-lt"/>
+                <a:ea typeface="+mn-ea"/>
+                <a:cs typeface="+mn-cs"/>
+              </a:defRPr>
+            </a:lvl9pPr>
+          </a:lstStyle>
+          <a:p>
+            <a:pPr marL="0" marR="0" lvl="0" indent="0" algn="ctr" defTabSz="914400" rtl="0" eaLnBrk="1" fontAlgn="auto" latinLnBrk="0" hangingPunct="1">
+              <a:lnSpc>
+                <a:spcPct val="100000"/>
+              </a:lnSpc>
+              <a:spcBef>
+                <a:spcPts val="0"/>
+              </a:spcBef>
+              <a:spcAft>
+                <a:spcPts val="0"/>
+              </a:spcAft>
+              <a:buClrTx/>
+              <a:buSzTx/>
+              <a:buFontTx/>
+              <a:buNone/>
+              <a:tabLst/>
+              <a:defRPr/>
+            </a:pPr>
+            <a:r>
+              <a:rPr kumimoji="0" lang="en-US" sz="1200" b="0" i="0" u="none" strike="noStrike" kern="1200" cap="none" spc="0" normalizeH="0" baseline="0" noProof="0" dirty="0">
+                <a:ln>
+                  <a:noFill/>
+                </a:ln>
+                <a:solidFill>
+                  <a:prstClr val="black">
+                    <a:tint val="75000"/>
+                  </a:prstClr>
+                </a:solidFill>
+                <a:effectLst/>
+                <a:uLnTx/>
+                <a:uFillTx/>
+                <a:latin typeface="Helvetica Neue" panose="02000503000000020004" pitchFamily="2" charset="0"/>
+                <a:ea typeface="Helvetica Neue" panose="02000503000000020004" pitchFamily="2" charset="0"/>
+                <a:cs typeface="Helvetica Neue" panose="02000503000000020004" pitchFamily="2" charset="0"/>
+              </a:rPr>
+              <a:t>architrino.com</a:t>
+            </a:r>
+          </a:p>
+        </p:txBody>
+      </p:sp>
     </p:spTree>
     <p:extLst>
       <p:ext uri="{BB962C8B-B14F-4D97-AF65-F5344CB8AC3E}">
-        <p14:creationId xmlns:p14="http://schemas.microsoft.com/office/powerpoint/2010/main" val="498197456"/>
+        <ns3:creationId val="498197456"/>
       </p:ext>
     </p:extLst>
   </p:cSld>
@@ -23738,7 +25922,7 @@
 </file>
 
 <file path=ppt/slides/slide9.xml><?xml version="1.0" encoding="utf-8"?>
-<p:sld xmlns:a="http://schemas.openxmlformats.org/drawingml/2006/main" xmlns:r="http://schemas.openxmlformats.org/officeDocument/2006/relationships" xmlns:p="http://schemas.openxmlformats.org/presentationml/2006/main">
+<p:sld xmlns:a="http://schemas.openxmlformats.org/drawingml/2006/main" xmlns:a16="http://schemas.microsoft.com/office/drawing/2014/main" xmlns:ns3="http://schemas.microsoft.com/office/powerpoint/2010/main" xmlns:p="http://schemas.openxmlformats.org/presentationml/2006/main">
   <p:cSld>
     <p:bg>
       <p:bgPr>
@@ -23753,7 +25937,7 @@
         <p:cNvPr id="1" name="">
           <a:extLst>
             <a:ext uri="{FF2B5EF4-FFF2-40B4-BE49-F238E27FC236}">
-              <a16:creationId xmlns:a16="http://schemas.microsoft.com/office/drawing/2014/main" id="{6523CFA3-354C-6364-10BC-40DB888FCA07}"/>
+              <a16:creationId id="{6523CFA3-354C-6364-10BC-40DB888FCA07}"/>
             </a:ext>
           </a:extLst>
         </p:cNvPr>
@@ -23773,7 +25957,7 @@
           <p:cNvPr id="5" name="Footer Placeholder 3">
             <a:extLst>
               <a:ext uri="{FF2B5EF4-FFF2-40B4-BE49-F238E27FC236}">
-                <a16:creationId xmlns:a16="http://schemas.microsoft.com/office/drawing/2014/main" id="{3F45CE82-C844-2CCA-4C12-B7D645D177D4}"/>
+                <a16:creationId id="{3F45CE82-C844-2CCA-4C12-B7D645D177D4}"/>
               </a:ext>
             </a:extLst>
           </p:cNvPr>
@@ -23935,7 +26119,7 @@
           <p:cNvPr id="2" name="TextBox 1">
             <a:extLst>
               <a:ext uri="{FF2B5EF4-FFF2-40B4-BE49-F238E27FC236}">
-                <a16:creationId xmlns:a16="http://schemas.microsoft.com/office/drawing/2014/main" id="{ECC31941-494B-CB33-F627-6BE70A2153F3}"/>
+                <a16:creationId id="{ECC31941-494B-CB33-F627-6BE70A2153F3}"/>
               </a:ext>
             </a:extLst>
           </p:cNvPr>
@@ -23980,7 +26164,7 @@
                 <a:effectLst/>
                 <a:latin typeface="HelveticaNeue-UltraLightItalic" panose="02000503000000020004" pitchFamily="2" charset="0"/>
               </a:rPr>
-              <a:t>show intersection of a potential sphere results in action</a:t>
+              <a:t>show intersection of a causal wake results in action</a:t>
             </a:r>
           </a:p>
           <a:p>
@@ -23993,7 +26177,7 @@
                 <a:effectLst/>
                 <a:latin typeface="HelveticaNeue-UltraLightItalic" panose="02000503000000020004" pitchFamily="2" charset="0"/>
               </a:rPr>
-              <a:t>show how the receiving point potential has infinite solutions along the line defined by emission and reception</a:t>
+              <a:t>show how the receiving architrino has infinite solutions along the line defined by emission and reception</a:t>
             </a:r>
           </a:p>
           <a:p>
@@ -24149,7 +26333,7 @@
           <p:cNvPr id="8" name="TextBox 7">
             <a:extLst>
               <a:ext uri="{FF2B5EF4-FFF2-40B4-BE49-F238E27FC236}">
-                <a16:creationId xmlns:a16="http://schemas.microsoft.com/office/drawing/2014/main" id="{9C9E08D3-A836-13F3-ABBA-84160A212EDC}"/>
+                <a16:creationId id="{9C9E08D3-A836-13F3-ABBA-84160A212EDC}"/>
               </a:ext>
             </a:extLst>
           </p:cNvPr>
@@ -24209,10 +26393,166 @@
           </a:p>
         </p:txBody>
       </p:sp>
+      <p:sp>
+        <p:nvSpPr>
+          <p:cNvPr id="3" name="Footer Placeholder 3"/>
+          <p:cNvSpPr txBox="1">
+            <a:spLocks/>
+          </p:cNvSpPr>
+          <p:nvPr/>
+        </p:nvSpPr>
+        <p:spPr>
+          <a:xfrm>
+            <a:off x="10942204" y="6481737"/>
+            <a:ext cx="1217443" cy="365125"/>
+          </a:xfrm>
+          <a:prstGeom prst="rect">
+            <a:avLst/>
+          </a:prstGeom>
+        </p:spPr>
+        <p:txBody>
+          <a:bodyPr vert="horz" lIns="91440" tIns="45720" rIns="91440" bIns="45720" rtlCol="0" anchor="ctr"/>
+          <a:lstStyle>
+            <a:defPPr>
+              <a:defRPr lang="en-US"/>
+            </a:defPPr>
+            <a:lvl1pPr marL="0" algn="ctr" defTabSz="914400" rtl="0" eaLnBrk="1" latinLnBrk="0" hangingPunct="1">
+              <a:defRPr sz="1200" kern="1200">
+                <a:solidFill>
+                  <a:schemeClr val="tx1">
+                    <a:tint val="75000"/>
+                  </a:schemeClr>
+                </a:solidFill>
+                <a:latin typeface="+mn-lt"/>
+                <a:ea typeface="+mn-ea"/>
+                <a:cs typeface="+mn-cs"/>
+              </a:defRPr>
+            </a:lvl1pPr>
+            <a:lvl2pPr marL="457200" algn="l" defTabSz="914400" rtl="0" eaLnBrk="1" latinLnBrk="0" hangingPunct="1">
+              <a:defRPr sz="1800" kern="1200">
+                <a:solidFill>
+                  <a:schemeClr val="tx1"/>
+                </a:solidFill>
+                <a:latin typeface="+mn-lt"/>
+                <a:ea typeface="+mn-ea"/>
+                <a:cs typeface="+mn-cs"/>
+              </a:defRPr>
+            </a:lvl2pPr>
+            <a:lvl3pPr marL="914400" algn="l" defTabSz="914400" rtl="0" eaLnBrk="1" latinLnBrk="0" hangingPunct="1">
+              <a:defRPr sz="1800" kern="1200">
+                <a:solidFill>
+                  <a:schemeClr val="tx1"/>
+                </a:solidFill>
+                <a:latin typeface="+mn-lt"/>
+                <a:ea typeface="+mn-ea"/>
+                <a:cs typeface="+mn-cs"/>
+              </a:defRPr>
+            </a:lvl3pPr>
+            <a:lvl4pPr marL="1371600" algn="l" defTabSz="914400" rtl="0" eaLnBrk="1" latinLnBrk="0" hangingPunct="1">
+              <a:defRPr sz="1800" kern="1200">
+                <a:solidFill>
+                  <a:schemeClr val="tx1"/>
+                </a:solidFill>
+                <a:latin typeface="+mn-lt"/>
+                <a:ea typeface="+mn-ea"/>
+                <a:cs typeface="+mn-cs"/>
+              </a:defRPr>
+            </a:lvl4pPr>
+            <a:lvl5pPr marL="1828800" algn="l" defTabSz="914400" rtl="0" eaLnBrk="1" latinLnBrk="0" hangingPunct="1">
+              <a:defRPr sz="1800" kern="1200">
+                <a:solidFill>
+                  <a:schemeClr val="tx1"/>
+                </a:solidFill>
+                <a:latin typeface="+mn-lt"/>
+                <a:ea typeface="+mn-ea"/>
+                <a:cs typeface="+mn-cs"/>
+              </a:defRPr>
+            </a:lvl5pPr>
+            <a:lvl6pPr marL="2286000" algn="l" defTabSz="914400" rtl="0" eaLnBrk="1" latinLnBrk="0" hangingPunct="1">
+              <a:defRPr sz="1800" kern="1200">
+                <a:solidFill>
+                  <a:schemeClr val="tx1"/>
+                </a:solidFill>
+                <a:latin typeface="+mn-lt"/>
+                <a:ea typeface="+mn-ea"/>
+                <a:cs typeface="+mn-cs"/>
+              </a:defRPr>
+            </a:lvl6pPr>
+            <a:lvl7pPr marL="2743200" algn="l" defTabSz="914400" rtl="0" eaLnBrk="1" latinLnBrk="0" hangingPunct="1">
+              <a:defRPr sz="1800" kern="1200">
+                <a:solidFill>
+                  <a:schemeClr val="tx1"/>
+                </a:solidFill>
+                <a:latin typeface="+mn-lt"/>
+                <a:ea typeface="+mn-ea"/>
+                <a:cs typeface="+mn-cs"/>
+              </a:defRPr>
+            </a:lvl7pPr>
+            <a:lvl8pPr marL="3200400" algn="l" defTabSz="914400" rtl="0" eaLnBrk="1" latinLnBrk="0" hangingPunct="1">
+              <a:defRPr sz="1800" kern="1200">
+                <a:solidFill>
+                  <a:schemeClr val="tx1"/>
+                </a:solidFill>
+                <a:latin typeface="+mn-lt"/>
+                <a:ea typeface="+mn-ea"/>
+                <a:cs typeface="+mn-cs"/>
+              </a:defRPr>
+            </a:lvl8pPr>
+            <a:lvl9pPr marL="3657600" algn="l" defTabSz="914400" rtl="0" eaLnBrk="1" latinLnBrk="0" hangingPunct="1">
+              <a:defRPr sz="1800" kern="1200">
+                <a:solidFill>
+                  <a:schemeClr val="tx1"/>
+                </a:solidFill>
+                <a:latin typeface="+mn-lt"/>
+                <a:ea typeface="+mn-ea"/>
+                <a:cs typeface="+mn-cs"/>
+              </a:defRPr>
+            </a:lvl9pPr>
+          </a:lstStyle>
+          <a:p>
+            <a:pPr marL="0" marR="0" lvl="0" indent="0" algn="ctr" defTabSz="914400" rtl="0" eaLnBrk="1" fontAlgn="auto" latinLnBrk="0" hangingPunct="1">
+              <a:lnSpc>
+                <a:spcPct val="100000"/>
+              </a:lnSpc>
+              <a:spcBef>
+                <a:spcPts val="0"/>
+              </a:spcBef>
+              <a:spcAft>
+                <a:spcPts val="0"/>
+              </a:spcAft>
+              <a:buClrTx/>
+              <a:buSzTx/>
+              <a:buFontTx/>
+              <a:buNone/>
+              <a:tabLst/>
+              <a:defRPr/>
+            </a:pPr>
+            <a:r>
+              <a:rPr kumimoji="0" lang="en-US" sz="1200" b="0" i="0" u="none" strike="noStrike" kern="1200" cap="none" spc="0" normalizeH="0" baseline="0" noProof="0" dirty="0">
+                <a:ln>
+                  <a:noFill/>
+                </a:ln>
+                <a:solidFill>
+                  <a:prstClr val="black">
+                    <a:tint val="75000"/>
+                  </a:prstClr>
+                </a:solidFill>
+                <a:effectLst/>
+                <a:uLnTx/>
+                <a:uFillTx/>
+                <a:latin typeface="Helvetica Neue" panose="02000503000000020004" pitchFamily="2" charset="0"/>
+                <a:ea typeface="Helvetica Neue" panose="02000503000000020004" pitchFamily="2" charset="0"/>
+                <a:cs typeface="Helvetica Neue" panose="02000503000000020004" pitchFamily="2" charset="0"/>
+              </a:rPr>
+              <a:t>architrino.com</a:t>
+            </a:r>
+          </a:p>
+        </p:txBody>
+      </p:sp>
     </p:spTree>
     <p:extLst>
       <p:ext uri="{BB962C8B-B14F-4D97-AF65-F5344CB8AC3E}">
-        <p14:creationId xmlns:p14="http://schemas.microsoft.com/office/powerpoint/2010/main" val="3042329805"/>
+        <ns3:creationId val="3042329805"/>
       </p:ext>
     </p:extLst>
   </p:cSld>
